--- a/Week 10/10 - Generative Text Models.pptx
+++ b/Week 10/10 - Generative Text Models.pptx
@@ -5,56 +5,55 @@
     <p:sldMasterId id="2147483648" r:id="rId1"/>
   </p:sldMasterIdLst>
   <p:notesMasterIdLst>
-    <p:notesMasterId r:id="rId20"/>
+    <p:notesMasterId r:id="rId19"/>
   </p:notesMasterIdLst>
   <p:sldIdLst>
     <p:sldId id="256" r:id="rId2"/>
-    <p:sldId id="259" r:id="rId3"/>
-    <p:sldId id="260" r:id="rId4"/>
-    <p:sldId id="261" r:id="rId5"/>
-    <p:sldId id="264" r:id="rId6"/>
-    <p:sldId id="265" r:id="rId7"/>
-    <p:sldId id="266" r:id="rId8"/>
-    <p:sldId id="267" r:id="rId9"/>
-    <p:sldId id="293" r:id="rId10"/>
-    <p:sldId id="268" r:id="rId11"/>
-    <p:sldId id="294" r:id="rId12"/>
-    <p:sldId id="269" r:id="rId13"/>
-    <p:sldId id="270" r:id="rId14"/>
-    <p:sldId id="274" r:id="rId15"/>
-    <p:sldId id="275" r:id="rId16"/>
-    <p:sldId id="277" r:id="rId17"/>
-    <p:sldId id="278" r:id="rId18"/>
-    <p:sldId id="292" r:id="rId19"/>
+    <p:sldId id="257" r:id="rId3"/>
+    <p:sldId id="258" r:id="rId4"/>
+    <p:sldId id="259" r:id="rId5"/>
+    <p:sldId id="260" r:id="rId6"/>
+    <p:sldId id="261" r:id="rId7"/>
+    <p:sldId id="262" r:id="rId8"/>
+    <p:sldId id="263" r:id="rId9"/>
+    <p:sldId id="264" r:id="rId10"/>
+    <p:sldId id="265" r:id="rId11"/>
+    <p:sldId id="266" r:id="rId12"/>
+    <p:sldId id="267" r:id="rId13"/>
+    <p:sldId id="268" r:id="rId14"/>
+    <p:sldId id="269" r:id="rId15"/>
+    <p:sldId id="270" r:id="rId16"/>
+    <p:sldId id="271" r:id="rId17"/>
+    <p:sldId id="274" r:id="rId18"/>
   </p:sldIdLst>
   <p:sldSz cx="12192000" cy="6858000"/>
   <p:notesSz cx="6858000" cy="9144000"/>
   <p:embeddedFontLst>
     <p:embeddedFont>
       <p:font typeface="Consolas" panose="020B0609020204030204" pitchFamily="49" charset="0"/>
-      <p:regular r:id="rId21"/>
-      <p:bold r:id="rId22"/>
-      <p:italic r:id="rId23"/>
-      <p:boldItalic r:id="rId24"/>
+      <p:regular r:id="rId20"/>
+      <p:bold r:id="rId21"/>
+      <p:italic r:id="rId22"/>
+      <p:boldItalic r:id="rId23"/>
     </p:embeddedFont>
     <p:embeddedFont>
       <p:font typeface="Economica" panose="02000506040000020004" pitchFamily="2" charset="77"/>
-      <p:regular r:id="rId25"/>
-      <p:bold r:id="rId26"/>
-      <p:italic r:id="rId27"/>
-      <p:boldItalic r:id="rId28"/>
+      <p:regular r:id="rId24"/>
+      <p:bold r:id="rId25"/>
+      <p:italic r:id="rId26"/>
+      <p:boldItalic r:id="rId27"/>
     </p:embeddedFont>
     <p:embeddedFont>
       <p:font typeface="Quicksand" pitchFamily="2" charset="77"/>
-      <p:regular r:id="rId29"/>
-      <p:bold r:id="rId30"/>
+      <p:regular r:id="rId28"/>
+      <p:bold r:id="rId29"/>
     </p:embeddedFont>
     <p:embeddedFont>
       <p:font typeface="Roboto" panose="02000000000000000000" pitchFamily="2" charset="0"/>
-      <p:regular r:id="rId31"/>
-      <p:bold r:id="rId32"/>
-      <p:italic r:id="rId33"/>
-      <p:boldItalic r:id="rId34"/>
+      <p:regular r:id="rId30"/>
+      <p:bold r:id="rId31"/>
+      <p:italic r:id="rId32"/>
+      <p:boldItalic r:id="rId33"/>
     </p:embeddedFont>
   </p:embeddedFontLst>
   <p:defaultTextStyle>
@@ -287,11 +286,8 @@
     </a:lvl9pPr>
   </p:defaultTextStyle>
   <p:extLst>
-    <p:ext uri="{EFAFB233-063F-42B5-8137-9DF3F51BA10A}">
-      <p15:sldGuideLst xmlns:p15="http://schemas.microsoft.com/office/powerpoint/2012/main"/>
-    </p:ext>
     <p:ext uri="GoogleSlidesCustomDataVersion2">
-      <go:slidesCustomData xmlns="" xmlns:mc="http://schemas.openxmlformats.org/markup-compatibility/2006" xmlns:mv="urn:schemas-microsoft-com:mac:vml" xmlns:c="http://schemas.openxmlformats.org/drawingml/2006/chart" xmlns:dgm="http://schemas.openxmlformats.org/drawingml/2006/diagram" xmlns:o="urn:schemas-microsoft-com:office:office" xmlns:v="urn:schemas-microsoft-com:vml" xmlns:pvml="urn:schemas-microsoft-com:office:powerpoint" xmlns:com="http://schemas.openxmlformats.org/drawingml/2006/compatibility" xmlns:p14="http://schemas.microsoft.com/office/powerpoint/2010/main" xmlns:p15="http://schemas.microsoft.com/office/powerpoint/2012/main" xmlns:ahyp="http://schemas.microsoft.com/office/drawing/2018/hyperlinkcolor" xmlns:go="http://customooxmlschemas.google.com/" r:id="rId51" roundtripDataSignature="AMtx7mg4MTa/PFjWeeH+1PYiaQkpJn1TrA=="/>
+      <go:slidesCustomData xmlns:go="http://customooxmlschemas.google.com/" xmlns:ahyp="http://schemas.microsoft.com/office/drawing/2018/hyperlinkcolor" xmlns:p15="http://schemas.microsoft.com/office/powerpoint/2012/main" xmlns:p14="http://schemas.microsoft.com/office/powerpoint/2010/main" xmlns:com="http://schemas.openxmlformats.org/drawingml/2006/compatibility" xmlns:pvml="urn:schemas-microsoft-com:office:powerpoint" xmlns:v="urn:schemas-microsoft-com:vml" xmlns:o="urn:schemas-microsoft-com:office:office" xmlns:dgm="http://schemas.openxmlformats.org/drawingml/2006/diagram" xmlns:c="http://schemas.openxmlformats.org/drawingml/2006/chart" xmlns:mv="urn:schemas-microsoft-com:mac:vml" xmlns:mc="http://schemas.openxmlformats.org/markup-compatibility/2006" xmlns="" r:id="rId34" roundtripDataSignature="AMtx7mgLyaUx4xKXTi69voR3m2lGU76l4w=="/>
     </p:ext>
   </p:extLst>
 </p:presentation>
@@ -1877,7 +1873,7 @@
   <p:cSld>
     <p:spTree>
       <p:nvGrpSpPr>
-        <p:cNvPr id="1" name="Shape 166"/>
+        <p:cNvPr id="1" name="Shape 145"/>
         <p:cNvGrpSpPr/>
         <p:nvPr/>
       </p:nvGrpSpPr>
@@ -1891,7 +1887,7 @@
       </p:grpSpPr>
       <p:sp>
         <p:nvSpPr>
-          <p:cNvPr id="167" name="Google Shape;167;p41:notes"/>
+          <p:cNvPr id="146" name="Google Shape;146;p10:notes"/>
           <p:cNvSpPr txBox="1">
             <a:spLocks noGrp="1"/>
           </p:cNvSpPr>
@@ -1937,7 +1933,7 @@
       </p:sp>
       <p:sp>
         <p:nvSpPr>
-          <p:cNvPr id="168" name="Google Shape;168;p41:notes"/>
+          <p:cNvPr id="147" name="Google Shape;147;p10:notes"/>
           <p:cNvSpPr>
             <a:spLocks noGrp="1" noRot="1" noChangeAspect="1"/>
           </p:cNvSpPr>
@@ -1995,11 +1991,11 @@
 </file>
 
 <file path=ppt/notesSlides/notesSlide11.xml><?xml version="1.0" encoding="utf-8"?>
-<p:notes xmlns:a="http://schemas.openxmlformats.org/drawingml/2006/main" xmlns:r="http://schemas.openxmlformats.org/officeDocument/2006/relationships" xmlns:p="http://schemas.openxmlformats.org/presentationml/2006/main">
+<p:notes xmlns:a="http://schemas.openxmlformats.org/drawingml/2006/main" xmlns:r="http://schemas.openxmlformats.org/officeDocument/2006/relationships" xmlns:p="http://schemas.openxmlformats.org/presentationml/2006/main" showMasterSp="0" showMasterPhAnim="0">
   <p:cSld>
     <p:spTree>
       <p:nvGrpSpPr>
-        <p:cNvPr id="1" name=""/>
+        <p:cNvPr id="1" name="Shape 152"/>
         <p:cNvGrpSpPr/>
         <p:nvPr/>
       </p:nvGrpSpPr>
@@ -2013,51 +2009,136 @@
       </p:grpSpPr>
       <p:sp>
         <p:nvSpPr>
-          <p:cNvPr id="2" name="Slide Image Placeholder 1"/>
+          <p:cNvPr id="153" name="Google Shape;153;p11:notes"/>
           <p:cNvSpPr>
             <a:spLocks noGrp="1" noRot="1" noChangeAspect="1"/>
           </p:cNvSpPr>
           <p:nvPr>
-            <p:ph type="sldImg"/>
+            <p:ph type="sldImg" idx="2"/>
           </p:nvPr>
         </p:nvSpPr>
-        <p:spPr/>
+        <p:spPr>
+          <a:xfrm>
+            <a:off x="685800" y="1143000"/>
+            <a:ext cx="5486400" cy="3086100"/>
+          </a:xfrm>
+          <a:custGeom>
+            <a:avLst/>
+            <a:gdLst/>
+            <a:ahLst/>
+            <a:cxnLst/>
+            <a:rect l="l" t="t" r="r" b="b"/>
+            <a:pathLst>
+              <a:path w="120000" h="120000" extrusionOk="0">
+                <a:moveTo>
+                  <a:pt x="0" y="0"/>
+                </a:moveTo>
+                <a:lnTo>
+                  <a:pt x="120000" y="0"/>
+                </a:lnTo>
+                <a:lnTo>
+                  <a:pt x="120000" y="120000"/>
+                </a:lnTo>
+                <a:lnTo>
+                  <a:pt x="0" y="120000"/>
+                </a:lnTo>
+                <a:close/>
+              </a:path>
+            </a:pathLst>
+          </a:custGeom>
+          <a:noFill/>
+          <a:ln w="12700" cap="flat" cmpd="sng">
+            <a:solidFill>
+              <a:srgbClr val="000000"/>
+            </a:solidFill>
+            <a:prstDash val="solid"/>
+            <a:round/>
+            <a:headEnd type="none" w="sm" len="sm"/>
+            <a:tailEnd type="none" w="sm" len="sm"/>
+          </a:ln>
+        </p:spPr>
       </p:sp>
       <p:sp>
         <p:nvSpPr>
-          <p:cNvPr id="3" name="Notes Placeholder 2"/>
-          <p:cNvSpPr>
+          <p:cNvPr id="154" name="Google Shape;154;p11:notes"/>
+          <p:cNvSpPr txBox="1">
             <a:spLocks noGrp="1"/>
           </p:cNvSpPr>
           <p:nvPr>
             <p:ph type="body" idx="1"/>
           </p:nvPr>
         </p:nvSpPr>
-        <p:spPr/>
+        <p:spPr>
+          <a:xfrm>
+            <a:off x="685800" y="4400550"/>
+            <a:ext cx="5486400" cy="3600450"/>
+          </a:xfrm>
+          <a:prstGeom prst="rect">
+            <a:avLst/>
+          </a:prstGeom>
+          <a:noFill/>
+          <a:ln>
+            <a:noFill/>
+          </a:ln>
+        </p:spPr>
         <p:txBody>
-          <a:bodyPr/>
+          <a:bodyPr spcFirstLastPara="1" wrap="square" lIns="91425" tIns="45700" rIns="91425" bIns="45700" anchor="t" anchorCtr="0">
+            <a:noAutofit/>
+          </a:bodyPr>
           <a:lstStyle/>
           <a:p>
+            <a:pPr marL="457200" marR="0" lvl="0" indent="-228600" algn="l" rtl="0">
+              <a:lnSpc>
+                <a:spcPct val="100000"/>
+              </a:lnSpc>
+              <a:spcBef>
+                <a:spcPts val="0"/>
+              </a:spcBef>
+              <a:spcAft>
+                <a:spcPts val="0"/>
+              </a:spcAft>
+              <a:buClr>
+                <a:srgbClr val="000000"/>
+              </a:buClr>
+              <a:buSzPts val="1400"/>
+              <a:buFont typeface="Arial"/>
+              <a:buNone/>
+            </a:pPr>
             <a:r>
-              <a:rPr lang="en-US" dirty="0"/>
+              <a:rPr lang="en-US"/>
               <a:t>Note: we do something similar with a transformer. The difference, however, is that transformers do not process in sequence. As such, instead, we include a ‘causal mask’, such that predictions at different points in the sequence are made based on attention that ignores tokens later in the sequence. This forces the model to only consider information it will have at inference time.</a:t>
             </a:r>
+            <a:endParaRPr/>
           </a:p>
         </p:txBody>
       </p:sp>
       <p:sp>
         <p:nvSpPr>
-          <p:cNvPr id="4" name="Slide Number Placeholder 3"/>
-          <p:cNvSpPr>
+          <p:cNvPr id="155" name="Google Shape;155;p11:notes"/>
+          <p:cNvSpPr txBox="1">
             <a:spLocks noGrp="1"/>
           </p:cNvSpPr>
           <p:nvPr>
             <p:ph type="sldNum" idx="12"/>
           </p:nvPr>
         </p:nvSpPr>
-        <p:spPr/>
+        <p:spPr>
+          <a:xfrm>
+            <a:off x="3884613" y="8685213"/>
+            <a:ext cx="2971800" cy="458787"/>
+          </a:xfrm>
+          <a:prstGeom prst="rect">
+            <a:avLst/>
+          </a:prstGeom>
+          <a:noFill/>
+          <a:ln>
+            <a:noFill/>
+          </a:ln>
+        </p:spPr>
         <p:txBody>
-          <a:bodyPr/>
+          <a:bodyPr spcFirstLastPara="1" wrap="square" lIns="91425" tIns="45700" rIns="91425" bIns="45700" anchor="b" anchorCtr="0">
+            <a:noAutofit/>
+          </a:bodyPr>
           <a:lstStyle/>
           <a:p>
             <a:pPr marL="0" marR="0" lvl="0" indent="0" algn="r" rtl="0">
@@ -2078,7 +2159,7 @@
               <a:buNone/>
             </a:pPr>
             <a:fld id="{00000000-1234-1234-1234-123412341234}" type="slidenum">
-              <a:rPr lang="en-US" sz="1200" b="0" i="0" u="none" strike="noStrike" cap="none" smtClean="0">
+              <a:rPr lang="en-US" sz="1200" b="0" i="0" u="none" strike="noStrike" cap="none">
                 <a:solidFill>
                   <a:schemeClr val="dk1"/>
                 </a:solidFill>
@@ -2089,7 +2170,7 @@
               </a:rPr>
               <a:t>11</a:t>
             </a:fld>
-            <a:endParaRPr lang="en-US" sz="1200" b="0" i="0" u="none" strike="noStrike" cap="none">
+            <a:endParaRPr sz="1200" b="0" i="0" u="none" strike="noStrike" cap="none">
               <a:solidFill>
                 <a:schemeClr val="dk1"/>
               </a:solidFill>
@@ -2102,11 +2183,6 @@
         </p:txBody>
       </p:sp>
     </p:spTree>
-    <p:extLst>
-      <p:ext uri="{BB962C8B-B14F-4D97-AF65-F5344CB8AC3E}">
-        <p14:creationId xmlns:p14="http://schemas.microsoft.com/office/powerpoint/2010/main" val="2313789029"/>
-      </p:ext>
-    </p:extLst>
   </p:cSld>
   <p:clrMapOvr>
     <a:masterClrMapping/>
@@ -2119,7 +2195,7 @@
   <p:cSld>
     <p:spTree>
       <p:nvGrpSpPr>
-        <p:cNvPr id="1" name="Shape 173"/>
+        <p:cNvPr id="1" name="Shape 160"/>
         <p:cNvGrpSpPr/>
         <p:nvPr/>
       </p:nvGrpSpPr>
@@ -2133,7 +2209,7 @@
       </p:grpSpPr>
       <p:sp>
         <p:nvSpPr>
-          <p:cNvPr id="174" name="Google Shape;174;p42:notes"/>
+          <p:cNvPr id="161" name="Google Shape;161;p12:notes"/>
           <p:cNvSpPr txBox="1">
             <a:spLocks noGrp="1"/>
           </p:cNvSpPr>
@@ -2179,7 +2255,7 @@
       </p:sp>
       <p:sp>
         <p:nvSpPr>
-          <p:cNvPr id="175" name="Google Shape;175;p42:notes"/>
+          <p:cNvPr id="162" name="Google Shape;162;p12:notes"/>
           <p:cNvSpPr>
             <a:spLocks noGrp="1" noRot="1" noChangeAspect="1"/>
           </p:cNvSpPr>
@@ -2241,7 +2317,7 @@
   <p:cSld>
     <p:spTree>
       <p:nvGrpSpPr>
-        <p:cNvPr id="1" name="Shape 181"/>
+        <p:cNvPr id="1" name="Shape 167"/>
         <p:cNvGrpSpPr/>
         <p:nvPr/>
       </p:nvGrpSpPr>
@@ -2255,7 +2331,7 @@
       </p:grpSpPr>
       <p:sp>
         <p:nvSpPr>
-          <p:cNvPr id="182" name="Google Shape;182;p43:notes"/>
+          <p:cNvPr id="168" name="Google Shape;168;p13:notes"/>
           <p:cNvSpPr txBox="1">
             <a:spLocks noGrp="1"/>
           </p:cNvSpPr>
@@ -2271,10 +2347,6 @@
           <a:prstGeom prst="rect">
             <a:avLst/>
           </a:prstGeom>
-          <a:noFill/>
-          <a:ln>
-            <a:noFill/>
-          </a:ln>
         </p:spPr>
         <p:txBody>
           <a:bodyPr spcFirstLastPara="1" wrap="square" lIns="91425" tIns="45700" rIns="91425" bIns="45700" anchor="t" anchorCtr="0">
@@ -2283,16 +2355,12 @@
           <a:lstStyle/>
           <a:p>
             <a:pPr marL="0" lvl="0" indent="0" algn="l" rtl="0">
-              <a:lnSpc>
-                <a:spcPct val="100000"/>
-              </a:lnSpc>
-              <a:spcBef>
-                <a:spcPts val="0"/>
-              </a:spcBef>
-              <a:spcAft>
-                <a:spcPts val="0"/>
-              </a:spcAft>
-              <a:buSzPts val="1400"/>
+              <a:spcBef>
+                <a:spcPts val="0"/>
+              </a:spcBef>
+              <a:spcAft>
+                <a:spcPts val="0"/>
+              </a:spcAft>
               <a:buNone/>
             </a:pPr>
             <a:endParaRPr/>
@@ -2301,7 +2369,7 @@
       </p:sp>
       <p:sp>
         <p:nvSpPr>
-          <p:cNvPr id="183" name="Google Shape;183;p43:notes"/>
+          <p:cNvPr id="169" name="Google Shape;169;p13:notes"/>
           <p:cNvSpPr>
             <a:spLocks noGrp="1" noRot="1" noChangeAspect="1"/>
           </p:cNvSpPr>
@@ -2338,16 +2406,6 @@
               </a:path>
             </a:pathLst>
           </a:custGeom>
-          <a:noFill/>
-          <a:ln w="12700" cap="flat" cmpd="sng">
-            <a:solidFill>
-              <a:srgbClr val="000000"/>
-            </a:solidFill>
-            <a:prstDash val="solid"/>
-            <a:round/>
-            <a:headEnd type="none" w="sm" len="sm"/>
-            <a:tailEnd type="none" w="sm" len="sm"/>
-          </a:ln>
         </p:spPr>
       </p:sp>
     </p:spTree>
@@ -2363,7 +2421,7 @@
   <p:cSld>
     <p:spTree>
       <p:nvGrpSpPr>
-        <p:cNvPr id="1" name="Shape 206"/>
+        <p:cNvPr id="1" name="Shape 173"/>
         <p:cNvGrpSpPr/>
         <p:nvPr/>
       </p:nvGrpSpPr>
@@ -2377,7 +2435,7 @@
       </p:grpSpPr>
       <p:sp>
         <p:nvSpPr>
-          <p:cNvPr id="207" name="Google Shape;207;p47:notes"/>
+          <p:cNvPr id="174" name="Google Shape;174;p16:notes"/>
           <p:cNvSpPr txBox="1">
             <a:spLocks noGrp="1"/>
           </p:cNvSpPr>
@@ -2417,17 +2475,13 @@
               <a:buSzPts val="1400"/>
               <a:buNone/>
             </a:pPr>
-            <a:r>
-              <a:rPr lang="en-US"/>
-              <a:t>The host of issues is very extensive. Be careful what intelligence you ascribe to these models, or what you trust them to do. </a:t>
-            </a:r>
             <a:endParaRPr/>
           </a:p>
         </p:txBody>
       </p:sp>
       <p:sp>
         <p:nvSpPr>
-          <p:cNvPr id="208" name="Google Shape;208;p47:notes"/>
+          <p:cNvPr id="175" name="Google Shape;175;p16:notes"/>
           <p:cNvSpPr>
             <a:spLocks noGrp="1" noRot="1" noChangeAspect="1"/>
           </p:cNvSpPr>
@@ -2489,7 +2543,7 @@
   <p:cSld>
     <p:spTree>
       <p:nvGrpSpPr>
-        <p:cNvPr id="1" name="Shape 213"/>
+        <p:cNvPr id="1" name="Shape 180"/>
         <p:cNvGrpSpPr/>
         <p:nvPr/>
       </p:nvGrpSpPr>
@@ -2503,7 +2557,7 @@
       </p:grpSpPr>
       <p:sp>
         <p:nvSpPr>
-          <p:cNvPr id="214" name="Google Shape;214;p48:notes"/>
+          <p:cNvPr id="181" name="Google Shape;181;p17:notes"/>
           <p:cNvSpPr txBox="1">
             <a:spLocks noGrp="1"/>
           </p:cNvSpPr>
@@ -2543,13 +2597,17 @@
               <a:buSzPts val="1400"/>
               <a:buNone/>
             </a:pPr>
+            <a:r>
+              <a:rPr lang="en-US"/>
+              <a:t>The host of issues is very extensive. Be careful what intelligence you ascribe to these models, or what you trust them to do. </a:t>
+            </a:r>
             <a:endParaRPr/>
           </a:p>
         </p:txBody>
       </p:sp>
       <p:sp>
         <p:nvSpPr>
-          <p:cNvPr id="215" name="Google Shape;215;p48:notes"/>
+          <p:cNvPr id="182" name="Google Shape;182;p17:notes"/>
           <p:cNvSpPr>
             <a:spLocks noGrp="1" noRot="1" noChangeAspect="1"/>
           </p:cNvSpPr>
@@ -2611,7 +2669,7 @@
   <p:cSld>
     <p:spTree>
       <p:nvGrpSpPr>
-        <p:cNvPr id="1" name="Shape 227"/>
+        <p:cNvPr id="1" name="Shape 187"/>
         <p:cNvGrpSpPr/>
         <p:nvPr/>
       </p:nvGrpSpPr>
@@ -2625,7 +2683,7 @@
       </p:grpSpPr>
       <p:sp>
         <p:nvSpPr>
-          <p:cNvPr id="228" name="Google Shape;228;p50:notes"/>
+          <p:cNvPr id="188" name="Google Shape;188;p18:notes"/>
           <p:cNvSpPr txBox="1">
             <a:spLocks noGrp="1"/>
           </p:cNvSpPr>
@@ -2671,7 +2729,7 @@
       </p:sp>
       <p:sp>
         <p:nvSpPr>
-          <p:cNvPr id="229" name="Google Shape;229;p50:notes"/>
+          <p:cNvPr id="189" name="Google Shape;189;p18:notes"/>
           <p:cNvSpPr>
             <a:spLocks noGrp="1" noRot="1" noChangeAspect="1"/>
           </p:cNvSpPr>
@@ -2733,7 +2791,7 @@
   <p:cSld>
     <p:spTree>
       <p:nvGrpSpPr>
-        <p:cNvPr id="1" name="Shape 234"/>
+        <p:cNvPr id="1" name="Shape 208"/>
         <p:cNvGrpSpPr/>
         <p:nvPr/>
       </p:nvGrpSpPr>
@@ -2747,141 +2805,7 @@
       </p:grpSpPr>
       <p:sp>
         <p:nvSpPr>
-          <p:cNvPr id="235" name="Google Shape;235;p51:notes"/>
-          <p:cNvSpPr txBox="1">
-            <a:spLocks noGrp="1"/>
-          </p:cNvSpPr>
-          <p:nvPr>
-            <p:ph type="body" idx="1"/>
-          </p:nvPr>
-        </p:nvSpPr>
-        <p:spPr>
-          <a:xfrm>
-            <a:off x="685800" y="4400550"/>
-            <a:ext cx="5486400" cy="3600450"/>
-          </a:xfrm>
-          <a:prstGeom prst="rect">
-            <a:avLst/>
-          </a:prstGeom>
-          <a:noFill/>
-          <a:ln>
-            <a:noFill/>
-          </a:ln>
-        </p:spPr>
-        <p:txBody>
-          <a:bodyPr spcFirstLastPara="1" wrap="square" lIns="91425" tIns="45700" rIns="91425" bIns="45700" anchor="t" anchorCtr="0">
-            <a:noAutofit/>
-          </a:bodyPr>
-          <a:lstStyle/>
-          <a:p>
-            <a:pPr marL="0" lvl="0" indent="0" algn="l" rtl="0">
-              <a:lnSpc>
-                <a:spcPct val="100000"/>
-              </a:lnSpc>
-              <a:spcBef>
-                <a:spcPts val="0"/>
-              </a:spcBef>
-              <a:spcAft>
-                <a:spcPts val="0"/>
-              </a:spcAft>
-              <a:buSzPts val="1400"/>
-              <a:buNone/>
-            </a:pPr>
-            <a:endParaRPr/>
-          </a:p>
-        </p:txBody>
-      </p:sp>
-      <p:sp>
-        <p:nvSpPr>
-          <p:cNvPr id="236" name="Google Shape;236;p51:notes"/>
-          <p:cNvSpPr>
-            <a:spLocks noGrp="1" noRot="1" noChangeAspect="1"/>
-          </p:cNvSpPr>
-          <p:nvPr>
-            <p:ph type="sldImg" idx="2"/>
-          </p:nvPr>
-        </p:nvSpPr>
-        <p:spPr>
-          <a:xfrm>
-            <a:off x="685800" y="1143000"/>
-            <a:ext cx="5486400" cy="3086100"/>
-          </a:xfrm>
-          <a:custGeom>
-            <a:avLst/>
-            <a:gdLst/>
-            <a:ahLst/>
-            <a:cxnLst/>
-            <a:rect l="l" t="t" r="r" b="b"/>
-            <a:pathLst>
-              <a:path w="120000" h="120000" extrusionOk="0">
-                <a:moveTo>
-                  <a:pt x="0" y="0"/>
-                </a:moveTo>
-                <a:lnTo>
-                  <a:pt x="120000" y="0"/>
-                </a:lnTo>
-                <a:lnTo>
-                  <a:pt x="120000" y="120000"/>
-                </a:lnTo>
-                <a:lnTo>
-                  <a:pt x="0" y="120000"/>
-                </a:lnTo>
-                <a:close/>
-              </a:path>
-            </a:pathLst>
-          </a:custGeom>
-          <a:noFill/>
-          <a:ln w="12700" cap="flat" cmpd="sng">
-            <a:solidFill>
-              <a:srgbClr val="000000"/>
-            </a:solidFill>
-            <a:prstDash val="solid"/>
-            <a:round/>
-            <a:headEnd type="none" w="sm" len="sm"/>
-            <a:tailEnd type="none" w="sm" len="sm"/>
-          </a:ln>
-        </p:spPr>
-      </p:sp>
-    </p:spTree>
-  </p:cSld>
-  <p:clrMapOvr>
-    <a:masterClrMapping/>
-  </p:clrMapOvr>
-</p:notes>
-</file>
-
-<file path=ppt/notesSlides/notesSlide18.xml><?xml version="1.0" encoding="utf-8"?>
-<p:notes xmlns:a="http://schemas.openxmlformats.org/drawingml/2006/main" xmlns:r="http://schemas.openxmlformats.org/officeDocument/2006/relationships" xmlns:p="http://schemas.openxmlformats.org/presentationml/2006/main" showMasterSp="0" showMasterPhAnim="0">
-  <p:cSld>
-    <p:spTree>
-      <p:nvGrpSpPr>
-        <p:cNvPr id="1" name="Shape 335">
-          <a:extLst>
-            <a:ext uri="{FF2B5EF4-FFF2-40B4-BE49-F238E27FC236}">
-              <a16:creationId xmlns:a16="http://schemas.microsoft.com/office/drawing/2014/main" id="{1D678F0F-A4EE-1000-3ABF-3594198B22AA}"/>
-            </a:ext>
-          </a:extLst>
-        </p:cNvPr>
-        <p:cNvGrpSpPr/>
-        <p:nvPr/>
-      </p:nvGrpSpPr>
-      <p:grpSpPr>
-        <a:xfrm>
-          <a:off x="0" y="0"/>
-          <a:ext cx="0" cy="0"/>
-          <a:chOff x="0" y="0"/>
-          <a:chExt cx="0" cy="0"/>
-        </a:xfrm>
-      </p:grpSpPr>
-      <p:sp>
-        <p:nvSpPr>
-          <p:cNvPr id="336" name="Google Shape;336;p17:notes">
-            <a:extLst>
-              <a:ext uri="{FF2B5EF4-FFF2-40B4-BE49-F238E27FC236}">
-                <a16:creationId xmlns:a16="http://schemas.microsoft.com/office/drawing/2014/main" id="{446C043D-1276-A0D8-8EE8-78E9577003F9}"/>
-              </a:ext>
-            </a:extLst>
-          </p:cNvPr>
+          <p:cNvPr id="209" name="Google Shape;209;p21:notes"/>
           <p:cNvSpPr>
             <a:spLocks noGrp="1" noRot="1" noChangeAspect="1"/>
           </p:cNvSpPr>
@@ -2932,13 +2856,7 @@
       </p:sp>
       <p:sp>
         <p:nvSpPr>
-          <p:cNvPr id="337" name="Google Shape;337;p17:notes">
-            <a:extLst>
-              <a:ext uri="{FF2B5EF4-FFF2-40B4-BE49-F238E27FC236}">
-                <a16:creationId xmlns:a16="http://schemas.microsoft.com/office/drawing/2014/main" id="{D698BD29-8F39-A046-55BF-9D215E4F90D1}"/>
-              </a:ext>
-            </a:extLst>
-          </p:cNvPr>
+          <p:cNvPr id="210" name="Google Shape;210;p21:notes"/>
           <p:cNvSpPr txBox="1">
             <a:spLocks noGrp="1"/>
           </p:cNvSpPr>
@@ -2988,13 +2906,7 @@
       </p:sp>
       <p:sp>
         <p:nvSpPr>
-          <p:cNvPr id="338" name="Google Shape;338;p17:notes">
-            <a:extLst>
-              <a:ext uri="{FF2B5EF4-FFF2-40B4-BE49-F238E27FC236}">
-                <a16:creationId xmlns:a16="http://schemas.microsoft.com/office/drawing/2014/main" id="{C831F1A4-6BB5-4C40-C83D-73565886A644}"/>
-              </a:ext>
-            </a:extLst>
-          </p:cNvPr>
+          <p:cNvPr id="211" name="Google Shape;211;p21:notes"/>
           <p:cNvSpPr txBox="1">
             <a:spLocks noGrp="1"/>
           </p:cNvSpPr>
@@ -3036,18 +2948,13 @@
             </a:pPr>
             <a:fld id="{00000000-1234-1234-1234-123412341234}" type="slidenum">
               <a:rPr lang="en-US"/>
-              <a:t>18</a:t>
+              <a:t>17</a:t>
             </a:fld>
             <a:endParaRPr/>
           </a:p>
         </p:txBody>
       </p:sp>
     </p:spTree>
-    <p:extLst>
-      <p:ext uri="{BB962C8B-B14F-4D97-AF65-F5344CB8AC3E}">
-        <p14:creationId xmlns:p14="http://schemas.microsoft.com/office/powerpoint/2010/main" val="3091883318"/>
-      </p:ext>
-    </p:extLst>
   </p:cSld>
   <p:clrMapOvr>
     <a:masterClrMapping/>
@@ -3060,7 +2967,7 @@
   <p:cSld>
     <p:spTree>
       <p:nvGrpSpPr>
-        <p:cNvPr id="1" name="Shape 104"/>
+        <p:cNvPr id="1" name="Shape 90"/>
         <p:cNvGrpSpPr/>
         <p:nvPr/>
       </p:nvGrpSpPr>
@@ -3074,7 +2981,7 @@
       </p:grpSpPr>
       <p:sp>
         <p:nvSpPr>
-          <p:cNvPr id="105" name="Google Shape;105;g3a1cf8ce4d7_0_0:notes"/>
+          <p:cNvPr id="91" name="Google Shape;91;p2:notes"/>
           <p:cNvSpPr txBox="1">
             <a:spLocks noGrp="1"/>
           </p:cNvSpPr>
@@ -3120,7 +3027,7 @@
       </p:sp>
       <p:sp>
         <p:nvSpPr>
-          <p:cNvPr id="106" name="Google Shape;106;g3a1cf8ce4d7_0_0:notes"/>
+          <p:cNvPr id="92" name="Google Shape;92;p2:notes"/>
           <p:cNvSpPr>
             <a:spLocks noGrp="1" noRot="1" noChangeAspect="1"/>
           </p:cNvSpPr>
@@ -3182,7 +3089,7 @@
   <p:cSld>
     <p:spTree>
       <p:nvGrpSpPr>
-        <p:cNvPr id="1" name="Shape 111"/>
+        <p:cNvPr id="1" name="Shape 97"/>
         <p:cNvGrpSpPr/>
         <p:nvPr/>
       </p:nvGrpSpPr>
@@ -3196,7 +3103,7 @@
       </p:grpSpPr>
       <p:sp>
         <p:nvSpPr>
-          <p:cNvPr id="112" name="Google Shape;112;p33:notes"/>
+          <p:cNvPr id="98" name="Google Shape;98;p3:notes"/>
           <p:cNvSpPr txBox="1">
             <a:spLocks noGrp="1"/>
           </p:cNvSpPr>
@@ -3246,7 +3153,7 @@
       </p:sp>
       <p:sp>
         <p:nvSpPr>
-          <p:cNvPr id="113" name="Google Shape;113;p33:notes"/>
+          <p:cNvPr id="99" name="Google Shape;99;p3:notes"/>
           <p:cNvSpPr>
             <a:spLocks noGrp="1" noRot="1" noChangeAspect="1"/>
           </p:cNvSpPr>
@@ -3308,7 +3215,7 @@
   <p:cSld>
     <p:spTree>
       <p:nvGrpSpPr>
-        <p:cNvPr id="1" name="Shape 118"/>
+        <p:cNvPr id="1" name="Shape 104"/>
         <p:cNvGrpSpPr/>
         <p:nvPr/>
       </p:nvGrpSpPr>
@@ -3322,7 +3229,7 @@
       </p:grpSpPr>
       <p:sp>
         <p:nvSpPr>
-          <p:cNvPr id="119" name="Google Shape;119;p34:notes"/>
+          <p:cNvPr id="105" name="Google Shape;105;p4:notes"/>
           <p:cNvSpPr txBox="1">
             <a:spLocks noGrp="1"/>
           </p:cNvSpPr>
@@ -3372,7 +3279,7 @@
       </p:sp>
       <p:sp>
         <p:nvSpPr>
-          <p:cNvPr id="120" name="Google Shape;120;p34:notes"/>
+          <p:cNvPr id="106" name="Google Shape;106;p4:notes"/>
           <p:cNvSpPr>
             <a:spLocks noGrp="1" noRot="1" noChangeAspect="1"/>
           </p:cNvSpPr>
@@ -3434,7 +3341,7 @@
   <p:cSld>
     <p:spTree>
       <p:nvGrpSpPr>
-        <p:cNvPr id="1" name="Shape 138"/>
+        <p:cNvPr id="1" name="Shape 111"/>
         <p:cNvGrpSpPr/>
         <p:nvPr/>
       </p:nvGrpSpPr>
@@ -3448,7 +3355,7 @@
       </p:grpSpPr>
       <p:sp>
         <p:nvSpPr>
-          <p:cNvPr id="139" name="Google Shape;139;p37:notes"/>
+          <p:cNvPr id="112" name="Google Shape;112;p5:notes"/>
           <p:cNvSpPr txBox="1">
             <a:spLocks noGrp="1"/>
           </p:cNvSpPr>
@@ -3494,7 +3401,7 @@
       </p:sp>
       <p:sp>
         <p:nvSpPr>
-          <p:cNvPr id="140" name="Google Shape;140;p37:notes"/>
+          <p:cNvPr id="113" name="Google Shape;113;p5:notes"/>
           <p:cNvSpPr>
             <a:spLocks noGrp="1" noRot="1" noChangeAspect="1"/>
           </p:cNvSpPr>
@@ -3556,7 +3463,7 @@
   <p:cSld>
     <p:spTree>
       <p:nvGrpSpPr>
-        <p:cNvPr id="1" name="Shape 145"/>
+        <p:cNvPr id="1" name="Shape 118"/>
         <p:cNvGrpSpPr/>
         <p:nvPr/>
       </p:nvGrpSpPr>
@@ -3570,7 +3477,7 @@
       </p:grpSpPr>
       <p:sp>
         <p:nvSpPr>
-          <p:cNvPr id="146" name="Google Shape;146;p38:notes"/>
+          <p:cNvPr id="119" name="Google Shape;119;p6:notes"/>
           <p:cNvSpPr txBox="1">
             <a:spLocks noGrp="1"/>
           </p:cNvSpPr>
@@ -3597,15 +3504,42 @@
           </a:bodyPr>
           <a:lstStyle/>
           <a:p>
+            <a:pPr marL="457200" marR="0" lvl="0" indent="-228600" algn="l" rtl="0">
+              <a:lnSpc>
+                <a:spcPct val="100000"/>
+              </a:lnSpc>
+              <a:spcBef>
+                <a:spcPts val="0"/>
+              </a:spcBef>
+              <a:spcAft>
+                <a:spcPts val="0"/>
+              </a:spcAft>
+              <a:buClr>
+                <a:srgbClr val="000000"/>
+              </a:buClr>
+              <a:buSzPts val="1400"/>
+              <a:buFont typeface="Arial"/>
+              <a:buNone/>
+            </a:pPr>
             <a:r>
+              <a:rPr lang="en-US" sz="1200" b="0" i="0" u="none" strike="noStrike" cap="none">
+                <a:solidFill>
+                  <a:schemeClr val="dk1"/>
+                </a:solidFill>
+                <a:latin typeface="Calibri"/>
+                <a:ea typeface="Calibri"/>
+                <a:cs typeface="Calibri"/>
+                <a:sym typeface="Calibri"/>
+              </a:rPr>
               <a:t>TRANSITION: We've been looking at attention for generation (translation, next-token prediction). Now let's flip it — what if we use attention not to generate text, but to learn better representations of text? That's BERT.</a:t>
             </a:r>
+            <a:endParaRPr/>
           </a:p>
         </p:txBody>
       </p:sp>
       <p:sp>
         <p:nvSpPr>
-          <p:cNvPr id="147" name="Google Shape;147;p38:notes"/>
+          <p:cNvPr id="120" name="Google Shape;120;p6:notes"/>
           <p:cNvSpPr>
             <a:spLocks noGrp="1" noRot="1" noChangeAspect="1"/>
           </p:cNvSpPr>
@@ -3667,7 +3601,7 @@
   <p:cSld>
     <p:spTree>
       <p:nvGrpSpPr>
-        <p:cNvPr id="1" name="Shape 152"/>
+        <p:cNvPr id="1" name="Shape 125"/>
         <p:cNvGrpSpPr/>
         <p:nvPr/>
       </p:nvGrpSpPr>
@@ -3681,7 +3615,7 @@
       </p:grpSpPr>
       <p:sp>
         <p:nvSpPr>
-          <p:cNvPr id="153" name="Google Shape;153;p39:notes"/>
+          <p:cNvPr id="126" name="Google Shape;126;p7:notes"/>
           <p:cNvSpPr txBox="1">
             <a:spLocks noGrp="1"/>
           </p:cNvSpPr>
@@ -3731,7 +3665,7 @@
       </p:sp>
       <p:sp>
         <p:nvSpPr>
-          <p:cNvPr id="154" name="Google Shape;154;p39:notes"/>
+          <p:cNvPr id="127" name="Google Shape;127;p7:notes"/>
           <p:cNvSpPr>
             <a:spLocks noGrp="1" noRot="1" noChangeAspect="1"/>
           </p:cNvSpPr>
@@ -3793,7 +3727,7 @@
   <p:cSld>
     <p:spTree>
       <p:nvGrpSpPr>
-        <p:cNvPr id="1" name="Shape 159"/>
+        <p:cNvPr id="1" name="Shape 132"/>
         <p:cNvGrpSpPr/>
         <p:nvPr/>
       </p:nvGrpSpPr>
@@ -3807,7 +3741,7 @@
       </p:grpSpPr>
       <p:sp>
         <p:nvSpPr>
-          <p:cNvPr id="160" name="Google Shape;160;p40:notes"/>
+          <p:cNvPr id="133" name="Google Shape;133;p8:notes"/>
           <p:cNvSpPr txBox="1">
             <a:spLocks noGrp="1"/>
           </p:cNvSpPr>
@@ -3857,7 +3791,7 @@
       </p:sp>
       <p:sp>
         <p:nvSpPr>
-          <p:cNvPr id="161" name="Google Shape;161;p40:notes"/>
+          <p:cNvPr id="134" name="Google Shape;134;p8:notes"/>
           <p:cNvSpPr>
             <a:spLocks noGrp="1" noRot="1" noChangeAspect="1"/>
           </p:cNvSpPr>
@@ -3919,13 +3853,7 @@
   <p:cSld>
     <p:spTree>
       <p:nvGrpSpPr>
-        <p:cNvPr id="1" name="Shape 159">
-          <a:extLst>
-            <a:ext uri="{FF2B5EF4-FFF2-40B4-BE49-F238E27FC236}">
-              <a16:creationId xmlns:a16="http://schemas.microsoft.com/office/drawing/2014/main" id="{9B3632CC-1D12-6672-A7F9-F6E46408D707}"/>
-            </a:ext>
-          </a:extLst>
-        </p:cNvPr>
+        <p:cNvPr id="1" name="Shape 139"/>
         <p:cNvGrpSpPr/>
         <p:nvPr/>
       </p:nvGrpSpPr>
@@ -3939,13 +3867,7 @@
       </p:grpSpPr>
       <p:sp>
         <p:nvSpPr>
-          <p:cNvPr id="160" name="Google Shape;160;p40:notes">
-            <a:extLst>
-              <a:ext uri="{FF2B5EF4-FFF2-40B4-BE49-F238E27FC236}">
-                <a16:creationId xmlns:a16="http://schemas.microsoft.com/office/drawing/2014/main" id="{324BA020-C76F-8D52-1687-C3193013FECE}"/>
-              </a:ext>
-            </a:extLst>
-          </p:cNvPr>
+          <p:cNvPr id="140" name="Google Shape;140;p9:notes"/>
           <p:cNvSpPr txBox="1">
             <a:spLocks noGrp="1"/>
           </p:cNvSpPr>
@@ -3995,13 +3917,7 @@
       </p:sp>
       <p:sp>
         <p:nvSpPr>
-          <p:cNvPr id="161" name="Google Shape;161;p40:notes">
-            <a:extLst>
-              <a:ext uri="{FF2B5EF4-FFF2-40B4-BE49-F238E27FC236}">
-                <a16:creationId xmlns:a16="http://schemas.microsoft.com/office/drawing/2014/main" id="{6F314FF6-C9F5-5110-4852-F0AA1EC68313}"/>
-              </a:ext>
-            </a:extLst>
-          </p:cNvPr>
+          <p:cNvPr id="141" name="Google Shape;141;p9:notes"/>
           <p:cNvSpPr>
             <a:spLocks noGrp="1" noRot="1" noChangeAspect="1"/>
           </p:cNvSpPr>
@@ -4051,11 +3967,6 @@
         </p:spPr>
       </p:sp>
     </p:spTree>
-    <p:extLst>
-      <p:ext uri="{BB962C8B-B14F-4D97-AF65-F5344CB8AC3E}">
-        <p14:creationId xmlns:p14="http://schemas.microsoft.com/office/powerpoint/2010/main" val="2102898944"/>
-      </p:ext>
-    </p:extLst>
   </p:cSld>
   <p:clrMapOvr>
     <a:masterClrMapping/>
@@ -4082,7 +3993,7 @@
       </p:grpSpPr>
       <p:sp>
         <p:nvSpPr>
-          <p:cNvPr id="16" name="Google Shape;16;p19"/>
+          <p:cNvPr id="16" name="Google Shape;16;p23"/>
           <p:cNvSpPr txBox="1">
             <a:spLocks noGrp="1"/>
           </p:cNvSpPr>
@@ -4246,7 +4157,7 @@
       </p:sp>
       <p:sp>
         <p:nvSpPr>
-          <p:cNvPr id="17" name="Google Shape;17;p19"/>
+          <p:cNvPr id="17" name="Google Shape;17;p23"/>
           <p:cNvSpPr txBox="1">
             <a:spLocks noGrp="1"/>
           </p:cNvSpPr>
@@ -4433,7 +4344,7 @@
       </p:sp>
       <p:sp>
         <p:nvSpPr>
-          <p:cNvPr id="18" name="Google Shape;18;p19"/>
+          <p:cNvPr id="18" name="Google Shape;18;p23"/>
           <p:cNvSpPr txBox="1">
             <a:spLocks noGrp="1"/>
           </p:cNvSpPr>
@@ -4593,7 +4504,7 @@
       </p:sp>
       <p:sp>
         <p:nvSpPr>
-          <p:cNvPr id="19" name="Google Shape;19;p19"/>
+          <p:cNvPr id="19" name="Google Shape;19;p23"/>
           <p:cNvSpPr txBox="1">
             <a:spLocks noGrp="1"/>
           </p:cNvSpPr>
@@ -4874,7 +4785,7 @@
       </p:sp>
       <p:sp>
         <p:nvSpPr>
-          <p:cNvPr id="20" name="Google Shape;20;p19"/>
+          <p:cNvPr id="20" name="Google Shape;20;p23"/>
           <p:cNvSpPr txBox="1"/>
           <p:nvPr/>
         </p:nvSpPr>
@@ -4965,7 +4876,7 @@
       </p:grpSpPr>
       <p:sp>
         <p:nvSpPr>
-          <p:cNvPr id="73" name="Google Shape;73;p29"/>
+          <p:cNvPr id="73" name="Google Shape;73;p32"/>
           <p:cNvSpPr txBox="1">
             <a:spLocks noGrp="1"/>
           </p:cNvSpPr>
@@ -5128,7 +5039,7 @@
       </p:sp>
       <p:sp>
         <p:nvSpPr>
-          <p:cNvPr id="74" name="Google Shape;74;p29"/>
+          <p:cNvPr id="74" name="Google Shape;74;p32"/>
           <p:cNvSpPr txBox="1">
             <a:spLocks noGrp="1"/>
           </p:cNvSpPr>
@@ -5315,7 +5226,7 @@
       </p:sp>
       <p:sp>
         <p:nvSpPr>
-          <p:cNvPr id="75" name="Google Shape;75;p29"/>
+          <p:cNvPr id="75" name="Google Shape;75;p32"/>
           <p:cNvSpPr txBox="1">
             <a:spLocks noGrp="1"/>
           </p:cNvSpPr>
@@ -5475,7 +5386,7 @@
       </p:sp>
       <p:sp>
         <p:nvSpPr>
-          <p:cNvPr id="76" name="Google Shape;76;p29"/>
+          <p:cNvPr id="76" name="Google Shape;76;p32"/>
           <p:cNvSpPr txBox="1">
             <a:spLocks noGrp="1"/>
           </p:cNvSpPr>
@@ -5635,7 +5546,7 @@
       </p:sp>
       <p:sp>
         <p:nvSpPr>
-          <p:cNvPr id="77" name="Google Shape;77;p29"/>
+          <p:cNvPr id="77" name="Google Shape;77;p32"/>
           <p:cNvSpPr txBox="1">
             <a:spLocks noGrp="1"/>
           </p:cNvSpPr>
@@ -5923,8 +5834,8 @@
 </file>
 
 <file path=ppt/slideLayouts/slideLayout2.xml><?xml version="1.0" encoding="utf-8"?>
-<p:sldLayout xmlns:a="http://schemas.openxmlformats.org/drawingml/2006/main" xmlns:r="http://schemas.openxmlformats.org/officeDocument/2006/relationships" xmlns:p="http://schemas.openxmlformats.org/presentationml/2006/main" matchingName="Section Header" type="secHead">
-  <p:cSld name="SECTION_HEADER">
+<p:sldLayout xmlns:a="http://schemas.openxmlformats.org/drawingml/2006/main" xmlns:r="http://schemas.openxmlformats.org/officeDocument/2006/relationships" xmlns:p="http://schemas.openxmlformats.org/presentationml/2006/main" matchingName="Content with Caption" type="objTx">
+  <p:cSld name="OBJECT_WITH_CAPTION_TEXT">
     <p:spTree>
       <p:nvGrpSpPr>
         <p:cNvPr id="1" name="Shape 21"/>
@@ -5941,7 +5852,1171 @@
       </p:grpSpPr>
       <p:sp>
         <p:nvSpPr>
-          <p:cNvPr id="22" name="Google Shape;22;p21"/>
+          <p:cNvPr id="22" name="Google Shape;22;p24"/>
+          <p:cNvSpPr txBox="1">
+            <a:spLocks noGrp="1"/>
+          </p:cNvSpPr>
+          <p:nvPr>
+            <p:ph type="title"/>
+          </p:nvPr>
+        </p:nvSpPr>
+        <p:spPr>
+          <a:xfrm>
+            <a:off x="839788" y="457200"/>
+            <a:ext cx="3932237" cy="1600200"/>
+          </a:xfrm>
+          <a:prstGeom prst="rect">
+            <a:avLst/>
+          </a:prstGeom>
+          <a:noFill/>
+          <a:ln>
+            <a:noFill/>
+          </a:ln>
+        </p:spPr>
+        <p:txBody>
+          <a:bodyPr spcFirstLastPara="1" wrap="square" lIns="91425" tIns="45700" rIns="91425" bIns="45700" anchor="b" anchorCtr="0">
+            <a:normAutofit/>
+          </a:bodyPr>
+          <a:lstStyle>
+            <a:lvl1pPr lvl="0" algn="l">
+              <a:lnSpc>
+                <a:spcPct val="90000"/>
+              </a:lnSpc>
+              <a:spcBef>
+                <a:spcPts val="0"/>
+              </a:spcBef>
+              <a:spcAft>
+                <a:spcPts val="0"/>
+              </a:spcAft>
+              <a:buClr>
+                <a:schemeClr val="dk1"/>
+              </a:buClr>
+              <a:buSzPts val="3200"/>
+              <a:buFont typeface="Calibri"/>
+              <a:buNone/>
+              <a:defRPr sz="3200"/>
+            </a:lvl1pPr>
+            <a:lvl2pPr lvl="1" algn="l">
+              <a:lnSpc>
+                <a:spcPct val="100000"/>
+              </a:lnSpc>
+              <a:spcBef>
+                <a:spcPts val="0"/>
+              </a:spcBef>
+              <a:spcAft>
+                <a:spcPts val="0"/>
+              </a:spcAft>
+              <a:buSzPts val="1400"/>
+              <a:buNone/>
+              <a:defRPr/>
+            </a:lvl2pPr>
+            <a:lvl3pPr lvl="2" algn="l">
+              <a:lnSpc>
+                <a:spcPct val="100000"/>
+              </a:lnSpc>
+              <a:spcBef>
+                <a:spcPts val="0"/>
+              </a:spcBef>
+              <a:spcAft>
+                <a:spcPts val="0"/>
+              </a:spcAft>
+              <a:buSzPts val="1400"/>
+              <a:buNone/>
+              <a:defRPr/>
+            </a:lvl3pPr>
+            <a:lvl4pPr lvl="3" algn="l">
+              <a:lnSpc>
+                <a:spcPct val="100000"/>
+              </a:lnSpc>
+              <a:spcBef>
+                <a:spcPts val="0"/>
+              </a:spcBef>
+              <a:spcAft>
+                <a:spcPts val="0"/>
+              </a:spcAft>
+              <a:buSzPts val="1400"/>
+              <a:buNone/>
+              <a:defRPr/>
+            </a:lvl4pPr>
+            <a:lvl5pPr lvl="4" algn="l">
+              <a:lnSpc>
+                <a:spcPct val="100000"/>
+              </a:lnSpc>
+              <a:spcBef>
+                <a:spcPts val="0"/>
+              </a:spcBef>
+              <a:spcAft>
+                <a:spcPts val="0"/>
+              </a:spcAft>
+              <a:buSzPts val="1400"/>
+              <a:buNone/>
+              <a:defRPr/>
+            </a:lvl5pPr>
+            <a:lvl6pPr lvl="5" algn="l">
+              <a:lnSpc>
+                <a:spcPct val="100000"/>
+              </a:lnSpc>
+              <a:spcBef>
+                <a:spcPts val="0"/>
+              </a:spcBef>
+              <a:spcAft>
+                <a:spcPts val="0"/>
+              </a:spcAft>
+              <a:buSzPts val="1400"/>
+              <a:buNone/>
+              <a:defRPr/>
+            </a:lvl6pPr>
+            <a:lvl7pPr lvl="6" algn="l">
+              <a:lnSpc>
+                <a:spcPct val="100000"/>
+              </a:lnSpc>
+              <a:spcBef>
+                <a:spcPts val="0"/>
+              </a:spcBef>
+              <a:spcAft>
+                <a:spcPts val="0"/>
+              </a:spcAft>
+              <a:buSzPts val="1400"/>
+              <a:buNone/>
+              <a:defRPr/>
+            </a:lvl7pPr>
+            <a:lvl8pPr lvl="7" algn="l">
+              <a:lnSpc>
+                <a:spcPct val="100000"/>
+              </a:lnSpc>
+              <a:spcBef>
+                <a:spcPts val="0"/>
+              </a:spcBef>
+              <a:spcAft>
+                <a:spcPts val="0"/>
+              </a:spcAft>
+              <a:buSzPts val="1400"/>
+              <a:buNone/>
+              <a:defRPr/>
+            </a:lvl8pPr>
+            <a:lvl9pPr lvl="8" algn="l">
+              <a:lnSpc>
+                <a:spcPct val="100000"/>
+              </a:lnSpc>
+              <a:spcBef>
+                <a:spcPts val="0"/>
+              </a:spcBef>
+              <a:spcAft>
+                <a:spcPts val="0"/>
+              </a:spcAft>
+              <a:buSzPts val="1400"/>
+              <a:buNone/>
+              <a:defRPr/>
+            </a:lvl9pPr>
+          </a:lstStyle>
+          <a:p>
+            <a:endParaRPr/>
+          </a:p>
+        </p:txBody>
+      </p:sp>
+      <p:sp>
+        <p:nvSpPr>
+          <p:cNvPr id="23" name="Google Shape;23;p24"/>
+          <p:cNvSpPr txBox="1">
+            <a:spLocks noGrp="1"/>
+          </p:cNvSpPr>
+          <p:nvPr>
+            <p:ph type="body" idx="1"/>
+          </p:nvPr>
+        </p:nvSpPr>
+        <p:spPr>
+          <a:xfrm>
+            <a:off x="5183188" y="987425"/>
+            <a:ext cx="6172200" cy="4873625"/>
+          </a:xfrm>
+          <a:prstGeom prst="rect">
+            <a:avLst/>
+          </a:prstGeom>
+          <a:noFill/>
+          <a:ln>
+            <a:noFill/>
+          </a:ln>
+        </p:spPr>
+        <p:txBody>
+          <a:bodyPr spcFirstLastPara="1" wrap="square" lIns="91425" tIns="45700" rIns="91425" bIns="45700" anchor="t" anchorCtr="0">
+            <a:normAutofit/>
+          </a:bodyPr>
+          <a:lstStyle>
+            <a:lvl1pPr marL="457200" lvl="0" indent="-431800" algn="l">
+              <a:lnSpc>
+                <a:spcPct val="90000"/>
+              </a:lnSpc>
+              <a:spcBef>
+                <a:spcPts val="1000"/>
+              </a:spcBef>
+              <a:spcAft>
+                <a:spcPts val="0"/>
+              </a:spcAft>
+              <a:buClr>
+                <a:schemeClr val="dk1"/>
+              </a:buClr>
+              <a:buSzPts val="3200"/>
+              <a:buChar char="•"/>
+              <a:defRPr sz="3200"/>
+            </a:lvl1pPr>
+            <a:lvl2pPr marL="914400" lvl="1" indent="-406400" algn="l">
+              <a:lnSpc>
+                <a:spcPct val="90000"/>
+              </a:lnSpc>
+              <a:spcBef>
+                <a:spcPts val="500"/>
+              </a:spcBef>
+              <a:spcAft>
+                <a:spcPts val="0"/>
+              </a:spcAft>
+              <a:buClr>
+                <a:schemeClr val="dk1"/>
+              </a:buClr>
+              <a:buSzPts val="2800"/>
+              <a:buChar char="•"/>
+              <a:defRPr sz="2800"/>
+            </a:lvl2pPr>
+            <a:lvl3pPr marL="1371600" lvl="2" indent="-381000" algn="l">
+              <a:lnSpc>
+                <a:spcPct val="90000"/>
+              </a:lnSpc>
+              <a:spcBef>
+                <a:spcPts val="500"/>
+              </a:spcBef>
+              <a:spcAft>
+                <a:spcPts val="0"/>
+              </a:spcAft>
+              <a:buClr>
+                <a:schemeClr val="dk1"/>
+              </a:buClr>
+              <a:buSzPts val="2400"/>
+              <a:buChar char="•"/>
+              <a:defRPr sz="2400"/>
+            </a:lvl3pPr>
+            <a:lvl4pPr marL="1828800" lvl="3" indent="-355600" algn="l">
+              <a:lnSpc>
+                <a:spcPct val="90000"/>
+              </a:lnSpc>
+              <a:spcBef>
+                <a:spcPts val="500"/>
+              </a:spcBef>
+              <a:spcAft>
+                <a:spcPts val="0"/>
+              </a:spcAft>
+              <a:buClr>
+                <a:schemeClr val="dk1"/>
+              </a:buClr>
+              <a:buSzPts val="2000"/>
+              <a:buChar char="•"/>
+              <a:defRPr sz="2000"/>
+            </a:lvl4pPr>
+            <a:lvl5pPr marL="2286000" lvl="4" indent="-355600" algn="l">
+              <a:lnSpc>
+                <a:spcPct val="90000"/>
+              </a:lnSpc>
+              <a:spcBef>
+                <a:spcPts val="500"/>
+              </a:spcBef>
+              <a:spcAft>
+                <a:spcPts val="0"/>
+              </a:spcAft>
+              <a:buClr>
+                <a:schemeClr val="dk1"/>
+              </a:buClr>
+              <a:buSzPts val="2000"/>
+              <a:buChar char="•"/>
+              <a:defRPr sz="2000"/>
+            </a:lvl5pPr>
+            <a:lvl6pPr marL="2743200" lvl="5" indent="-355600" algn="l">
+              <a:lnSpc>
+                <a:spcPct val="90000"/>
+              </a:lnSpc>
+              <a:spcBef>
+                <a:spcPts val="500"/>
+              </a:spcBef>
+              <a:spcAft>
+                <a:spcPts val="0"/>
+              </a:spcAft>
+              <a:buClr>
+                <a:schemeClr val="dk1"/>
+              </a:buClr>
+              <a:buSzPts val="2000"/>
+              <a:buChar char="•"/>
+              <a:defRPr sz="2000"/>
+            </a:lvl6pPr>
+            <a:lvl7pPr marL="3200400" lvl="6" indent="-355600" algn="l">
+              <a:lnSpc>
+                <a:spcPct val="90000"/>
+              </a:lnSpc>
+              <a:spcBef>
+                <a:spcPts val="500"/>
+              </a:spcBef>
+              <a:spcAft>
+                <a:spcPts val="0"/>
+              </a:spcAft>
+              <a:buClr>
+                <a:schemeClr val="dk1"/>
+              </a:buClr>
+              <a:buSzPts val="2000"/>
+              <a:buChar char="•"/>
+              <a:defRPr sz="2000"/>
+            </a:lvl7pPr>
+            <a:lvl8pPr marL="3657600" lvl="7" indent="-355600" algn="l">
+              <a:lnSpc>
+                <a:spcPct val="90000"/>
+              </a:lnSpc>
+              <a:spcBef>
+                <a:spcPts val="500"/>
+              </a:spcBef>
+              <a:spcAft>
+                <a:spcPts val="0"/>
+              </a:spcAft>
+              <a:buClr>
+                <a:schemeClr val="dk1"/>
+              </a:buClr>
+              <a:buSzPts val="2000"/>
+              <a:buChar char="•"/>
+              <a:defRPr sz="2000"/>
+            </a:lvl8pPr>
+            <a:lvl9pPr marL="4114800" lvl="8" indent="-355600" algn="l">
+              <a:lnSpc>
+                <a:spcPct val="90000"/>
+              </a:lnSpc>
+              <a:spcBef>
+                <a:spcPts val="500"/>
+              </a:spcBef>
+              <a:spcAft>
+                <a:spcPts val="0"/>
+              </a:spcAft>
+              <a:buClr>
+                <a:schemeClr val="dk1"/>
+              </a:buClr>
+              <a:buSzPts val="2000"/>
+              <a:buChar char="•"/>
+              <a:defRPr sz="2000"/>
+            </a:lvl9pPr>
+          </a:lstStyle>
+          <a:p>
+            <a:endParaRPr/>
+          </a:p>
+        </p:txBody>
+      </p:sp>
+      <p:sp>
+        <p:nvSpPr>
+          <p:cNvPr id="24" name="Google Shape;24;p24"/>
+          <p:cNvSpPr txBox="1">
+            <a:spLocks noGrp="1"/>
+          </p:cNvSpPr>
+          <p:nvPr>
+            <p:ph type="body" idx="2"/>
+          </p:nvPr>
+        </p:nvSpPr>
+        <p:spPr>
+          <a:xfrm>
+            <a:off x="839788" y="2057400"/>
+            <a:ext cx="3932237" cy="3811588"/>
+          </a:xfrm>
+          <a:prstGeom prst="rect">
+            <a:avLst/>
+          </a:prstGeom>
+          <a:noFill/>
+          <a:ln>
+            <a:noFill/>
+          </a:ln>
+        </p:spPr>
+        <p:txBody>
+          <a:bodyPr spcFirstLastPara="1" wrap="square" lIns="91425" tIns="45700" rIns="91425" bIns="45700" anchor="t" anchorCtr="0">
+            <a:normAutofit/>
+          </a:bodyPr>
+          <a:lstStyle>
+            <a:lvl1pPr marL="457200" lvl="0" indent="-228600" algn="l">
+              <a:lnSpc>
+                <a:spcPct val="90000"/>
+              </a:lnSpc>
+              <a:spcBef>
+                <a:spcPts val="1000"/>
+              </a:spcBef>
+              <a:spcAft>
+                <a:spcPts val="0"/>
+              </a:spcAft>
+              <a:buClr>
+                <a:schemeClr val="dk1"/>
+              </a:buClr>
+              <a:buSzPts val="1600"/>
+              <a:buNone/>
+              <a:defRPr sz="1600"/>
+            </a:lvl1pPr>
+            <a:lvl2pPr marL="914400" lvl="1" indent="-228600" algn="l">
+              <a:lnSpc>
+                <a:spcPct val="90000"/>
+              </a:lnSpc>
+              <a:spcBef>
+                <a:spcPts val="500"/>
+              </a:spcBef>
+              <a:spcAft>
+                <a:spcPts val="0"/>
+              </a:spcAft>
+              <a:buClr>
+                <a:schemeClr val="dk1"/>
+              </a:buClr>
+              <a:buSzPts val="1400"/>
+              <a:buNone/>
+              <a:defRPr sz="1400"/>
+            </a:lvl2pPr>
+            <a:lvl3pPr marL="1371600" lvl="2" indent="-228600" algn="l">
+              <a:lnSpc>
+                <a:spcPct val="90000"/>
+              </a:lnSpc>
+              <a:spcBef>
+                <a:spcPts val="500"/>
+              </a:spcBef>
+              <a:spcAft>
+                <a:spcPts val="0"/>
+              </a:spcAft>
+              <a:buClr>
+                <a:schemeClr val="dk1"/>
+              </a:buClr>
+              <a:buSzPts val="1200"/>
+              <a:buNone/>
+              <a:defRPr sz="1200"/>
+            </a:lvl3pPr>
+            <a:lvl4pPr marL="1828800" lvl="3" indent="-228600" algn="l">
+              <a:lnSpc>
+                <a:spcPct val="90000"/>
+              </a:lnSpc>
+              <a:spcBef>
+                <a:spcPts val="500"/>
+              </a:spcBef>
+              <a:spcAft>
+                <a:spcPts val="0"/>
+              </a:spcAft>
+              <a:buClr>
+                <a:schemeClr val="dk1"/>
+              </a:buClr>
+              <a:buSzPts val="1000"/>
+              <a:buNone/>
+              <a:defRPr sz="1000"/>
+            </a:lvl4pPr>
+            <a:lvl5pPr marL="2286000" lvl="4" indent="-228600" algn="l">
+              <a:lnSpc>
+                <a:spcPct val="90000"/>
+              </a:lnSpc>
+              <a:spcBef>
+                <a:spcPts val="500"/>
+              </a:spcBef>
+              <a:spcAft>
+                <a:spcPts val="0"/>
+              </a:spcAft>
+              <a:buClr>
+                <a:schemeClr val="dk1"/>
+              </a:buClr>
+              <a:buSzPts val="1000"/>
+              <a:buNone/>
+              <a:defRPr sz="1000"/>
+            </a:lvl5pPr>
+            <a:lvl6pPr marL="2743200" lvl="5" indent="-228600" algn="l">
+              <a:lnSpc>
+                <a:spcPct val="90000"/>
+              </a:lnSpc>
+              <a:spcBef>
+                <a:spcPts val="500"/>
+              </a:spcBef>
+              <a:spcAft>
+                <a:spcPts val="0"/>
+              </a:spcAft>
+              <a:buClr>
+                <a:schemeClr val="dk1"/>
+              </a:buClr>
+              <a:buSzPts val="1000"/>
+              <a:buNone/>
+              <a:defRPr sz="1000"/>
+            </a:lvl6pPr>
+            <a:lvl7pPr marL="3200400" lvl="6" indent="-228600" algn="l">
+              <a:lnSpc>
+                <a:spcPct val="90000"/>
+              </a:lnSpc>
+              <a:spcBef>
+                <a:spcPts val="500"/>
+              </a:spcBef>
+              <a:spcAft>
+                <a:spcPts val="0"/>
+              </a:spcAft>
+              <a:buClr>
+                <a:schemeClr val="dk1"/>
+              </a:buClr>
+              <a:buSzPts val="1000"/>
+              <a:buNone/>
+              <a:defRPr sz="1000"/>
+            </a:lvl7pPr>
+            <a:lvl8pPr marL="3657600" lvl="7" indent="-228600" algn="l">
+              <a:lnSpc>
+                <a:spcPct val="90000"/>
+              </a:lnSpc>
+              <a:spcBef>
+                <a:spcPts val="500"/>
+              </a:spcBef>
+              <a:spcAft>
+                <a:spcPts val="0"/>
+              </a:spcAft>
+              <a:buClr>
+                <a:schemeClr val="dk1"/>
+              </a:buClr>
+              <a:buSzPts val="1000"/>
+              <a:buNone/>
+              <a:defRPr sz="1000"/>
+            </a:lvl8pPr>
+            <a:lvl9pPr marL="4114800" lvl="8" indent="-228600" algn="l">
+              <a:lnSpc>
+                <a:spcPct val="90000"/>
+              </a:lnSpc>
+              <a:spcBef>
+                <a:spcPts val="500"/>
+              </a:spcBef>
+              <a:spcAft>
+                <a:spcPts val="0"/>
+              </a:spcAft>
+              <a:buClr>
+                <a:schemeClr val="dk1"/>
+              </a:buClr>
+              <a:buSzPts val="1000"/>
+              <a:buNone/>
+              <a:defRPr sz="1000"/>
+            </a:lvl9pPr>
+          </a:lstStyle>
+          <a:p>
+            <a:endParaRPr/>
+          </a:p>
+        </p:txBody>
+      </p:sp>
+      <p:sp>
+        <p:nvSpPr>
+          <p:cNvPr id="25" name="Google Shape;25;p24"/>
+          <p:cNvSpPr txBox="1">
+            <a:spLocks noGrp="1"/>
+          </p:cNvSpPr>
+          <p:nvPr>
+            <p:ph type="dt" idx="10"/>
+          </p:nvPr>
+        </p:nvSpPr>
+        <p:spPr>
+          <a:xfrm>
+            <a:off x="838200" y="6356350"/>
+            <a:ext cx="2743200" cy="365125"/>
+          </a:xfrm>
+          <a:prstGeom prst="rect">
+            <a:avLst/>
+          </a:prstGeom>
+          <a:noFill/>
+          <a:ln>
+            <a:noFill/>
+          </a:ln>
+        </p:spPr>
+        <p:txBody>
+          <a:bodyPr spcFirstLastPara="1" wrap="square" lIns="91425" tIns="45700" rIns="91425" bIns="45700" anchor="ctr" anchorCtr="0">
+            <a:noAutofit/>
+          </a:bodyPr>
+          <a:lstStyle>
+            <a:lvl1pPr lvl="0" algn="l">
+              <a:lnSpc>
+                <a:spcPct val="100000"/>
+              </a:lnSpc>
+              <a:spcBef>
+                <a:spcPts val="0"/>
+              </a:spcBef>
+              <a:spcAft>
+                <a:spcPts val="0"/>
+              </a:spcAft>
+              <a:buSzPts val="1400"/>
+              <a:buNone/>
+              <a:defRPr/>
+            </a:lvl1pPr>
+            <a:lvl2pPr lvl="1" algn="l">
+              <a:lnSpc>
+                <a:spcPct val="100000"/>
+              </a:lnSpc>
+              <a:spcBef>
+                <a:spcPts val="0"/>
+              </a:spcBef>
+              <a:spcAft>
+                <a:spcPts val="0"/>
+              </a:spcAft>
+              <a:buSzPts val="1400"/>
+              <a:buNone/>
+              <a:defRPr/>
+            </a:lvl2pPr>
+            <a:lvl3pPr lvl="2" algn="l">
+              <a:lnSpc>
+                <a:spcPct val="100000"/>
+              </a:lnSpc>
+              <a:spcBef>
+                <a:spcPts val="0"/>
+              </a:spcBef>
+              <a:spcAft>
+                <a:spcPts val="0"/>
+              </a:spcAft>
+              <a:buSzPts val="1400"/>
+              <a:buNone/>
+              <a:defRPr/>
+            </a:lvl3pPr>
+            <a:lvl4pPr lvl="3" algn="l">
+              <a:lnSpc>
+                <a:spcPct val="100000"/>
+              </a:lnSpc>
+              <a:spcBef>
+                <a:spcPts val="0"/>
+              </a:spcBef>
+              <a:spcAft>
+                <a:spcPts val="0"/>
+              </a:spcAft>
+              <a:buSzPts val="1400"/>
+              <a:buNone/>
+              <a:defRPr/>
+            </a:lvl4pPr>
+            <a:lvl5pPr lvl="4" algn="l">
+              <a:lnSpc>
+                <a:spcPct val="100000"/>
+              </a:lnSpc>
+              <a:spcBef>
+                <a:spcPts val="0"/>
+              </a:spcBef>
+              <a:spcAft>
+                <a:spcPts val="0"/>
+              </a:spcAft>
+              <a:buSzPts val="1400"/>
+              <a:buNone/>
+              <a:defRPr/>
+            </a:lvl5pPr>
+            <a:lvl6pPr lvl="5" algn="l">
+              <a:lnSpc>
+                <a:spcPct val="100000"/>
+              </a:lnSpc>
+              <a:spcBef>
+                <a:spcPts val="0"/>
+              </a:spcBef>
+              <a:spcAft>
+                <a:spcPts val="0"/>
+              </a:spcAft>
+              <a:buSzPts val="1400"/>
+              <a:buNone/>
+              <a:defRPr/>
+            </a:lvl6pPr>
+            <a:lvl7pPr lvl="6" algn="l">
+              <a:lnSpc>
+                <a:spcPct val="100000"/>
+              </a:lnSpc>
+              <a:spcBef>
+                <a:spcPts val="0"/>
+              </a:spcBef>
+              <a:spcAft>
+                <a:spcPts val="0"/>
+              </a:spcAft>
+              <a:buSzPts val="1400"/>
+              <a:buNone/>
+              <a:defRPr/>
+            </a:lvl7pPr>
+            <a:lvl8pPr lvl="7" algn="l">
+              <a:lnSpc>
+                <a:spcPct val="100000"/>
+              </a:lnSpc>
+              <a:spcBef>
+                <a:spcPts val="0"/>
+              </a:spcBef>
+              <a:spcAft>
+                <a:spcPts val="0"/>
+              </a:spcAft>
+              <a:buSzPts val="1400"/>
+              <a:buNone/>
+              <a:defRPr/>
+            </a:lvl8pPr>
+            <a:lvl9pPr lvl="8" algn="l">
+              <a:lnSpc>
+                <a:spcPct val="100000"/>
+              </a:lnSpc>
+              <a:spcBef>
+                <a:spcPts val="0"/>
+              </a:spcBef>
+              <a:spcAft>
+                <a:spcPts val="0"/>
+              </a:spcAft>
+              <a:buSzPts val="1400"/>
+              <a:buNone/>
+              <a:defRPr/>
+            </a:lvl9pPr>
+          </a:lstStyle>
+          <a:p>
+            <a:endParaRPr/>
+          </a:p>
+        </p:txBody>
+      </p:sp>
+      <p:sp>
+        <p:nvSpPr>
+          <p:cNvPr id="26" name="Google Shape;26;p24"/>
+          <p:cNvSpPr txBox="1">
+            <a:spLocks noGrp="1"/>
+          </p:cNvSpPr>
+          <p:nvPr>
+            <p:ph type="ftr" idx="11"/>
+          </p:nvPr>
+        </p:nvSpPr>
+        <p:spPr>
+          <a:xfrm>
+            <a:off x="4038600" y="6356350"/>
+            <a:ext cx="4114800" cy="365125"/>
+          </a:xfrm>
+          <a:prstGeom prst="rect">
+            <a:avLst/>
+          </a:prstGeom>
+          <a:noFill/>
+          <a:ln>
+            <a:noFill/>
+          </a:ln>
+        </p:spPr>
+        <p:txBody>
+          <a:bodyPr spcFirstLastPara="1" wrap="square" lIns="91425" tIns="45700" rIns="91425" bIns="45700" anchor="ctr" anchorCtr="0">
+            <a:noAutofit/>
+          </a:bodyPr>
+          <a:lstStyle>
+            <a:lvl1pPr lvl="0" algn="ctr">
+              <a:lnSpc>
+                <a:spcPct val="100000"/>
+              </a:lnSpc>
+              <a:spcBef>
+                <a:spcPts val="0"/>
+              </a:spcBef>
+              <a:spcAft>
+                <a:spcPts val="0"/>
+              </a:spcAft>
+              <a:buSzPts val="1400"/>
+              <a:buNone/>
+              <a:defRPr/>
+            </a:lvl1pPr>
+            <a:lvl2pPr lvl="1" algn="l">
+              <a:lnSpc>
+                <a:spcPct val="100000"/>
+              </a:lnSpc>
+              <a:spcBef>
+                <a:spcPts val="0"/>
+              </a:spcBef>
+              <a:spcAft>
+                <a:spcPts val="0"/>
+              </a:spcAft>
+              <a:buSzPts val="1400"/>
+              <a:buNone/>
+              <a:defRPr/>
+            </a:lvl2pPr>
+            <a:lvl3pPr lvl="2" algn="l">
+              <a:lnSpc>
+                <a:spcPct val="100000"/>
+              </a:lnSpc>
+              <a:spcBef>
+                <a:spcPts val="0"/>
+              </a:spcBef>
+              <a:spcAft>
+                <a:spcPts val="0"/>
+              </a:spcAft>
+              <a:buSzPts val="1400"/>
+              <a:buNone/>
+              <a:defRPr/>
+            </a:lvl3pPr>
+            <a:lvl4pPr lvl="3" algn="l">
+              <a:lnSpc>
+                <a:spcPct val="100000"/>
+              </a:lnSpc>
+              <a:spcBef>
+                <a:spcPts val="0"/>
+              </a:spcBef>
+              <a:spcAft>
+                <a:spcPts val="0"/>
+              </a:spcAft>
+              <a:buSzPts val="1400"/>
+              <a:buNone/>
+              <a:defRPr/>
+            </a:lvl4pPr>
+            <a:lvl5pPr lvl="4" algn="l">
+              <a:lnSpc>
+                <a:spcPct val="100000"/>
+              </a:lnSpc>
+              <a:spcBef>
+                <a:spcPts val="0"/>
+              </a:spcBef>
+              <a:spcAft>
+                <a:spcPts val="0"/>
+              </a:spcAft>
+              <a:buSzPts val="1400"/>
+              <a:buNone/>
+              <a:defRPr/>
+            </a:lvl5pPr>
+            <a:lvl6pPr lvl="5" algn="l">
+              <a:lnSpc>
+                <a:spcPct val="100000"/>
+              </a:lnSpc>
+              <a:spcBef>
+                <a:spcPts val="0"/>
+              </a:spcBef>
+              <a:spcAft>
+                <a:spcPts val="0"/>
+              </a:spcAft>
+              <a:buSzPts val="1400"/>
+              <a:buNone/>
+              <a:defRPr/>
+            </a:lvl6pPr>
+            <a:lvl7pPr lvl="6" algn="l">
+              <a:lnSpc>
+                <a:spcPct val="100000"/>
+              </a:lnSpc>
+              <a:spcBef>
+                <a:spcPts val="0"/>
+              </a:spcBef>
+              <a:spcAft>
+                <a:spcPts val="0"/>
+              </a:spcAft>
+              <a:buSzPts val="1400"/>
+              <a:buNone/>
+              <a:defRPr/>
+            </a:lvl7pPr>
+            <a:lvl8pPr lvl="7" algn="l">
+              <a:lnSpc>
+                <a:spcPct val="100000"/>
+              </a:lnSpc>
+              <a:spcBef>
+                <a:spcPts val="0"/>
+              </a:spcBef>
+              <a:spcAft>
+                <a:spcPts val="0"/>
+              </a:spcAft>
+              <a:buSzPts val="1400"/>
+              <a:buNone/>
+              <a:defRPr/>
+            </a:lvl8pPr>
+            <a:lvl9pPr lvl="8" algn="l">
+              <a:lnSpc>
+                <a:spcPct val="100000"/>
+              </a:lnSpc>
+              <a:spcBef>
+                <a:spcPts val="0"/>
+              </a:spcBef>
+              <a:spcAft>
+                <a:spcPts val="0"/>
+              </a:spcAft>
+              <a:buSzPts val="1400"/>
+              <a:buNone/>
+              <a:defRPr/>
+            </a:lvl9pPr>
+          </a:lstStyle>
+          <a:p>
+            <a:endParaRPr/>
+          </a:p>
+        </p:txBody>
+      </p:sp>
+      <p:sp>
+        <p:nvSpPr>
+          <p:cNvPr id="27" name="Google Shape;27;p24"/>
+          <p:cNvSpPr txBox="1">
+            <a:spLocks noGrp="1"/>
+          </p:cNvSpPr>
+          <p:nvPr>
+            <p:ph type="sldNum" idx="12"/>
+          </p:nvPr>
+        </p:nvSpPr>
+        <p:spPr>
+          <a:xfrm>
+            <a:off x="8610600" y="6356350"/>
+            <a:ext cx="2743200" cy="365125"/>
+          </a:xfrm>
+          <a:prstGeom prst="rect">
+            <a:avLst/>
+          </a:prstGeom>
+          <a:noFill/>
+          <a:ln>
+            <a:noFill/>
+          </a:ln>
+        </p:spPr>
+        <p:txBody>
+          <a:bodyPr spcFirstLastPara="1" wrap="square" lIns="91425" tIns="45700" rIns="91425" bIns="45700" anchor="ctr" anchorCtr="0">
+            <a:noAutofit/>
+          </a:bodyPr>
+          <a:lstStyle>
+            <a:lvl1pPr marL="0" marR="0" lvl="0" indent="0" algn="r">
+              <a:lnSpc>
+                <a:spcPct val="100000"/>
+              </a:lnSpc>
+              <a:spcBef>
+                <a:spcPts val="0"/>
+              </a:spcBef>
+              <a:spcAft>
+                <a:spcPts val="0"/>
+              </a:spcAft>
+              <a:buClr>
+                <a:srgbClr val="000000"/>
+              </a:buClr>
+              <a:buSzPts val="1200"/>
+              <a:buFont typeface="Arial"/>
+              <a:buNone/>
+              <a:defRPr sz="1200" b="0" i="0" u="none" strike="noStrike" cap="none">
+                <a:solidFill>
+                  <a:srgbClr val="888888"/>
+                </a:solidFill>
+                <a:latin typeface="Calibri"/>
+                <a:ea typeface="Calibri"/>
+                <a:cs typeface="Calibri"/>
+                <a:sym typeface="Calibri"/>
+              </a:defRPr>
+            </a:lvl1pPr>
+            <a:lvl2pPr marL="0" marR="0" lvl="1" indent="0" algn="r">
+              <a:lnSpc>
+                <a:spcPct val="100000"/>
+              </a:lnSpc>
+              <a:spcBef>
+                <a:spcPts val="0"/>
+              </a:spcBef>
+              <a:spcAft>
+                <a:spcPts val="0"/>
+              </a:spcAft>
+              <a:buClr>
+                <a:srgbClr val="000000"/>
+              </a:buClr>
+              <a:buSzPts val="1200"/>
+              <a:buFont typeface="Arial"/>
+              <a:buNone/>
+              <a:defRPr sz="1200" b="0" i="0" u="none" strike="noStrike" cap="none">
+                <a:solidFill>
+                  <a:srgbClr val="888888"/>
+                </a:solidFill>
+                <a:latin typeface="Calibri"/>
+                <a:ea typeface="Calibri"/>
+                <a:cs typeface="Calibri"/>
+                <a:sym typeface="Calibri"/>
+              </a:defRPr>
+            </a:lvl2pPr>
+            <a:lvl3pPr marL="0" marR="0" lvl="2" indent="0" algn="r">
+              <a:lnSpc>
+                <a:spcPct val="100000"/>
+              </a:lnSpc>
+              <a:spcBef>
+                <a:spcPts val="0"/>
+              </a:spcBef>
+              <a:spcAft>
+                <a:spcPts val="0"/>
+              </a:spcAft>
+              <a:buClr>
+                <a:srgbClr val="000000"/>
+              </a:buClr>
+              <a:buSzPts val="1200"/>
+              <a:buFont typeface="Arial"/>
+              <a:buNone/>
+              <a:defRPr sz="1200" b="0" i="0" u="none" strike="noStrike" cap="none">
+                <a:solidFill>
+                  <a:srgbClr val="888888"/>
+                </a:solidFill>
+                <a:latin typeface="Calibri"/>
+                <a:ea typeface="Calibri"/>
+                <a:cs typeface="Calibri"/>
+                <a:sym typeface="Calibri"/>
+              </a:defRPr>
+            </a:lvl3pPr>
+            <a:lvl4pPr marL="0" marR="0" lvl="3" indent="0" algn="r">
+              <a:lnSpc>
+                <a:spcPct val="100000"/>
+              </a:lnSpc>
+              <a:spcBef>
+                <a:spcPts val="0"/>
+              </a:spcBef>
+              <a:spcAft>
+                <a:spcPts val="0"/>
+              </a:spcAft>
+              <a:buClr>
+                <a:srgbClr val="000000"/>
+              </a:buClr>
+              <a:buSzPts val="1200"/>
+              <a:buFont typeface="Arial"/>
+              <a:buNone/>
+              <a:defRPr sz="1200" b="0" i="0" u="none" strike="noStrike" cap="none">
+                <a:solidFill>
+                  <a:srgbClr val="888888"/>
+                </a:solidFill>
+                <a:latin typeface="Calibri"/>
+                <a:ea typeface="Calibri"/>
+                <a:cs typeface="Calibri"/>
+                <a:sym typeface="Calibri"/>
+              </a:defRPr>
+            </a:lvl4pPr>
+            <a:lvl5pPr marL="0" marR="0" lvl="4" indent="0" algn="r">
+              <a:lnSpc>
+                <a:spcPct val="100000"/>
+              </a:lnSpc>
+              <a:spcBef>
+                <a:spcPts val="0"/>
+              </a:spcBef>
+              <a:spcAft>
+                <a:spcPts val="0"/>
+              </a:spcAft>
+              <a:buClr>
+                <a:srgbClr val="000000"/>
+              </a:buClr>
+              <a:buSzPts val="1200"/>
+              <a:buFont typeface="Arial"/>
+              <a:buNone/>
+              <a:defRPr sz="1200" b="0" i="0" u="none" strike="noStrike" cap="none">
+                <a:solidFill>
+                  <a:srgbClr val="888888"/>
+                </a:solidFill>
+                <a:latin typeface="Calibri"/>
+                <a:ea typeface="Calibri"/>
+                <a:cs typeface="Calibri"/>
+                <a:sym typeface="Calibri"/>
+              </a:defRPr>
+            </a:lvl5pPr>
+            <a:lvl6pPr marL="0" marR="0" lvl="5" indent="0" algn="r">
+              <a:lnSpc>
+                <a:spcPct val="100000"/>
+              </a:lnSpc>
+              <a:spcBef>
+                <a:spcPts val="0"/>
+              </a:spcBef>
+              <a:spcAft>
+                <a:spcPts val="0"/>
+              </a:spcAft>
+              <a:buClr>
+                <a:srgbClr val="000000"/>
+              </a:buClr>
+              <a:buSzPts val="1200"/>
+              <a:buFont typeface="Arial"/>
+              <a:buNone/>
+              <a:defRPr sz="1200" b="0" i="0" u="none" strike="noStrike" cap="none">
+                <a:solidFill>
+                  <a:srgbClr val="888888"/>
+                </a:solidFill>
+                <a:latin typeface="Calibri"/>
+                <a:ea typeface="Calibri"/>
+                <a:cs typeface="Calibri"/>
+                <a:sym typeface="Calibri"/>
+              </a:defRPr>
+            </a:lvl6pPr>
+            <a:lvl7pPr marL="0" marR="0" lvl="6" indent="0" algn="r">
+              <a:lnSpc>
+                <a:spcPct val="100000"/>
+              </a:lnSpc>
+              <a:spcBef>
+                <a:spcPts val="0"/>
+              </a:spcBef>
+              <a:spcAft>
+                <a:spcPts val="0"/>
+              </a:spcAft>
+              <a:buClr>
+                <a:srgbClr val="000000"/>
+              </a:buClr>
+              <a:buSzPts val="1200"/>
+              <a:buFont typeface="Arial"/>
+              <a:buNone/>
+              <a:defRPr sz="1200" b="0" i="0" u="none" strike="noStrike" cap="none">
+                <a:solidFill>
+                  <a:srgbClr val="888888"/>
+                </a:solidFill>
+                <a:latin typeface="Calibri"/>
+                <a:ea typeface="Calibri"/>
+                <a:cs typeface="Calibri"/>
+                <a:sym typeface="Calibri"/>
+              </a:defRPr>
+            </a:lvl7pPr>
+            <a:lvl8pPr marL="0" marR="0" lvl="7" indent="0" algn="r">
+              <a:lnSpc>
+                <a:spcPct val="100000"/>
+              </a:lnSpc>
+              <a:spcBef>
+                <a:spcPts val="0"/>
+              </a:spcBef>
+              <a:spcAft>
+                <a:spcPts val="0"/>
+              </a:spcAft>
+              <a:buClr>
+                <a:srgbClr val="000000"/>
+              </a:buClr>
+              <a:buSzPts val="1200"/>
+              <a:buFont typeface="Arial"/>
+              <a:buNone/>
+              <a:defRPr sz="1200" b="0" i="0" u="none" strike="noStrike" cap="none">
+                <a:solidFill>
+                  <a:srgbClr val="888888"/>
+                </a:solidFill>
+                <a:latin typeface="Calibri"/>
+                <a:ea typeface="Calibri"/>
+                <a:cs typeface="Calibri"/>
+                <a:sym typeface="Calibri"/>
+              </a:defRPr>
+            </a:lvl8pPr>
+            <a:lvl9pPr marL="0" marR="0" lvl="8" indent="0" algn="r">
+              <a:lnSpc>
+                <a:spcPct val="100000"/>
+              </a:lnSpc>
+              <a:spcBef>
+                <a:spcPts val="0"/>
+              </a:spcBef>
+              <a:spcAft>
+                <a:spcPts val="0"/>
+              </a:spcAft>
+              <a:buClr>
+                <a:srgbClr val="000000"/>
+              </a:buClr>
+              <a:buSzPts val="1200"/>
+              <a:buFont typeface="Arial"/>
+              <a:buNone/>
+              <a:defRPr sz="1200" b="0" i="0" u="none" strike="noStrike" cap="none">
+                <a:solidFill>
+                  <a:srgbClr val="888888"/>
+                </a:solidFill>
+                <a:latin typeface="Calibri"/>
+                <a:ea typeface="Calibri"/>
+                <a:cs typeface="Calibri"/>
+                <a:sym typeface="Calibri"/>
+              </a:defRPr>
+            </a:lvl9pPr>
+          </a:lstStyle>
+          <a:p>
+            <a:pPr marL="0" lvl="0" indent="0" algn="r" rtl="0">
+              <a:spcBef>
+                <a:spcPts val="0"/>
+              </a:spcBef>
+              <a:spcAft>
+                <a:spcPts val="0"/>
+              </a:spcAft>
+              <a:buNone/>
+            </a:pPr>
+            <a:fld id="{00000000-1234-1234-1234-123412341234}" type="slidenum">
+              <a:rPr lang="en-US"/>
+              <a:t>‹#›</a:t>
+            </a:fld>
+            <a:endParaRPr/>
+          </a:p>
+        </p:txBody>
+      </p:sp>
+    </p:spTree>
+  </p:cSld>
+  <p:clrMapOvr>
+    <a:masterClrMapping/>
+  </p:clrMapOvr>
+</p:sldLayout>
+</file>
+
+<file path=ppt/slideLayouts/slideLayout3.xml><?xml version="1.0" encoding="utf-8"?>
+<p:sldLayout xmlns:a="http://schemas.openxmlformats.org/drawingml/2006/main" xmlns:r="http://schemas.openxmlformats.org/officeDocument/2006/relationships" xmlns:p="http://schemas.openxmlformats.org/presentationml/2006/main" matchingName="Section Header" type="secHead">
+  <p:cSld name="SECTION_HEADER">
+    <p:spTree>
+      <p:nvGrpSpPr>
+        <p:cNvPr id="1" name="Shape 28"/>
+        <p:cNvGrpSpPr/>
+        <p:nvPr/>
+      </p:nvGrpSpPr>
+      <p:grpSpPr>
+        <a:xfrm>
+          <a:off x="0" y="0"/>
+          <a:ext cx="0" cy="0"/>
+          <a:chOff x="0" y="0"/>
+          <a:chExt cx="0" cy="0"/>
+        </a:xfrm>
+      </p:grpSpPr>
+      <p:sp>
+        <p:nvSpPr>
+          <p:cNvPr id="29" name="Google Shape;29;p25"/>
           <p:cNvSpPr txBox="1">
             <a:spLocks noGrp="1"/>
           </p:cNvSpPr>
@@ -6105,7 +7180,7 @@
       </p:sp>
       <p:sp>
         <p:nvSpPr>
-          <p:cNvPr id="23" name="Google Shape;23;p21"/>
+          <p:cNvPr id="30" name="Google Shape;30;p25"/>
           <p:cNvSpPr txBox="1">
             <a:spLocks noGrp="1"/>
           </p:cNvSpPr>
@@ -6328,7 +7403,7 @@
       </p:sp>
       <p:sp>
         <p:nvSpPr>
-          <p:cNvPr id="24" name="Google Shape;24;p21"/>
+          <p:cNvPr id="31" name="Google Shape;31;p25"/>
           <p:cNvSpPr txBox="1">
             <a:spLocks noGrp="1"/>
           </p:cNvSpPr>
@@ -6488,7 +7563,7 @@
       </p:sp>
       <p:sp>
         <p:nvSpPr>
-          <p:cNvPr id="25" name="Google Shape;25;p21"/>
+          <p:cNvPr id="32" name="Google Shape;32;p25"/>
           <p:cNvSpPr txBox="1">
             <a:spLocks noGrp="1"/>
           </p:cNvSpPr>
@@ -6648,7 +7723,7 @@
       </p:sp>
       <p:sp>
         <p:nvSpPr>
-          <p:cNvPr id="26" name="Google Shape;26;p21"/>
+          <p:cNvPr id="33" name="Google Shape;33;p25"/>
           <p:cNvSpPr txBox="1">
             <a:spLocks noGrp="1"/>
           </p:cNvSpPr>
@@ -6935,12 +8010,12 @@
 </p:sldLayout>
 </file>
 
-<file path=ppt/slideLayouts/slideLayout3.xml><?xml version="1.0" encoding="utf-8"?>
+<file path=ppt/slideLayouts/slideLayout4.xml><?xml version="1.0" encoding="utf-8"?>
 <p:sldLayout xmlns:a="http://schemas.openxmlformats.org/drawingml/2006/main" xmlns:r="http://schemas.openxmlformats.org/officeDocument/2006/relationships" xmlns:p="http://schemas.openxmlformats.org/presentationml/2006/main" matchingName="Two Content" type="twoObj">
   <p:cSld name="TWO_OBJECTS">
     <p:spTree>
       <p:nvGrpSpPr>
-        <p:cNvPr id="1" name="Shape 27"/>
+        <p:cNvPr id="1" name="Shape 34"/>
         <p:cNvGrpSpPr/>
         <p:nvPr/>
       </p:nvGrpSpPr>
@@ -6954,7 +8029,7 @@
       </p:grpSpPr>
       <p:sp>
         <p:nvSpPr>
-          <p:cNvPr id="28" name="Google Shape;28;p22"/>
+          <p:cNvPr id="35" name="Google Shape;35;p26"/>
           <p:cNvSpPr txBox="1">
             <a:spLocks noGrp="1"/>
           </p:cNvSpPr>
@@ -7117,7 +8192,7 @@
       </p:sp>
       <p:sp>
         <p:nvSpPr>
-          <p:cNvPr id="29" name="Google Shape;29;p22"/>
+          <p:cNvPr id="36" name="Google Shape;36;p26"/>
           <p:cNvSpPr txBox="1">
             <a:spLocks noGrp="1"/>
           </p:cNvSpPr>
@@ -7304,7 +8379,7 @@
       </p:sp>
       <p:sp>
         <p:nvSpPr>
-          <p:cNvPr id="30" name="Google Shape;30;p22"/>
+          <p:cNvPr id="37" name="Google Shape;37;p26"/>
           <p:cNvSpPr txBox="1">
             <a:spLocks noGrp="1"/>
           </p:cNvSpPr>
@@ -7491,7 +8566,7 @@
       </p:sp>
       <p:sp>
         <p:nvSpPr>
-          <p:cNvPr id="31" name="Google Shape;31;p22"/>
+          <p:cNvPr id="38" name="Google Shape;38;p26"/>
           <p:cNvSpPr txBox="1">
             <a:spLocks noGrp="1"/>
           </p:cNvSpPr>
@@ -7651,7 +8726,7 @@
       </p:sp>
       <p:sp>
         <p:nvSpPr>
-          <p:cNvPr id="32" name="Google Shape;32;p22"/>
+          <p:cNvPr id="39" name="Google Shape;39;p26"/>
           <p:cNvSpPr txBox="1">
             <a:spLocks noGrp="1"/>
           </p:cNvSpPr>
@@ -7811,7 +8886,7 @@
       </p:sp>
       <p:sp>
         <p:nvSpPr>
-          <p:cNvPr id="33" name="Google Shape;33;p22"/>
+          <p:cNvPr id="40" name="Google Shape;40;p26"/>
           <p:cNvSpPr txBox="1">
             <a:spLocks noGrp="1"/>
           </p:cNvSpPr>
@@ -8098,12 +9173,12 @@
 </p:sldLayout>
 </file>
 
-<file path=ppt/slideLayouts/slideLayout4.xml><?xml version="1.0" encoding="utf-8"?>
+<file path=ppt/slideLayouts/slideLayout5.xml><?xml version="1.0" encoding="utf-8"?>
 <p:sldLayout xmlns:a="http://schemas.openxmlformats.org/drawingml/2006/main" xmlns:r="http://schemas.openxmlformats.org/officeDocument/2006/relationships" xmlns:p="http://schemas.openxmlformats.org/presentationml/2006/main" matchingName="Comparison" type="twoTxTwoObj">
   <p:cSld name="TWO_OBJECTS_WITH_TEXT">
     <p:spTree>
       <p:nvGrpSpPr>
-        <p:cNvPr id="1" name="Shape 34"/>
+        <p:cNvPr id="1" name="Shape 41"/>
         <p:cNvGrpSpPr/>
         <p:nvPr/>
       </p:nvGrpSpPr>
@@ -8117,7 +9192,7 @@
       </p:grpSpPr>
       <p:sp>
         <p:nvSpPr>
-          <p:cNvPr id="35" name="Google Shape;35;p23"/>
+          <p:cNvPr id="42" name="Google Shape;42;p27"/>
           <p:cNvSpPr txBox="1">
             <a:spLocks noGrp="1"/>
           </p:cNvSpPr>
@@ -8280,7 +9355,7 @@
       </p:sp>
       <p:sp>
         <p:nvSpPr>
-          <p:cNvPr id="36" name="Google Shape;36;p23"/>
+          <p:cNvPr id="43" name="Google Shape;43;p27"/>
           <p:cNvSpPr txBox="1">
             <a:spLocks noGrp="1"/>
           </p:cNvSpPr>
@@ -8467,7 +9542,7 @@
       </p:sp>
       <p:sp>
         <p:nvSpPr>
-          <p:cNvPr id="37" name="Google Shape;37;p23"/>
+          <p:cNvPr id="44" name="Google Shape;44;p27"/>
           <p:cNvSpPr txBox="1">
             <a:spLocks noGrp="1"/>
           </p:cNvSpPr>
@@ -8654,7 +9729,7 @@
       </p:sp>
       <p:sp>
         <p:nvSpPr>
-          <p:cNvPr id="38" name="Google Shape;38;p23"/>
+          <p:cNvPr id="45" name="Google Shape;45;p27"/>
           <p:cNvSpPr txBox="1">
             <a:spLocks noGrp="1"/>
           </p:cNvSpPr>
@@ -8841,7 +9916,7 @@
       </p:sp>
       <p:sp>
         <p:nvSpPr>
-          <p:cNvPr id="39" name="Google Shape;39;p23"/>
+          <p:cNvPr id="46" name="Google Shape;46;p27"/>
           <p:cNvSpPr txBox="1">
             <a:spLocks noGrp="1"/>
           </p:cNvSpPr>
@@ -9028,7 +10103,7 @@
       </p:sp>
       <p:sp>
         <p:nvSpPr>
-          <p:cNvPr id="40" name="Google Shape;40;p23"/>
+          <p:cNvPr id="47" name="Google Shape;47;p27"/>
           <p:cNvSpPr txBox="1">
             <a:spLocks noGrp="1"/>
           </p:cNvSpPr>
@@ -9188,7 +10263,7 @@
       </p:sp>
       <p:sp>
         <p:nvSpPr>
-          <p:cNvPr id="41" name="Google Shape;41;p23"/>
+          <p:cNvPr id="48" name="Google Shape;48;p27"/>
           <p:cNvSpPr txBox="1">
             <a:spLocks noGrp="1"/>
           </p:cNvSpPr>
@@ -9348,7 +10423,7 @@
       </p:sp>
       <p:sp>
         <p:nvSpPr>
-          <p:cNvPr id="42" name="Google Shape;42;p23"/>
+          <p:cNvPr id="49" name="Google Shape;49;p27"/>
           <p:cNvSpPr txBox="1">
             <a:spLocks noGrp="1"/>
           </p:cNvSpPr>
@@ -9635,12 +10710,12 @@
 </p:sldLayout>
 </file>
 
-<file path=ppt/slideLayouts/slideLayout5.xml><?xml version="1.0" encoding="utf-8"?>
+<file path=ppt/slideLayouts/slideLayout6.xml><?xml version="1.0" encoding="utf-8"?>
 <p:sldLayout xmlns:a="http://schemas.openxmlformats.org/drawingml/2006/main" xmlns:r="http://schemas.openxmlformats.org/officeDocument/2006/relationships" xmlns:p="http://schemas.openxmlformats.org/presentationml/2006/main" matchingName="Title Only" type="titleOnly">
   <p:cSld name="TITLE_ONLY">
     <p:spTree>
       <p:nvGrpSpPr>
-        <p:cNvPr id="1" name="Shape 43"/>
+        <p:cNvPr id="1" name="Shape 50"/>
         <p:cNvGrpSpPr/>
         <p:nvPr/>
       </p:nvGrpSpPr>
@@ -9654,7 +10729,7 @@
       </p:grpSpPr>
       <p:sp>
         <p:nvSpPr>
-          <p:cNvPr id="44" name="Google Shape;44;p24"/>
+          <p:cNvPr id="51" name="Google Shape;51;p28"/>
           <p:cNvSpPr txBox="1">
             <a:spLocks noGrp="1"/>
           </p:cNvSpPr>
@@ -9817,7 +10892,7 @@
       </p:sp>
       <p:sp>
         <p:nvSpPr>
-          <p:cNvPr id="45" name="Google Shape;45;p24"/>
+          <p:cNvPr id="52" name="Google Shape;52;p28"/>
           <p:cNvSpPr txBox="1">
             <a:spLocks noGrp="1"/>
           </p:cNvSpPr>
@@ -9977,7 +11052,7 @@
       </p:sp>
       <p:sp>
         <p:nvSpPr>
-          <p:cNvPr id="46" name="Google Shape;46;p24"/>
+          <p:cNvPr id="53" name="Google Shape;53;p28"/>
           <p:cNvSpPr txBox="1">
             <a:spLocks noGrp="1"/>
           </p:cNvSpPr>
@@ -10137,7 +11212,7 @@
       </p:sp>
       <p:sp>
         <p:nvSpPr>
-          <p:cNvPr id="47" name="Google Shape;47;p24"/>
+          <p:cNvPr id="54" name="Google Shape;54;p28"/>
           <p:cNvSpPr txBox="1">
             <a:spLocks noGrp="1"/>
           </p:cNvSpPr>
@@ -10424,12 +11499,12 @@
 </p:sldLayout>
 </file>
 
-<file path=ppt/slideLayouts/slideLayout6.xml><?xml version="1.0" encoding="utf-8"?>
+<file path=ppt/slideLayouts/slideLayout7.xml><?xml version="1.0" encoding="utf-8"?>
 <p:sldLayout xmlns:a="http://schemas.openxmlformats.org/drawingml/2006/main" xmlns:r="http://schemas.openxmlformats.org/officeDocument/2006/relationships" xmlns:p="http://schemas.openxmlformats.org/presentationml/2006/main" matchingName="Blank" type="blank">
   <p:cSld name="BLANK">
     <p:spTree>
       <p:nvGrpSpPr>
-        <p:cNvPr id="1" name="Shape 48"/>
+        <p:cNvPr id="1" name="Shape 55"/>
         <p:cNvGrpSpPr/>
         <p:nvPr/>
       </p:nvGrpSpPr>
@@ -10443,7 +11518,7 @@
       </p:grpSpPr>
       <p:sp>
         <p:nvSpPr>
-          <p:cNvPr id="49" name="Google Shape;49;p25"/>
+          <p:cNvPr id="56" name="Google Shape;56;p29"/>
           <p:cNvSpPr txBox="1">
             <a:spLocks noGrp="1"/>
           </p:cNvSpPr>
@@ -10603,7 +11678,7 @@
       </p:sp>
       <p:sp>
         <p:nvSpPr>
-          <p:cNvPr id="50" name="Google Shape;50;p25"/>
+          <p:cNvPr id="57" name="Google Shape;57;p29"/>
           <p:cNvSpPr txBox="1">
             <a:spLocks noGrp="1"/>
           </p:cNvSpPr>
@@ -10763,1171 +11838,7 @@
       </p:sp>
       <p:sp>
         <p:nvSpPr>
-          <p:cNvPr id="51" name="Google Shape;51;p25"/>
-          <p:cNvSpPr txBox="1">
-            <a:spLocks noGrp="1"/>
-          </p:cNvSpPr>
-          <p:nvPr>
-            <p:ph type="sldNum" idx="12"/>
-          </p:nvPr>
-        </p:nvSpPr>
-        <p:spPr>
-          <a:xfrm>
-            <a:off x="8610600" y="6356350"/>
-            <a:ext cx="2743200" cy="365125"/>
-          </a:xfrm>
-          <a:prstGeom prst="rect">
-            <a:avLst/>
-          </a:prstGeom>
-          <a:noFill/>
-          <a:ln>
-            <a:noFill/>
-          </a:ln>
-        </p:spPr>
-        <p:txBody>
-          <a:bodyPr spcFirstLastPara="1" wrap="square" lIns="91425" tIns="45700" rIns="91425" bIns="45700" anchor="ctr" anchorCtr="0">
-            <a:noAutofit/>
-          </a:bodyPr>
-          <a:lstStyle>
-            <a:lvl1pPr marL="0" marR="0" lvl="0" indent="0" algn="r">
-              <a:lnSpc>
-                <a:spcPct val="100000"/>
-              </a:lnSpc>
-              <a:spcBef>
-                <a:spcPts val="0"/>
-              </a:spcBef>
-              <a:spcAft>
-                <a:spcPts val="0"/>
-              </a:spcAft>
-              <a:buClr>
-                <a:srgbClr val="000000"/>
-              </a:buClr>
-              <a:buSzPts val="1200"/>
-              <a:buFont typeface="Arial"/>
-              <a:buNone/>
-              <a:defRPr sz="1200" b="0" i="0" u="none" strike="noStrike" cap="none">
-                <a:solidFill>
-                  <a:srgbClr val="888888"/>
-                </a:solidFill>
-                <a:latin typeface="Calibri"/>
-                <a:ea typeface="Calibri"/>
-                <a:cs typeface="Calibri"/>
-                <a:sym typeface="Calibri"/>
-              </a:defRPr>
-            </a:lvl1pPr>
-            <a:lvl2pPr marL="0" marR="0" lvl="1" indent="0" algn="r">
-              <a:lnSpc>
-                <a:spcPct val="100000"/>
-              </a:lnSpc>
-              <a:spcBef>
-                <a:spcPts val="0"/>
-              </a:spcBef>
-              <a:spcAft>
-                <a:spcPts val="0"/>
-              </a:spcAft>
-              <a:buClr>
-                <a:srgbClr val="000000"/>
-              </a:buClr>
-              <a:buSzPts val="1200"/>
-              <a:buFont typeface="Arial"/>
-              <a:buNone/>
-              <a:defRPr sz="1200" b="0" i="0" u="none" strike="noStrike" cap="none">
-                <a:solidFill>
-                  <a:srgbClr val="888888"/>
-                </a:solidFill>
-                <a:latin typeface="Calibri"/>
-                <a:ea typeface="Calibri"/>
-                <a:cs typeface="Calibri"/>
-                <a:sym typeface="Calibri"/>
-              </a:defRPr>
-            </a:lvl2pPr>
-            <a:lvl3pPr marL="0" marR="0" lvl="2" indent="0" algn="r">
-              <a:lnSpc>
-                <a:spcPct val="100000"/>
-              </a:lnSpc>
-              <a:spcBef>
-                <a:spcPts val="0"/>
-              </a:spcBef>
-              <a:spcAft>
-                <a:spcPts val="0"/>
-              </a:spcAft>
-              <a:buClr>
-                <a:srgbClr val="000000"/>
-              </a:buClr>
-              <a:buSzPts val="1200"/>
-              <a:buFont typeface="Arial"/>
-              <a:buNone/>
-              <a:defRPr sz="1200" b="0" i="0" u="none" strike="noStrike" cap="none">
-                <a:solidFill>
-                  <a:srgbClr val="888888"/>
-                </a:solidFill>
-                <a:latin typeface="Calibri"/>
-                <a:ea typeface="Calibri"/>
-                <a:cs typeface="Calibri"/>
-                <a:sym typeface="Calibri"/>
-              </a:defRPr>
-            </a:lvl3pPr>
-            <a:lvl4pPr marL="0" marR="0" lvl="3" indent="0" algn="r">
-              <a:lnSpc>
-                <a:spcPct val="100000"/>
-              </a:lnSpc>
-              <a:spcBef>
-                <a:spcPts val="0"/>
-              </a:spcBef>
-              <a:spcAft>
-                <a:spcPts val="0"/>
-              </a:spcAft>
-              <a:buClr>
-                <a:srgbClr val="000000"/>
-              </a:buClr>
-              <a:buSzPts val="1200"/>
-              <a:buFont typeface="Arial"/>
-              <a:buNone/>
-              <a:defRPr sz="1200" b="0" i="0" u="none" strike="noStrike" cap="none">
-                <a:solidFill>
-                  <a:srgbClr val="888888"/>
-                </a:solidFill>
-                <a:latin typeface="Calibri"/>
-                <a:ea typeface="Calibri"/>
-                <a:cs typeface="Calibri"/>
-                <a:sym typeface="Calibri"/>
-              </a:defRPr>
-            </a:lvl4pPr>
-            <a:lvl5pPr marL="0" marR="0" lvl="4" indent="0" algn="r">
-              <a:lnSpc>
-                <a:spcPct val="100000"/>
-              </a:lnSpc>
-              <a:spcBef>
-                <a:spcPts val="0"/>
-              </a:spcBef>
-              <a:spcAft>
-                <a:spcPts val="0"/>
-              </a:spcAft>
-              <a:buClr>
-                <a:srgbClr val="000000"/>
-              </a:buClr>
-              <a:buSzPts val="1200"/>
-              <a:buFont typeface="Arial"/>
-              <a:buNone/>
-              <a:defRPr sz="1200" b="0" i="0" u="none" strike="noStrike" cap="none">
-                <a:solidFill>
-                  <a:srgbClr val="888888"/>
-                </a:solidFill>
-                <a:latin typeface="Calibri"/>
-                <a:ea typeface="Calibri"/>
-                <a:cs typeface="Calibri"/>
-                <a:sym typeface="Calibri"/>
-              </a:defRPr>
-            </a:lvl5pPr>
-            <a:lvl6pPr marL="0" marR="0" lvl="5" indent="0" algn="r">
-              <a:lnSpc>
-                <a:spcPct val="100000"/>
-              </a:lnSpc>
-              <a:spcBef>
-                <a:spcPts val="0"/>
-              </a:spcBef>
-              <a:spcAft>
-                <a:spcPts val="0"/>
-              </a:spcAft>
-              <a:buClr>
-                <a:srgbClr val="000000"/>
-              </a:buClr>
-              <a:buSzPts val="1200"/>
-              <a:buFont typeface="Arial"/>
-              <a:buNone/>
-              <a:defRPr sz="1200" b="0" i="0" u="none" strike="noStrike" cap="none">
-                <a:solidFill>
-                  <a:srgbClr val="888888"/>
-                </a:solidFill>
-                <a:latin typeface="Calibri"/>
-                <a:ea typeface="Calibri"/>
-                <a:cs typeface="Calibri"/>
-                <a:sym typeface="Calibri"/>
-              </a:defRPr>
-            </a:lvl6pPr>
-            <a:lvl7pPr marL="0" marR="0" lvl="6" indent="0" algn="r">
-              <a:lnSpc>
-                <a:spcPct val="100000"/>
-              </a:lnSpc>
-              <a:spcBef>
-                <a:spcPts val="0"/>
-              </a:spcBef>
-              <a:spcAft>
-                <a:spcPts val="0"/>
-              </a:spcAft>
-              <a:buClr>
-                <a:srgbClr val="000000"/>
-              </a:buClr>
-              <a:buSzPts val="1200"/>
-              <a:buFont typeface="Arial"/>
-              <a:buNone/>
-              <a:defRPr sz="1200" b="0" i="0" u="none" strike="noStrike" cap="none">
-                <a:solidFill>
-                  <a:srgbClr val="888888"/>
-                </a:solidFill>
-                <a:latin typeface="Calibri"/>
-                <a:ea typeface="Calibri"/>
-                <a:cs typeface="Calibri"/>
-                <a:sym typeface="Calibri"/>
-              </a:defRPr>
-            </a:lvl7pPr>
-            <a:lvl8pPr marL="0" marR="0" lvl="7" indent="0" algn="r">
-              <a:lnSpc>
-                <a:spcPct val="100000"/>
-              </a:lnSpc>
-              <a:spcBef>
-                <a:spcPts val="0"/>
-              </a:spcBef>
-              <a:spcAft>
-                <a:spcPts val="0"/>
-              </a:spcAft>
-              <a:buClr>
-                <a:srgbClr val="000000"/>
-              </a:buClr>
-              <a:buSzPts val="1200"/>
-              <a:buFont typeface="Arial"/>
-              <a:buNone/>
-              <a:defRPr sz="1200" b="0" i="0" u="none" strike="noStrike" cap="none">
-                <a:solidFill>
-                  <a:srgbClr val="888888"/>
-                </a:solidFill>
-                <a:latin typeface="Calibri"/>
-                <a:ea typeface="Calibri"/>
-                <a:cs typeface="Calibri"/>
-                <a:sym typeface="Calibri"/>
-              </a:defRPr>
-            </a:lvl8pPr>
-            <a:lvl9pPr marL="0" marR="0" lvl="8" indent="0" algn="r">
-              <a:lnSpc>
-                <a:spcPct val="100000"/>
-              </a:lnSpc>
-              <a:spcBef>
-                <a:spcPts val="0"/>
-              </a:spcBef>
-              <a:spcAft>
-                <a:spcPts val="0"/>
-              </a:spcAft>
-              <a:buClr>
-                <a:srgbClr val="000000"/>
-              </a:buClr>
-              <a:buSzPts val="1200"/>
-              <a:buFont typeface="Arial"/>
-              <a:buNone/>
-              <a:defRPr sz="1200" b="0" i="0" u="none" strike="noStrike" cap="none">
-                <a:solidFill>
-                  <a:srgbClr val="888888"/>
-                </a:solidFill>
-                <a:latin typeface="Calibri"/>
-                <a:ea typeface="Calibri"/>
-                <a:cs typeface="Calibri"/>
-                <a:sym typeface="Calibri"/>
-              </a:defRPr>
-            </a:lvl9pPr>
-          </a:lstStyle>
-          <a:p>
-            <a:pPr marL="0" lvl="0" indent="0" algn="r" rtl="0">
-              <a:spcBef>
-                <a:spcPts val="0"/>
-              </a:spcBef>
-              <a:spcAft>
-                <a:spcPts val="0"/>
-              </a:spcAft>
-              <a:buNone/>
-            </a:pPr>
-            <a:fld id="{00000000-1234-1234-1234-123412341234}" type="slidenum">
-              <a:rPr lang="en-US"/>
-              <a:t>‹#›</a:t>
-            </a:fld>
-            <a:endParaRPr/>
-          </a:p>
-        </p:txBody>
-      </p:sp>
-    </p:spTree>
-  </p:cSld>
-  <p:clrMapOvr>
-    <a:masterClrMapping/>
-  </p:clrMapOvr>
-</p:sldLayout>
-</file>
-
-<file path=ppt/slideLayouts/slideLayout7.xml><?xml version="1.0" encoding="utf-8"?>
-<p:sldLayout xmlns:a="http://schemas.openxmlformats.org/drawingml/2006/main" xmlns:r="http://schemas.openxmlformats.org/officeDocument/2006/relationships" xmlns:p="http://schemas.openxmlformats.org/presentationml/2006/main" matchingName="Content with Caption" type="objTx">
-  <p:cSld name="OBJECT_WITH_CAPTION_TEXT">
-    <p:spTree>
-      <p:nvGrpSpPr>
-        <p:cNvPr id="1" name="Shape 52"/>
-        <p:cNvGrpSpPr/>
-        <p:nvPr/>
-      </p:nvGrpSpPr>
-      <p:grpSpPr>
-        <a:xfrm>
-          <a:off x="0" y="0"/>
-          <a:ext cx="0" cy="0"/>
-          <a:chOff x="0" y="0"/>
-          <a:chExt cx="0" cy="0"/>
-        </a:xfrm>
-      </p:grpSpPr>
-      <p:sp>
-        <p:nvSpPr>
-          <p:cNvPr id="53" name="Google Shape;53;p26"/>
-          <p:cNvSpPr txBox="1">
-            <a:spLocks noGrp="1"/>
-          </p:cNvSpPr>
-          <p:nvPr>
-            <p:ph type="title"/>
-          </p:nvPr>
-        </p:nvSpPr>
-        <p:spPr>
-          <a:xfrm>
-            <a:off x="839788" y="457200"/>
-            <a:ext cx="3932237" cy="1600200"/>
-          </a:xfrm>
-          <a:prstGeom prst="rect">
-            <a:avLst/>
-          </a:prstGeom>
-          <a:noFill/>
-          <a:ln>
-            <a:noFill/>
-          </a:ln>
-        </p:spPr>
-        <p:txBody>
-          <a:bodyPr spcFirstLastPara="1" wrap="square" lIns="91425" tIns="45700" rIns="91425" bIns="45700" anchor="b" anchorCtr="0">
-            <a:normAutofit/>
-          </a:bodyPr>
-          <a:lstStyle>
-            <a:lvl1pPr lvl="0" algn="l">
-              <a:lnSpc>
-                <a:spcPct val="90000"/>
-              </a:lnSpc>
-              <a:spcBef>
-                <a:spcPts val="0"/>
-              </a:spcBef>
-              <a:spcAft>
-                <a:spcPts val="0"/>
-              </a:spcAft>
-              <a:buClr>
-                <a:schemeClr val="dk1"/>
-              </a:buClr>
-              <a:buSzPts val="3200"/>
-              <a:buFont typeface="Calibri"/>
-              <a:buNone/>
-              <a:defRPr sz="3200"/>
-            </a:lvl1pPr>
-            <a:lvl2pPr lvl="1" algn="l">
-              <a:lnSpc>
-                <a:spcPct val="100000"/>
-              </a:lnSpc>
-              <a:spcBef>
-                <a:spcPts val="0"/>
-              </a:spcBef>
-              <a:spcAft>
-                <a:spcPts val="0"/>
-              </a:spcAft>
-              <a:buSzPts val="1400"/>
-              <a:buNone/>
-              <a:defRPr/>
-            </a:lvl2pPr>
-            <a:lvl3pPr lvl="2" algn="l">
-              <a:lnSpc>
-                <a:spcPct val="100000"/>
-              </a:lnSpc>
-              <a:spcBef>
-                <a:spcPts val="0"/>
-              </a:spcBef>
-              <a:spcAft>
-                <a:spcPts val="0"/>
-              </a:spcAft>
-              <a:buSzPts val="1400"/>
-              <a:buNone/>
-              <a:defRPr/>
-            </a:lvl3pPr>
-            <a:lvl4pPr lvl="3" algn="l">
-              <a:lnSpc>
-                <a:spcPct val="100000"/>
-              </a:lnSpc>
-              <a:spcBef>
-                <a:spcPts val="0"/>
-              </a:spcBef>
-              <a:spcAft>
-                <a:spcPts val="0"/>
-              </a:spcAft>
-              <a:buSzPts val="1400"/>
-              <a:buNone/>
-              <a:defRPr/>
-            </a:lvl4pPr>
-            <a:lvl5pPr lvl="4" algn="l">
-              <a:lnSpc>
-                <a:spcPct val="100000"/>
-              </a:lnSpc>
-              <a:spcBef>
-                <a:spcPts val="0"/>
-              </a:spcBef>
-              <a:spcAft>
-                <a:spcPts val="0"/>
-              </a:spcAft>
-              <a:buSzPts val="1400"/>
-              <a:buNone/>
-              <a:defRPr/>
-            </a:lvl5pPr>
-            <a:lvl6pPr lvl="5" algn="l">
-              <a:lnSpc>
-                <a:spcPct val="100000"/>
-              </a:lnSpc>
-              <a:spcBef>
-                <a:spcPts val="0"/>
-              </a:spcBef>
-              <a:spcAft>
-                <a:spcPts val="0"/>
-              </a:spcAft>
-              <a:buSzPts val="1400"/>
-              <a:buNone/>
-              <a:defRPr/>
-            </a:lvl6pPr>
-            <a:lvl7pPr lvl="6" algn="l">
-              <a:lnSpc>
-                <a:spcPct val="100000"/>
-              </a:lnSpc>
-              <a:spcBef>
-                <a:spcPts val="0"/>
-              </a:spcBef>
-              <a:spcAft>
-                <a:spcPts val="0"/>
-              </a:spcAft>
-              <a:buSzPts val="1400"/>
-              <a:buNone/>
-              <a:defRPr/>
-            </a:lvl7pPr>
-            <a:lvl8pPr lvl="7" algn="l">
-              <a:lnSpc>
-                <a:spcPct val="100000"/>
-              </a:lnSpc>
-              <a:spcBef>
-                <a:spcPts val="0"/>
-              </a:spcBef>
-              <a:spcAft>
-                <a:spcPts val="0"/>
-              </a:spcAft>
-              <a:buSzPts val="1400"/>
-              <a:buNone/>
-              <a:defRPr/>
-            </a:lvl8pPr>
-            <a:lvl9pPr lvl="8" algn="l">
-              <a:lnSpc>
-                <a:spcPct val="100000"/>
-              </a:lnSpc>
-              <a:spcBef>
-                <a:spcPts val="0"/>
-              </a:spcBef>
-              <a:spcAft>
-                <a:spcPts val="0"/>
-              </a:spcAft>
-              <a:buSzPts val="1400"/>
-              <a:buNone/>
-              <a:defRPr/>
-            </a:lvl9pPr>
-          </a:lstStyle>
-          <a:p>
-            <a:endParaRPr/>
-          </a:p>
-        </p:txBody>
-      </p:sp>
-      <p:sp>
-        <p:nvSpPr>
-          <p:cNvPr id="54" name="Google Shape;54;p26"/>
-          <p:cNvSpPr txBox="1">
-            <a:spLocks noGrp="1"/>
-          </p:cNvSpPr>
-          <p:nvPr>
-            <p:ph type="body" idx="1"/>
-          </p:nvPr>
-        </p:nvSpPr>
-        <p:spPr>
-          <a:xfrm>
-            <a:off x="5183188" y="987425"/>
-            <a:ext cx="6172200" cy="4873625"/>
-          </a:xfrm>
-          <a:prstGeom prst="rect">
-            <a:avLst/>
-          </a:prstGeom>
-          <a:noFill/>
-          <a:ln>
-            <a:noFill/>
-          </a:ln>
-        </p:spPr>
-        <p:txBody>
-          <a:bodyPr spcFirstLastPara="1" wrap="square" lIns="91425" tIns="45700" rIns="91425" bIns="45700" anchor="t" anchorCtr="0">
-            <a:normAutofit/>
-          </a:bodyPr>
-          <a:lstStyle>
-            <a:lvl1pPr marL="457200" lvl="0" indent="-431800" algn="l">
-              <a:lnSpc>
-                <a:spcPct val="90000"/>
-              </a:lnSpc>
-              <a:spcBef>
-                <a:spcPts val="1000"/>
-              </a:spcBef>
-              <a:spcAft>
-                <a:spcPts val="0"/>
-              </a:spcAft>
-              <a:buClr>
-                <a:schemeClr val="dk1"/>
-              </a:buClr>
-              <a:buSzPts val="3200"/>
-              <a:buChar char="•"/>
-              <a:defRPr sz="3200"/>
-            </a:lvl1pPr>
-            <a:lvl2pPr marL="914400" lvl="1" indent="-406400" algn="l">
-              <a:lnSpc>
-                <a:spcPct val="90000"/>
-              </a:lnSpc>
-              <a:spcBef>
-                <a:spcPts val="500"/>
-              </a:spcBef>
-              <a:spcAft>
-                <a:spcPts val="0"/>
-              </a:spcAft>
-              <a:buClr>
-                <a:schemeClr val="dk1"/>
-              </a:buClr>
-              <a:buSzPts val="2800"/>
-              <a:buChar char="•"/>
-              <a:defRPr sz="2800"/>
-            </a:lvl2pPr>
-            <a:lvl3pPr marL="1371600" lvl="2" indent="-381000" algn="l">
-              <a:lnSpc>
-                <a:spcPct val="90000"/>
-              </a:lnSpc>
-              <a:spcBef>
-                <a:spcPts val="500"/>
-              </a:spcBef>
-              <a:spcAft>
-                <a:spcPts val="0"/>
-              </a:spcAft>
-              <a:buClr>
-                <a:schemeClr val="dk1"/>
-              </a:buClr>
-              <a:buSzPts val="2400"/>
-              <a:buChar char="•"/>
-              <a:defRPr sz="2400"/>
-            </a:lvl3pPr>
-            <a:lvl4pPr marL="1828800" lvl="3" indent="-355600" algn="l">
-              <a:lnSpc>
-                <a:spcPct val="90000"/>
-              </a:lnSpc>
-              <a:spcBef>
-                <a:spcPts val="500"/>
-              </a:spcBef>
-              <a:spcAft>
-                <a:spcPts val="0"/>
-              </a:spcAft>
-              <a:buClr>
-                <a:schemeClr val="dk1"/>
-              </a:buClr>
-              <a:buSzPts val="2000"/>
-              <a:buChar char="•"/>
-              <a:defRPr sz="2000"/>
-            </a:lvl4pPr>
-            <a:lvl5pPr marL="2286000" lvl="4" indent="-355600" algn="l">
-              <a:lnSpc>
-                <a:spcPct val="90000"/>
-              </a:lnSpc>
-              <a:spcBef>
-                <a:spcPts val="500"/>
-              </a:spcBef>
-              <a:spcAft>
-                <a:spcPts val="0"/>
-              </a:spcAft>
-              <a:buClr>
-                <a:schemeClr val="dk1"/>
-              </a:buClr>
-              <a:buSzPts val="2000"/>
-              <a:buChar char="•"/>
-              <a:defRPr sz="2000"/>
-            </a:lvl5pPr>
-            <a:lvl6pPr marL="2743200" lvl="5" indent="-355600" algn="l">
-              <a:lnSpc>
-                <a:spcPct val="90000"/>
-              </a:lnSpc>
-              <a:spcBef>
-                <a:spcPts val="500"/>
-              </a:spcBef>
-              <a:spcAft>
-                <a:spcPts val="0"/>
-              </a:spcAft>
-              <a:buClr>
-                <a:schemeClr val="dk1"/>
-              </a:buClr>
-              <a:buSzPts val="2000"/>
-              <a:buChar char="•"/>
-              <a:defRPr sz="2000"/>
-            </a:lvl6pPr>
-            <a:lvl7pPr marL="3200400" lvl="6" indent="-355600" algn="l">
-              <a:lnSpc>
-                <a:spcPct val="90000"/>
-              </a:lnSpc>
-              <a:spcBef>
-                <a:spcPts val="500"/>
-              </a:spcBef>
-              <a:spcAft>
-                <a:spcPts val="0"/>
-              </a:spcAft>
-              <a:buClr>
-                <a:schemeClr val="dk1"/>
-              </a:buClr>
-              <a:buSzPts val="2000"/>
-              <a:buChar char="•"/>
-              <a:defRPr sz="2000"/>
-            </a:lvl7pPr>
-            <a:lvl8pPr marL="3657600" lvl="7" indent="-355600" algn="l">
-              <a:lnSpc>
-                <a:spcPct val="90000"/>
-              </a:lnSpc>
-              <a:spcBef>
-                <a:spcPts val="500"/>
-              </a:spcBef>
-              <a:spcAft>
-                <a:spcPts val="0"/>
-              </a:spcAft>
-              <a:buClr>
-                <a:schemeClr val="dk1"/>
-              </a:buClr>
-              <a:buSzPts val="2000"/>
-              <a:buChar char="•"/>
-              <a:defRPr sz="2000"/>
-            </a:lvl8pPr>
-            <a:lvl9pPr marL="4114800" lvl="8" indent="-355600" algn="l">
-              <a:lnSpc>
-                <a:spcPct val="90000"/>
-              </a:lnSpc>
-              <a:spcBef>
-                <a:spcPts val="500"/>
-              </a:spcBef>
-              <a:spcAft>
-                <a:spcPts val="0"/>
-              </a:spcAft>
-              <a:buClr>
-                <a:schemeClr val="dk1"/>
-              </a:buClr>
-              <a:buSzPts val="2000"/>
-              <a:buChar char="•"/>
-              <a:defRPr sz="2000"/>
-            </a:lvl9pPr>
-          </a:lstStyle>
-          <a:p>
-            <a:endParaRPr/>
-          </a:p>
-        </p:txBody>
-      </p:sp>
-      <p:sp>
-        <p:nvSpPr>
-          <p:cNvPr id="55" name="Google Shape;55;p26"/>
-          <p:cNvSpPr txBox="1">
-            <a:spLocks noGrp="1"/>
-          </p:cNvSpPr>
-          <p:nvPr>
-            <p:ph type="body" idx="2"/>
-          </p:nvPr>
-        </p:nvSpPr>
-        <p:spPr>
-          <a:xfrm>
-            <a:off x="839788" y="2057400"/>
-            <a:ext cx="3932237" cy="3811588"/>
-          </a:xfrm>
-          <a:prstGeom prst="rect">
-            <a:avLst/>
-          </a:prstGeom>
-          <a:noFill/>
-          <a:ln>
-            <a:noFill/>
-          </a:ln>
-        </p:spPr>
-        <p:txBody>
-          <a:bodyPr spcFirstLastPara="1" wrap="square" lIns="91425" tIns="45700" rIns="91425" bIns="45700" anchor="t" anchorCtr="0">
-            <a:normAutofit/>
-          </a:bodyPr>
-          <a:lstStyle>
-            <a:lvl1pPr marL="457200" lvl="0" indent="-228600" algn="l">
-              <a:lnSpc>
-                <a:spcPct val="90000"/>
-              </a:lnSpc>
-              <a:spcBef>
-                <a:spcPts val="1000"/>
-              </a:spcBef>
-              <a:spcAft>
-                <a:spcPts val="0"/>
-              </a:spcAft>
-              <a:buClr>
-                <a:schemeClr val="dk1"/>
-              </a:buClr>
-              <a:buSzPts val="1600"/>
-              <a:buNone/>
-              <a:defRPr sz="1600"/>
-            </a:lvl1pPr>
-            <a:lvl2pPr marL="914400" lvl="1" indent="-228600" algn="l">
-              <a:lnSpc>
-                <a:spcPct val="90000"/>
-              </a:lnSpc>
-              <a:spcBef>
-                <a:spcPts val="500"/>
-              </a:spcBef>
-              <a:spcAft>
-                <a:spcPts val="0"/>
-              </a:spcAft>
-              <a:buClr>
-                <a:schemeClr val="dk1"/>
-              </a:buClr>
-              <a:buSzPts val="1400"/>
-              <a:buNone/>
-              <a:defRPr sz="1400"/>
-            </a:lvl2pPr>
-            <a:lvl3pPr marL="1371600" lvl="2" indent="-228600" algn="l">
-              <a:lnSpc>
-                <a:spcPct val="90000"/>
-              </a:lnSpc>
-              <a:spcBef>
-                <a:spcPts val="500"/>
-              </a:spcBef>
-              <a:spcAft>
-                <a:spcPts val="0"/>
-              </a:spcAft>
-              <a:buClr>
-                <a:schemeClr val="dk1"/>
-              </a:buClr>
-              <a:buSzPts val="1200"/>
-              <a:buNone/>
-              <a:defRPr sz="1200"/>
-            </a:lvl3pPr>
-            <a:lvl4pPr marL="1828800" lvl="3" indent="-228600" algn="l">
-              <a:lnSpc>
-                <a:spcPct val="90000"/>
-              </a:lnSpc>
-              <a:spcBef>
-                <a:spcPts val="500"/>
-              </a:spcBef>
-              <a:spcAft>
-                <a:spcPts val="0"/>
-              </a:spcAft>
-              <a:buClr>
-                <a:schemeClr val="dk1"/>
-              </a:buClr>
-              <a:buSzPts val="1000"/>
-              <a:buNone/>
-              <a:defRPr sz="1000"/>
-            </a:lvl4pPr>
-            <a:lvl5pPr marL="2286000" lvl="4" indent="-228600" algn="l">
-              <a:lnSpc>
-                <a:spcPct val="90000"/>
-              </a:lnSpc>
-              <a:spcBef>
-                <a:spcPts val="500"/>
-              </a:spcBef>
-              <a:spcAft>
-                <a:spcPts val="0"/>
-              </a:spcAft>
-              <a:buClr>
-                <a:schemeClr val="dk1"/>
-              </a:buClr>
-              <a:buSzPts val="1000"/>
-              <a:buNone/>
-              <a:defRPr sz="1000"/>
-            </a:lvl5pPr>
-            <a:lvl6pPr marL="2743200" lvl="5" indent="-228600" algn="l">
-              <a:lnSpc>
-                <a:spcPct val="90000"/>
-              </a:lnSpc>
-              <a:spcBef>
-                <a:spcPts val="500"/>
-              </a:spcBef>
-              <a:spcAft>
-                <a:spcPts val="0"/>
-              </a:spcAft>
-              <a:buClr>
-                <a:schemeClr val="dk1"/>
-              </a:buClr>
-              <a:buSzPts val="1000"/>
-              <a:buNone/>
-              <a:defRPr sz="1000"/>
-            </a:lvl6pPr>
-            <a:lvl7pPr marL="3200400" lvl="6" indent="-228600" algn="l">
-              <a:lnSpc>
-                <a:spcPct val="90000"/>
-              </a:lnSpc>
-              <a:spcBef>
-                <a:spcPts val="500"/>
-              </a:spcBef>
-              <a:spcAft>
-                <a:spcPts val="0"/>
-              </a:spcAft>
-              <a:buClr>
-                <a:schemeClr val="dk1"/>
-              </a:buClr>
-              <a:buSzPts val="1000"/>
-              <a:buNone/>
-              <a:defRPr sz="1000"/>
-            </a:lvl7pPr>
-            <a:lvl8pPr marL="3657600" lvl="7" indent="-228600" algn="l">
-              <a:lnSpc>
-                <a:spcPct val="90000"/>
-              </a:lnSpc>
-              <a:spcBef>
-                <a:spcPts val="500"/>
-              </a:spcBef>
-              <a:spcAft>
-                <a:spcPts val="0"/>
-              </a:spcAft>
-              <a:buClr>
-                <a:schemeClr val="dk1"/>
-              </a:buClr>
-              <a:buSzPts val="1000"/>
-              <a:buNone/>
-              <a:defRPr sz="1000"/>
-            </a:lvl8pPr>
-            <a:lvl9pPr marL="4114800" lvl="8" indent="-228600" algn="l">
-              <a:lnSpc>
-                <a:spcPct val="90000"/>
-              </a:lnSpc>
-              <a:spcBef>
-                <a:spcPts val="500"/>
-              </a:spcBef>
-              <a:spcAft>
-                <a:spcPts val="0"/>
-              </a:spcAft>
-              <a:buClr>
-                <a:schemeClr val="dk1"/>
-              </a:buClr>
-              <a:buSzPts val="1000"/>
-              <a:buNone/>
-              <a:defRPr sz="1000"/>
-            </a:lvl9pPr>
-          </a:lstStyle>
-          <a:p>
-            <a:endParaRPr/>
-          </a:p>
-        </p:txBody>
-      </p:sp>
-      <p:sp>
-        <p:nvSpPr>
-          <p:cNvPr id="56" name="Google Shape;56;p26"/>
-          <p:cNvSpPr txBox="1">
-            <a:spLocks noGrp="1"/>
-          </p:cNvSpPr>
-          <p:nvPr>
-            <p:ph type="dt" idx="10"/>
-          </p:nvPr>
-        </p:nvSpPr>
-        <p:spPr>
-          <a:xfrm>
-            <a:off x="838200" y="6356350"/>
-            <a:ext cx="2743200" cy="365125"/>
-          </a:xfrm>
-          <a:prstGeom prst="rect">
-            <a:avLst/>
-          </a:prstGeom>
-          <a:noFill/>
-          <a:ln>
-            <a:noFill/>
-          </a:ln>
-        </p:spPr>
-        <p:txBody>
-          <a:bodyPr spcFirstLastPara="1" wrap="square" lIns="91425" tIns="45700" rIns="91425" bIns="45700" anchor="ctr" anchorCtr="0">
-            <a:noAutofit/>
-          </a:bodyPr>
-          <a:lstStyle>
-            <a:lvl1pPr lvl="0" algn="l">
-              <a:lnSpc>
-                <a:spcPct val="100000"/>
-              </a:lnSpc>
-              <a:spcBef>
-                <a:spcPts val="0"/>
-              </a:spcBef>
-              <a:spcAft>
-                <a:spcPts val="0"/>
-              </a:spcAft>
-              <a:buSzPts val="1400"/>
-              <a:buNone/>
-              <a:defRPr/>
-            </a:lvl1pPr>
-            <a:lvl2pPr lvl="1" algn="l">
-              <a:lnSpc>
-                <a:spcPct val="100000"/>
-              </a:lnSpc>
-              <a:spcBef>
-                <a:spcPts val="0"/>
-              </a:spcBef>
-              <a:spcAft>
-                <a:spcPts val="0"/>
-              </a:spcAft>
-              <a:buSzPts val="1400"/>
-              <a:buNone/>
-              <a:defRPr/>
-            </a:lvl2pPr>
-            <a:lvl3pPr lvl="2" algn="l">
-              <a:lnSpc>
-                <a:spcPct val="100000"/>
-              </a:lnSpc>
-              <a:spcBef>
-                <a:spcPts val="0"/>
-              </a:spcBef>
-              <a:spcAft>
-                <a:spcPts val="0"/>
-              </a:spcAft>
-              <a:buSzPts val="1400"/>
-              <a:buNone/>
-              <a:defRPr/>
-            </a:lvl3pPr>
-            <a:lvl4pPr lvl="3" algn="l">
-              <a:lnSpc>
-                <a:spcPct val="100000"/>
-              </a:lnSpc>
-              <a:spcBef>
-                <a:spcPts val="0"/>
-              </a:spcBef>
-              <a:spcAft>
-                <a:spcPts val="0"/>
-              </a:spcAft>
-              <a:buSzPts val="1400"/>
-              <a:buNone/>
-              <a:defRPr/>
-            </a:lvl4pPr>
-            <a:lvl5pPr lvl="4" algn="l">
-              <a:lnSpc>
-                <a:spcPct val="100000"/>
-              </a:lnSpc>
-              <a:spcBef>
-                <a:spcPts val="0"/>
-              </a:spcBef>
-              <a:spcAft>
-                <a:spcPts val="0"/>
-              </a:spcAft>
-              <a:buSzPts val="1400"/>
-              <a:buNone/>
-              <a:defRPr/>
-            </a:lvl5pPr>
-            <a:lvl6pPr lvl="5" algn="l">
-              <a:lnSpc>
-                <a:spcPct val="100000"/>
-              </a:lnSpc>
-              <a:spcBef>
-                <a:spcPts val="0"/>
-              </a:spcBef>
-              <a:spcAft>
-                <a:spcPts val="0"/>
-              </a:spcAft>
-              <a:buSzPts val="1400"/>
-              <a:buNone/>
-              <a:defRPr/>
-            </a:lvl6pPr>
-            <a:lvl7pPr lvl="6" algn="l">
-              <a:lnSpc>
-                <a:spcPct val="100000"/>
-              </a:lnSpc>
-              <a:spcBef>
-                <a:spcPts val="0"/>
-              </a:spcBef>
-              <a:spcAft>
-                <a:spcPts val="0"/>
-              </a:spcAft>
-              <a:buSzPts val="1400"/>
-              <a:buNone/>
-              <a:defRPr/>
-            </a:lvl7pPr>
-            <a:lvl8pPr lvl="7" algn="l">
-              <a:lnSpc>
-                <a:spcPct val="100000"/>
-              </a:lnSpc>
-              <a:spcBef>
-                <a:spcPts val="0"/>
-              </a:spcBef>
-              <a:spcAft>
-                <a:spcPts val="0"/>
-              </a:spcAft>
-              <a:buSzPts val="1400"/>
-              <a:buNone/>
-              <a:defRPr/>
-            </a:lvl8pPr>
-            <a:lvl9pPr lvl="8" algn="l">
-              <a:lnSpc>
-                <a:spcPct val="100000"/>
-              </a:lnSpc>
-              <a:spcBef>
-                <a:spcPts val="0"/>
-              </a:spcBef>
-              <a:spcAft>
-                <a:spcPts val="0"/>
-              </a:spcAft>
-              <a:buSzPts val="1400"/>
-              <a:buNone/>
-              <a:defRPr/>
-            </a:lvl9pPr>
-          </a:lstStyle>
-          <a:p>
-            <a:endParaRPr/>
-          </a:p>
-        </p:txBody>
-      </p:sp>
-      <p:sp>
-        <p:nvSpPr>
-          <p:cNvPr id="57" name="Google Shape;57;p26"/>
-          <p:cNvSpPr txBox="1">
-            <a:spLocks noGrp="1"/>
-          </p:cNvSpPr>
-          <p:nvPr>
-            <p:ph type="ftr" idx="11"/>
-          </p:nvPr>
-        </p:nvSpPr>
-        <p:spPr>
-          <a:xfrm>
-            <a:off x="4038600" y="6356350"/>
-            <a:ext cx="4114800" cy="365125"/>
-          </a:xfrm>
-          <a:prstGeom prst="rect">
-            <a:avLst/>
-          </a:prstGeom>
-          <a:noFill/>
-          <a:ln>
-            <a:noFill/>
-          </a:ln>
-        </p:spPr>
-        <p:txBody>
-          <a:bodyPr spcFirstLastPara="1" wrap="square" lIns="91425" tIns="45700" rIns="91425" bIns="45700" anchor="ctr" anchorCtr="0">
-            <a:noAutofit/>
-          </a:bodyPr>
-          <a:lstStyle>
-            <a:lvl1pPr lvl="0" algn="ctr">
-              <a:lnSpc>
-                <a:spcPct val="100000"/>
-              </a:lnSpc>
-              <a:spcBef>
-                <a:spcPts val="0"/>
-              </a:spcBef>
-              <a:spcAft>
-                <a:spcPts val="0"/>
-              </a:spcAft>
-              <a:buSzPts val="1400"/>
-              <a:buNone/>
-              <a:defRPr/>
-            </a:lvl1pPr>
-            <a:lvl2pPr lvl="1" algn="l">
-              <a:lnSpc>
-                <a:spcPct val="100000"/>
-              </a:lnSpc>
-              <a:spcBef>
-                <a:spcPts val="0"/>
-              </a:spcBef>
-              <a:spcAft>
-                <a:spcPts val="0"/>
-              </a:spcAft>
-              <a:buSzPts val="1400"/>
-              <a:buNone/>
-              <a:defRPr/>
-            </a:lvl2pPr>
-            <a:lvl3pPr lvl="2" algn="l">
-              <a:lnSpc>
-                <a:spcPct val="100000"/>
-              </a:lnSpc>
-              <a:spcBef>
-                <a:spcPts val="0"/>
-              </a:spcBef>
-              <a:spcAft>
-                <a:spcPts val="0"/>
-              </a:spcAft>
-              <a:buSzPts val="1400"/>
-              <a:buNone/>
-              <a:defRPr/>
-            </a:lvl3pPr>
-            <a:lvl4pPr lvl="3" algn="l">
-              <a:lnSpc>
-                <a:spcPct val="100000"/>
-              </a:lnSpc>
-              <a:spcBef>
-                <a:spcPts val="0"/>
-              </a:spcBef>
-              <a:spcAft>
-                <a:spcPts val="0"/>
-              </a:spcAft>
-              <a:buSzPts val="1400"/>
-              <a:buNone/>
-              <a:defRPr/>
-            </a:lvl4pPr>
-            <a:lvl5pPr lvl="4" algn="l">
-              <a:lnSpc>
-                <a:spcPct val="100000"/>
-              </a:lnSpc>
-              <a:spcBef>
-                <a:spcPts val="0"/>
-              </a:spcBef>
-              <a:spcAft>
-                <a:spcPts val="0"/>
-              </a:spcAft>
-              <a:buSzPts val="1400"/>
-              <a:buNone/>
-              <a:defRPr/>
-            </a:lvl5pPr>
-            <a:lvl6pPr lvl="5" algn="l">
-              <a:lnSpc>
-                <a:spcPct val="100000"/>
-              </a:lnSpc>
-              <a:spcBef>
-                <a:spcPts val="0"/>
-              </a:spcBef>
-              <a:spcAft>
-                <a:spcPts val="0"/>
-              </a:spcAft>
-              <a:buSzPts val="1400"/>
-              <a:buNone/>
-              <a:defRPr/>
-            </a:lvl6pPr>
-            <a:lvl7pPr lvl="6" algn="l">
-              <a:lnSpc>
-                <a:spcPct val="100000"/>
-              </a:lnSpc>
-              <a:spcBef>
-                <a:spcPts val="0"/>
-              </a:spcBef>
-              <a:spcAft>
-                <a:spcPts val="0"/>
-              </a:spcAft>
-              <a:buSzPts val="1400"/>
-              <a:buNone/>
-              <a:defRPr/>
-            </a:lvl7pPr>
-            <a:lvl8pPr lvl="7" algn="l">
-              <a:lnSpc>
-                <a:spcPct val="100000"/>
-              </a:lnSpc>
-              <a:spcBef>
-                <a:spcPts val="0"/>
-              </a:spcBef>
-              <a:spcAft>
-                <a:spcPts val="0"/>
-              </a:spcAft>
-              <a:buSzPts val="1400"/>
-              <a:buNone/>
-              <a:defRPr/>
-            </a:lvl8pPr>
-            <a:lvl9pPr lvl="8" algn="l">
-              <a:lnSpc>
-                <a:spcPct val="100000"/>
-              </a:lnSpc>
-              <a:spcBef>
-                <a:spcPts val="0"/>
-              </a:spcBef>
-              <a:spcAft>
-                <a:spcPts val="0"/>
-              </a:spcAft>
-              <a:buSzPts val="1400"/>
-              <a:buNone/>
-              <a:defRPr/>
-            </a:lvl9pPr>
-          </a:lstStyle>
-          <a:p>
-            <a:endParaRPr/>
-          </a:p>
-        </p:txBody>
-      </p:sp>
-      <p:sp>
-        <p:nvSpPr>
-          <p:cNvPr id="58" name="Google Shape;58;p26"/>
+          <p:cNvPr id="58" name="Google Shape;58;p29"/>
           <p:cNvSpPr txBox="1">
             <a:spLocks noGrp="1"/>
           </p:cNvSpPr>
@@ -12233,7 +12144,7 @@
       </p:grpSpPr>
       <p:sp>
         <p:nvSpPr>
-          <p:cNvPr id="60" name="Google Shape;60;p27"/>
+          <p:cNvPr id="60" name="Google Shape;60;p30"/>
           <p:cNvSpPr txBox="1">
             <a:spLocks noGrp="1"/>
           </p:cNvSpPr>
@@ -12397,7 +12308,7 @@
       </p:sp>
       <p:sp>
         <p:nvSpPr>
-          <p:cNvPr id="61" name="Google Shape;61;p27"/>
+          <p:cNvPr id="61" name="Google Shape;61;p30"/>
           <p:cNvSpPr>
             <a:spLocks noGrp="1"/>
           </p:cNvSpPr>
@@ -12421,7 +12332,7 @@
       </p:sp>
       <p:sp>
         <p:nvSpPr>
-          <p:cNvPr id="62" name="Google Shape;62;p27"/>
+          <p:cNvPr id="62" name="Google Shape;62;p30"/>
           <p:cNvSpPr txBox="1">
             <a:spLocks noGrp="1"/>
           </p:cNvSpPr>
@@ -12608,7 +12519,7 @@
       </p:sp>
       <p:sp>
         <p:nvSpPr>
-          <p:cNvPr id="63" name="Google Shape;63;p27"/>
+          <p:cNvPr id="63" name="Google Shape;63;p30"/>
           <p:cNvSpPr txBox="1">
             <a:spLocks noGrp="1"/>
           </p:cNvSpPr>
@@ -12768,7 +12679,7 @@
       </p:sp>
       <p:sp>
         <p:nvSpPr>
-          <p:cNvPr id="64" name="Google Shape;64;p27"/>
+          <p:cNvPr id="64" name="Google Shape;64;p30"/>
           <p:cNvSpPr txBox="1">
             <a:spLocks noGrp="1"/>
           </p:cNvSpPr>
@@ -12928,7 +12839,7 @@
       </p:sp>
       <p:sp>
         <p:nvSpPr>
-          <p:cNvPr id="65" name="Google Shape;65;p27"/>
+          <p:cNvPr id="65" name="Google Shape;65;p30"/>
           <p:cNvSpPr txBox="1">
             <a:spLocks noGrp="1"/>
           </p:cNvSpPr>
@@ -13234,7 +13145,7 @@
       </p:grpSpPr>
       <p:sp>
         <p:nvSpPr>
-          <p:cNvPr id="67" name="Google Shape;67;p28"/>
+          <p:cNvPr id="67" name="Google Shape;67;p31"/>
           <p:cNvSpPr txBox="1">
             <a:spLocks noGrp="1"/>
           </p:cNvSpPr>
@@ -13397,7 +13308,7 @@
       </p:sp>
       <p:sp>
         <p:nvSpPr>
-          <p:cNvPr id="68" name="Google Shape;68;p28"/>
+          <p:cNvPr id="68" name="Google Shape;68;p31"/>
           <p:cNvSpPr txBox="1">
             <a:spLocks noGrp="1"/>
           </p:cNvSpPr>
@@ -13584,7 +13495,7 @@
       </p:sp>
       <p:sp>
         <p:nvSpPr>
-          <p:cNvPr id="69" name="Google Shape;69;p28"/>
+          <p:cNvPr id="69" name="Google Shape;69;p31"/>
           <p:cNvSpPr txBox="1">
             <a:spLocks noGrp="1"/>
           </p:cNvSpPr>
@@ -13744,7 +13655,7 @@
       </p:sp>
       <p:sp>
         <p:nvSpPr>
-          <p:cNvPr id="70" name="Google Shape;70;p28"/>
+          <p:cNvPr id="70" name="Google Shape;70;p31"/>
           <p:cNvSpPr txBox="1">
             <a:spLocks noGrp="1"/>
           </p:cNvSpPr>
@@ -13904,7 +13815,7 @@
       </p:sp>
       <p:sp>
         <p:nvSpPr>
-          <p:cNvPr id="71" name="Google Shape;71;p28"/>
+          <p:cNvPr id="71" name="Google Shape;71;p31"/>
           <p:cNvSpPr txBox="1">
             <a:spLocks noGrp="1"/>
           </p:cNvSpPr>
@@ -14218,7 +14129,7 @@
       </p:grpSpPr>
       <p:sp>
         <p:nvSpPr>
-          <p:cNvPr id="10" name="Google Shape;10;p18"/>
+          <p:cNvPr id="10" name="Google Shape;10;p22"/>
           <p:cNvSpPr txBox="1">
             <a:spLocks noGrp="1"/>
           </p:cNvSpPr>
@@ -14486,7 +14397,7 @@
       </p:sp>
       <p:sp>
         <p:nvSpPr>
-          <p:cNvPr id="11" name="Google Shape;11;p18"/>
+          <p:cNvPr id="11" name="Google Shape;11;p22"/>
           <p:cNvSpPr txBox="1">
             <a:spLocks noGrp="1"/>
           </p:cNvSpPr>
@@ -14754,7 +14665,7 @@
       </p:sp>
       <p:sp>
         <p:nvSpPr>
-          <p:cNvPr id="12" name="Google Shape;12;p18"/>
+          <p:cNvPr id="12" name="Google Shape;12;p22"/>
           <p:cNvSpPr txBox="1">
             <a:spLocks noGrp="1"/>
           </p:cNvSpPr>
@@ -15022,7 +14933,7 @@
       </p:sp>
       <p:sp>
         <p:nvSpPr>
-          <p:cNvPr id="13" name="Google Shape;13;p18"/>
+          <p:cNvPr id="13" name="Google Shape;13;p22"/>
           <p:cNvSpPr txBox="1">
             <a:spLocks noGrp="1"/>
           </p:cNvSpPr>
@@ -15290,7 +15201,7 @@
       </p:sp>
       <p:sp>
         <p:nvSpPr>
-          <p:cNvPr id="14" name="Google Shape;14;p18"/>
+          <p:cNvPr id="14" name="Google Shape;14;p22"/>
           <p:cNvSpPr txBox="1">
             <a:spLocks noGrp="1"/>
           </p:cNvSpPr>
@@ -16310,7 +16221,7 @@
         </p:grpSpPr>
         <p:grpSp>
           <p:nvGrpSpPr>
-            <p:cNvPr id="84" name="Google Shape;84;p1"/>
+            <p:cNvPr id="83" name="Google Shape;83;p1"/>
             <p:cNvGrpSpPr/>
             <p:nvPr/>
           </p:nvGrpSpPr>
@@ -16324,7 +16235,7 @@
           </p:grpSpPr>
           <p:cxnSp>
             <p:nvCxnSpPr>
-              <p:cNvPr id="85" name="Google Shape;85;p1"/>
+              <p:cNvPr id="84" name="Google Shape;84;p1"/>
               <p:cNvCxnSpPr/>
               <p:nvPr/>
             </p:nvCxnSpPr>
@@ -16350,7 +16261,7 @@
           </p:cxnSp>
           <p:cxnSp>
             <p:nvCxnSpPr>
-              <p:cNvPr id="86" name="Google Shape;86;p1"/>
+              <p:cNvPr id="85" name="Google Shape;85;p1"/>
               <p:cNvCxnSpPr/>
               <p:nvPr/>
             </p:nvCxnSpPr>
@@ -16377,7 +16288,7 @@
         </p:grpSp>
         <p:grpSp>
           <p:nvGrpSpPr>
-            <p:cNvPr id="87" name="Google Shape;87;p1"/>
+            <p:cNvPr id="86" name="Google Shape;86;p1"/>
             <p:cNvGrpSpPr/>
             <p:nvPr/>
           </p:nvGrpSpPr>
@@ -16391,7 +16302,7 @@
           </p:grpSpPr>
           <p:cxnSp>
             <p:nvCxnSpPr>
-              <p:cNvPr id="88" name="Google Shape;88;p1"/>
+              <p:cNvPr id="87" name="Google Shape;87;p1"/>
               <p:cNvCxnSpPr/>
               <p:nvPr/>
             </p:nvCxnSpPr>
@@ -16417,7 +16328,7 @@
           </p:cxnSp>
           <p:cxnSp>
             <p:nvCxnSpPr>
-              <p:cNvPr id="89" name="Google Shape;89;p1"/>
+              <p:cNvPr id="88" name="Google Shape;88;p1"/>
               <p:cNvCxnSpPr/>
               <p:nvPr/>
             </p:nvCxnSpPr>
@@ -16445,7 +16356,7 @@
       </p:grpSp>
       <p:sp>
         <p:nvSpPr>
-          <p:cNvPr id="90" name="Google Shape;90;p1"/>
+          <p:cNvPr id="89" name="Google Shape;89;p1"/>
           <p:cNvSpPr txBox="1"/>
           <p:nvPr/>
         </p:nvSpPr>
@@ -16486,7 +16397,7 @@
               <a:buNone/>
             </a:pPr>
             <a:r>
-              <a:rPr lang="en-US" sz="6000" b="0" i="0" u="none" strike="noStrike" cap="none" dirty="0">
+              <a:rPr lang="en-US" sz="6000" b="0" i="0" u="none" strike="noStrike" cap="none">
                 <a:solidFill>
                   <a:schemeClr val="dk1"/>
                 </a:solidFill>
@@ -16497,7 +16408,7 @@
               </a:rPr>
               <a:t>Generative Text</a:t>
             </a:r>
-            <a:endParaRPr sz="3600" b="0" i="0" u="none" strike="noStrike" cap="none" dirty="0">
+            <a:endParaRPr sz="3600" b="0" i="0" u="none" strike="noStrike" cap="none">
               <a:solidFill>
                 <a:srgbClr val="000000"/>
               </a:solidFill>
@@ -16522,7 +16433,7 @@
   <p:cSld>
     <p:spTree>
       <p:nvGrpSpPr>
-        <p:cNvPr id="1" name="Shape 169"/>
+        <p:cNvPr id="1" name="Shape 148"/>
         <p:cNvGrpSpPr/>
         <p:nvPr/>
       </p:nvGrpSpPr>
@@ -16536,14 +16447,14 @@
       </p:grpSpPr>
       <p:sp>
         <p:nvSpPr>
-          <p:cNvPr id="170" name="Google Shape;170;p41"/>
+          <p:cNvPr id="149" name="Google Shape;149;p10"/>
           <p:cNvSpPr txBox="1"/>
           <p:nvPr/>
         </p:nvSpPr>
         <p:spPr>
           <a:xfrm>
-            <a:off x="2865521" y="586938"/>
-            <a:ext cx="6460957" cy="923330"/>
+            <a:off x="2615237" y="586938"/>
+            <a:ext cx="6961525" cy="923289"/>
           </a:xfrm>
           <a:prstGeom prst="rect">
             <a:avLst/>
@@ -16577,7 +16488,7 @@
               <a:buNone/>
             </a:pPr>
             <a:r>
-              <a:rPr lang="en-US" sz="5400" b="0" i="0" u="none" strike="noStrike" cap="none" dirty="0">
+              <a:rPr lang="en-US" sz="5400" b="0" i="0" u="none" strike="noStrike" cap="none" dirty="0" err="1">
                 <a:solidFill>
                   <a:schemeClr val="dk1"/>
                 </a:solidFill>
@@ -16586,7 +16497,19 @@
                 <a:cs typeface="Economica"/>
                 <a:sym typeface="Economica"/>
               </a:rPr>
-              <a:t>A Generative RNN</a:t>
+              <a:t>CharRNN</a:t>
+            </a:r>
+            <a:r>
+              <a:rPr lang="en-US" sz="5400" b="0" i="0" u="none" strike="noStrike" cap="none" dirty="0">
+                <a:solidFill>
+                  <a:schemeClr val="dk1"/>
+                </a:solidFill>
+                <a:latin typeface="Economica"/>
+                <a:ea typeface="Economica"/>
+                <a:cs typeface="Economica"/>
+                <a:sym typeface="Economica"/>
+              </a:rPr>
+              <a:t>: Decoder-Only</a:t>
             </a:r>
             <a:endParaRPr sz="1400" b="0" i="0" u="none" strike="noStrike" cap="none" dirty="0">
               <a:solidFill>
@@ -16602,7 +16525,7 @@
       </p:sp>
       <p:sp>
         <p:nvSpPr>
-          <p:cNvPr id="171" name="Google Shape;171;p41"/>
+          <p:cNvPr id="150" name="Google Shape;150;p10"/>
           <p:cNvSpPr txBox="1"/>
           <p:nvPr/>
         </p:nvSpPr>
@@ -16643,7 +16566,7 @@
               <a:buNone/>
             </a:pPr>
             <a:r>
-              <a:rPr lang="en-US" sz="2000" b="1" i="0" u="none" strike="noStrike" cap="none" dirty="0">
+              <a:rPr lang="en-US" sz="2000" b="1" i="0" u="none" strike="noStrike" cap="none">
                 <a:solidFill>
                   <a:schemeClr val="dk1"/>
                 </a:solidFill>
@@ -16654,7 +16577,7 @@
               </a:rPr>
               <a:t>Training a Generative Language Model</a:t>
             </a:r>
-            <a:endParaRPr sz="1800" b="0" i="0" u="none" strike="noStrike" cap="none" dirty="0">
+            <a:endParaRPr sz="1800" b="0" i="0" u="none" strike="noStrike" cap="none">
               <a:solidFill>
                 <a:schemeClr val="dk1"/>
               </a:solidFill>
@@ -16683,7 +16606,7 @@
               <a:buChar char="•"/>
             </a:pPr>
             <a:r>
-              <a:rPr lang="en-US" sz="1800" b="0" i="0" u="none" strike="noStrike" cap="none" dirty="0">
+              <a:rPr lang="en-US" sz="1800" b="0" i="0" u="none" strike="noStrike" cap="none">
                 <a:solidFill>
                   <a:schemeClr val="dk1"/>
                 </a:solidFill>
@@ -16694,7 +16617,15 @@
               </a:rPr>
               <a:t>We train a model to predict the next token at every position in a sequence of observed input tokens.</a:t>
             </a:r>
-            <a:endParaRPr dirty="0"/>
+            <a:endParaRPr sz="1400" b="0" i="0" u="none" strike="noStrike" cap="none">
+              <a:solidFill>
+                <a:srgbClr val="000000"/>
+              </a:solidFill>
+              <a:latin typeface="Arial"/>
+              <a:ea typeface="Arial"/>
+              <a:cs typeface="Arial"/>
+              <a:sym typeface="Arial"/>
+            </a:endParaRPr>
           </a:p>
           <a:p>
             <a:pPr marL="342900" marR="0" lvl="0" indent="-342900" algn="l" rtl="0">
@@ -16715,7 +16646,7 @@
               <a:buChar char="•"/>
             </a:pPr>
             <a:r>
-              <a:rPr lang="en-US" sz="1800" b="0" i="0" u="none" strike="noStrike" cap="none" dirty="0">
+              <a:rPr lang="en-US" sz="1800" b="0" i="0" u="none" strike="noStrike" cap="none">
                 <a:solidFill>
                   <a:schemeClr val="dk1"/>
                 </a:solidFill>
@@ -16726,7 +16657,7 @@
               </a:rPr>
               <a:t>We will not use this exact model for inference; we will modify it slightly and add a feedback loop to make auto-regression possible. </a:t>
             </a:r>
-            <a:endParaRPr sz="1400" b="0" i="0" u="none" strike="noStrike" cap="none" dirty="0">
+            <a:endParaRPr sz="1400" b="0" i="0" u="none" strike="noStrike" cap="none">
               <a:solidFill>
                 <a:srgbClr val="000000"/>
               </a:solidFill>
@@ -16754,7 +16685,7 @@
               <a:buFont typeface="Arial"/>
               <a:buNone/>
             </a:pPr>
-            <a:endParaRPr sz="1800" b="1" i="0" u="none" strike="noStrike" cap="none" dirty="0">
+            <a:endParaRPr sz="1800" b="1" i="0" u="none" strike="noStrike" cap="none">
               <a:solidFill>
                 <a:schemeClr val="dk1"/>
               </a:solidFill>
@@ -16782,7 +16713,7 @@
               <a:buFont typeface="Arial"/>
               <a:buNone/>
             </a:pPr>
-            <a:endParaRPr sz="1800" b="0" i="0" u="none" strike="noStrike" cap="none" dirty="0">
+            <a:endParaRPr sz="1800" b="0" i="0" u="none" strike="noStrike" cap="none">
               <a:solidFill>
                 <a:srgbClr val="000000"/>
               </a:solidFill>
@@ -16796,7 +16727,7 @@
       </p:sp>
       <p:pic>
         <p:nvPicPr>
-          <p:cNvPr id="172" name="Google Shape;172;p41"/>
+          <p:cNvPr id="151" name="Google Shape;151;p10"/>
           <p:cNvPicPr preferRelativeResize="0"/>
           <p:nvPr/>
         </p:nvPicPr>
@@ -16834,7 +16765,7 @@
   <p:cSld>
     <p:spTree>
       <p:nvGrpSpPr>
-        <p:cNvPr id="1" name=""/>
+        <p:cNvPr id="1" name="Shape 156"/>
         <p:cNvGrpSpPr/>
         <p:nvPr/>
       </p:nvGrpSpPr>
@@ -16848,7 +16779,7 @@
       </p:grpSpPr>
       <p:sp>
         <p:nvSpPr>
-          <p:cNvPr id="5" name="TextBox 4"/>
+          <p:cNvPr id="157" name="Google Shape;157;p11"/>
           <p:cNvSpPr txBox="1"/>
           <p:nvPr/>
         </p:nvSpPr>
@@ -16861,29 +16792,55 @@
             <a:avLst/>
           </a:prstGeom>
           <a:noFill/>
+          <a:ln>
+            <a:noFill/>
+          </a:ln>
         </p:spPr>
         <p:txBody>
-          <a:bodyPr wrap="square">
+          <a:bodyPr spcFirstLastPara="1" wrap="square" lIns="91425" tIns="45700" rIns="91425" bIns="45700" anchor="t" anchorCtr="0">
             <a:spAutoFit/>
           </a:bodyPr>
           <a:lstStyle/>
           <a:p>
-            <a:pPr algn="ctr"/>
+            <a:pPr marL="0" marR="0" lvl="0" indent="0" algn="ctr" rtl="0">
+              <a:lnSpc>
+                <a:spcPct val="100000"/>
+              </a:lnSpc>
+              <a:spcBef>
+                <a:spcPts val="0"/>
+              </a:spcBef>
+              <a:spcAft>
+                <a:spcPts val="0"/>
+              </a:spcAft>
+              <a:buNone/>
+            </a:pPr>
             <a:r>
-              <a:rPr lang="en-US" sz="5400" b="0" dirty="0">
+              <a:rPr lang="en-US" sz="5400" b="0" i="0" u="none" strike="noStrike" cap="none">
+                <a:solidFill>
+                  <a:srgbClr val="000000"/>
+                </a:solidFill>
                 <a:latin typeface="Economica"/>
+                <a:ea typeface="Economica"/>
+                <a:cs typeface="Economica"/>
+                <a:sym typeface="Economica"/>
               </a:rPr>
               <a:t>In Training: Loss at Each Sequence Position</a:t>
             </a:r>
-            <a:endParaRPr sz="5400" b="0" dirty="0">
+            <a:endParaRPr sz="5400" b="0" i="0" u="none" strike="noStrike" cap="none">
+              <a:solidFill>
+                <a:srgbClr val="000000"/>
+              </a:solidFill>
               <a:latin typeface="Economica"/>
+              <a:ea typeface="Economica"/>
+              <a:cs typeface="Economica"/>
+              <a:sym typeface="Economica"/>
             </a:endParaRPr>
           </a:p>
         </p:txBody>
       </p:sp>
       <p:sp>
         <p:nvSpPr>
-          <p:cNvPr id="6" name="TextBox 5"/>
+          <p:cNvPr id="158" name="Google Shape;158;p11"/>
           <p:cNvSpPr txBox="1"/>
           <p:nvPr/>
         </p:nvSpPr>
@@ -16896,285 +16853,426 @@
             <a:avLst/>
           </a:prstGeom>
           <a:noFill/>
+          <a:ln>
+            <a:noFill/>
+          </a:ln>
         </p:spPr>
         <p:txBody>
-          <a:bodyPr wrap="square">
+          <a:bodyPr spcFirstLastPara="1" wrap="square" lIns="91425" tIns="45700" rIns="91425" bIns="45700" anchor="t" anchorCtr="0">
             <a:spAutoFit/>
           </a:bodyPr>
           <a:lstStyle/>
           <a:p>
+            <a:pPr marL="0" marR="0" lvl="0" indent="0" algn="l" rtl="0">
+              <a:lnSpc>
+                <a:spcPct val="100000"/>
+              </a:lnSpc>
+              <a:spcBef>
+                <a:spcPts val="0"/>
+              </a:spcBef>
+              <a:spcAft>
+                <a:spcPts val="0"/>
+              </a:spcAft>
+              <a:buNone/>
+            </a:pPr>
             <a:r>
-              <a:rPr sz="2000" b="1" dirty="0">
+              <a:rPr lang="en-US" sz="2000" b="1" i="0" u="none" strike="noStrike" cap="none">
+                <a:solidFill>
+                  <a:srgbClr val="000000"/>
+                </a:solidFill>
                 <a:latin typeface="Quicksand"/>
+                <a:ea typeface="Quicksand"/>
+                <a:cs typeface="Quicksand"/>
+                <a:sym typeface="Quicksand"/>
               </a:rPr>
               <a:t>Training: Predict All Positions in Parallel</a:t>
             </a:r>
+            <a:endParaRPr/>
           </a:p>
           <a:p>
-            <a:pPr>
+            <a:pPr marL="0" marR="0" lvl="0" indent="0" algn="l" rtl="0">
+              <a:lnSpc>
+                <a:spcPct val="100000"/>
+              </a:lnSpc>
               <a:spcBef>
                 <a:spcPts val="600"/>
               </a:spcBef>
+              <a:spcAft>
+                <a:spcPts val="0"/>
+              </a:spcAft>
+              <a:buNone/>
             </a:pPr>
             <a:r>
-              <a:rPr sz="1600" b="0" dirty="0">
+              <a:rPr lang="en-US" sz="1600" b="0" i="0" u="none" strike="noStrike" cap="none">
+                <a:solidFill>
+                  <a:srgbClr val="000000"/>
+                </a:solidFill>
                 <a:latin typeface="Quicksand"/>
+                <a:ea typeface="Quicksand"/>
+                <a:cs typeface="Quicksand"/>
+                <a:sym typeface="Quicksand"/>
               </a:rPr>
-              <a:t>During training, we already know the full sequence. So</a:t>
+              <a:t>During training, we already know the full sequence. So, we compute loss at every position simultaneously. This is purely an efficiency trick — it does not mean the model "sees the future." Our model predicts one prediction per token in the sequence, in parallel.  </a:t>
             </a:r>
-            <a:r>
-              <a:rPr lang="en-US" sz="1600" b="0" dirty="0">
-                <a:latin typeface="Quicksand"/>
-              </a:rPr>
-              <a:t>,</a:t>
-            </a:r>
-            <a:r>
-              <a:rPr sz="1600" b="0" dirty="0">
-                <a:latin typeface="Quicksand"/>
-              </a:rPr>
-              <a:t> we compute loss at every position simultaneously. This is purely an efficiency trick — it does not mean the model "sees the future."</a:t>
-            </a:r>
-            <a:r>
-              <a:rPr lang="en-US" sz="1600" dirty="0">
-                <a:latin typeface="Quicksand"/>
-              </a:rPr>
-              <a:t> Our model predicts one prediction per token in the sequence, in parallel.  </a:t>
-            </a:r>
-            <a:endParaRPr lang="en-US" sz="1600" b="0" dirty="0">
+            <a:endParaRPr sz="1600" b="0" i="0" u="none" strike="noStrike" cap="none">
+              <a:solidFill>
+                <a:srgbClr val="000000"/>
+              </a:solidFill>
               <a:latin typeface="Quicksand"/>
+              <a:ea typeface="Quicksand"/>
+              <a:cs typeface="Quicksand"/>
+              <a:sym typeface="Quicksand"/>
             </a:endParaRPr>
           </a:p>
           <a:p>
-            <a:pPr lvl="4">
+            <a:pPr marL="0" marR="0" lvl="4" indent="0" algn="l" rtl="0">
+              <a:lnSpc>
+                <a:spcPct val="100000"/>
+              </a:lnSpc>
               <a:spcBef>
                 <a:spcPts val="1200"/>
               </a:spcBef>
+              <a:spcAft>
+                <a:spcPts val="0"/>
+              </a:spcAft>
+              <a:buNone/>
             </a:pPr>
             <a:r>
-              <a:rPr lang="en-US" sz="1600" b="1" dirty="0">
+              <a:rPr lang="en-US" sz="1600" b="1" i="0" u="none" strike="noStrike" cap="none">
+                <a:solidFill>
+                  <a:srgbClr val="000000"/>
+                </a:solidFill>
                 <a:latin typeface="Quicksand"/>
+                <a:ea typeface="Quicksand"/>
+                <a:cs typeface="Quicksand"/>
+                <a:sym typeface="Quicksand"/>
               </a:rPr>
               <a:t>Example (character-level):</a:t>
             </a:r>
+            <a:endParaRPr/>
           </a:p>
           <a:p>
-            <a:pPr lvl="4">
+            <a:pPr marL="0" marR="0" lvl="4" indent="0" algn="l" rtl="0">
+              <a:lnSpc>
+                <a:spcPct val="100000"/>
+              </a:lnSpc>
               <a:spcBef>
                 <a:spcPts val="200"/>
               </a:spcBef>
+              <a:spcAft>
+                <a:spcPts val="0"/>
+              </a:spcAft>
+              <a:buNone/>
             </a:pPr>
             <a:r>
-              <a:rPr sz="1300" dirty="0">
+              <a:rPr lang="en-US" sz="1300" b="0" i="0" u="none" strike="noStrike" cap="none">
+                <a:solidFill>
+                  <a:srgbClr val="000000"/>
+                </a:solidFill>
                 <a:latin typeface="Consolas"/>
+                <a:ea typeface="Consolas"/>
+                <a:cs typeface="Consolas"/>
+                <a:sym typeface="Consolas"/>
               </a:rPr>
               <a:t>Position 0:  model sees [S]              → predicts 'h'</a:t>
             </a:r>
+            <a:endParaRPr/>
           </a:p>
           <a:p>
-            <a:pPr lvl="4">
+            <a:pPr marL="0" marR="0" lvl="4" indent="0" algn="l" rtl="0">
+              <a:lnSpc>
+                <a:spcPct val="100000"/>
+              </a:lnSpc>
               <a:spcBef>
                 <a:spcPts val="200"/>
               </a:spcBef>
+              <a:spcAft>
+                <a:spcPts val="0"/>
+              </a:spcAft>
+              <a:buNone/>
             </a:pPr>
             <a:r>
-              <a:rPr sz="1300" dirty="0">
+              <a:rPr lang="en-US" sz="1300" b="0" i="0" u="none" strike="noStrike" cap="none">
+                <a:solidFill>
+                  <a:srgbClr val="000000"/>
+                </a:solidFill>
                 <a:latin typeface="Consolas"/>
+                <a:ea typeface="Consolas"/>
+                <a:cs typeface="Consolas"/>
+                <a:sym typeface="Consolas"/>
               </a:rPr>
               <a:t>Position 1:  model sees [S, h]           → predicts 'a'</a:t>
             </a:r>
+            <a:endParaRPr/>
           </a:p>
           <a:p>
-            <a:pPr lvl="4">
+            <a:pPr marL="0" marR="0" lvl="4" indent="0" algn="l" rtl="0">
+              <a:lnSpc>
+                <a:spcPct val="100000"/>
+              </a:lnSpc>
               <a:spcBef>
                 <a:spcPts val="200"/>
               </a:spcBef>
+              <a:spcAft>
+                <a:spcPts val="0"/>
+              </a:spcAft>
+              <a:buNone/>
             </a:pPr>
             <a:r>
-              <a:rPr sz="1300" dirty="0">
+              <a:rPr lang="en-US" sz="1300" b="0" i="0" u="none" strike="noStrike" cap="none">
+                <a:solidFill>
+                  <a:srgbClr val="000000"/>
+                </a:solidFill>
                 <a:latin typeface="Consolas"/>
+                <a:ea typeface="Consolas"/>
+                <a:cs typeface="Consolas"/>
+                <a:sym typeface="Consolas"/>
               </a:rPr>
               <a:t>Position 2:  model sees [S, h, a]        → predicts 'k'</a:t>
             </a:r>
+            <a:endParaRPr/>
           </a:p>
           <a:p>
-            <a:pPr lvl="4">
+            <a:pPr marL="0" marR="0" lvl="4" indent="0" algn="l" rtl="0">
+              <a:lnSpc>
+                <a:spcPct val="100000"/>
+              </a:lnSpc>
               <a:spcBef>
                 <a:spcPts val="200"/>
               </a:spcBef>
+              <a:spcAft>
+                <a:spcPts val="0"/>
+              </a:spcAft>
+              <a:buNone/>
             </a:pPr>
             <a:r>
-              <a:rPr sz="1300" dirty="0">
+              <a:rPr lang="en-US" sz="1300" b="0" i="0" u="none" strike="noStrike" cap="none">
+                <a:solidFill>
+                  <a:srgbClr val="000000"/>
+                </a:solidFill>
                 <a:latin typeface="Consolas"/>
+                <a:ea typeface="Consolas"/>
+                <a:cs typeface="Consolas"/>
+                <a:sym typeface="Consolas"/>
               </a:rPr>
               <a:t>Position 3:  model sees [S, h, a, k]     → predicts 'e'</a:t>
             </a:r>
+            <a:endParaRPr/>
           </a:p>
           <a:p>
-            <a:pPr lvl="4">
+            <a:pPr marL="0" marR="0" lvl="4" indent="0" algn="l" rtl="0">
+              <a:lnSpc>
+                <a:spcPct val="100000"/>
+              </a:lnSpc>
               <a:spcBef>
                 <a:spcPts val="200"/>
               </a:spcBef>
+              <a:spcAft>
+                <a:spcPts val="0"/>
+              </a:spcAft>
+              <a:buNone/>
             </a:pPr>
             <a:r>
-              <a:rPr sz="1300" dirty="0">
+              <a:rPr lang="en-US" sz="1300" b="0" i="0" u="none" strike="noStrike" cap="none">
+                <a:solidFill>
+                  <a:srgbClr val="000000"/>
+                </a:solidFill>
                 <a:latin typeface="Consolas"/>
+                <a:ea typeface="Consolas"/>
+                <a:cs typeface="Consolas"/>
+                <a:sym typeface="Consolas"/>
               </a:rPr>
               <a:t>Position 4:  model sees [S, h, a, k, e]  → predicts 's'</a:t>
             </a:r>
+            <a:endParaRPr/>
           </a:p>
           <a:p>
-            <a:pPr lvl="4">
+            <a:pPr marL="0" marR="0" lvl="4" indent="0" algn="l" rtl="0">
+              <a:lnSpc>
+                <a:spcPct val="100000"/>
+              </a:lnSpc>
               <a:spcBef>
                 <a:spcPts val="600"/>
               </a:spcBef>
+              <a:spcAft>
+                <a:spcPts val="0"/>
+              </a:spcAft>
+              <a:buNone/>
             </a:pPr>
             <a:r>
-              <a:rPr sz="1600" b="0" dirty="0">
+              <a:rPr lang="en-US" sz="1600" b="0" i="0" u="none" strike="noStrike" cap="none">
+                <a:solidFill>
+                  <a:srgbClr val="000000"/>
+                </a:solidFill>
                 <a:latin typeface="Quicksand"/>
+                <a:ea typeface="Quicksand"/>
+                <a:cs typeface="Quicksand"/>
+                <a:sym typeface="Quicksand"/>
               </a:rPr>
-              <a:t>All 5 predictions happen in ONE forward pass</a:t>
-            </a:r>
-            <a:r>
-              <a:rPr lang="en-US" sz="1600" b="0" dirty="0">
-                <a:latin typeface="Quicksand"/>
-              </a:rPr>
-              <a:t>, together</a:t>
-            </a:r>
-            <a:r>
-              <a:rPr sz="1600" b="0" dirty="0">
-                <a:latin typeface="Quicksand"/>
-              </a:rPr>
-              <a:t>. </a:t>
+              <a:t>All 5 predictions happen in ONE forward pass, together. </a:t>
             </a:r>
             <a:br>
-              <a:rPr lang="en-US" sz="1600" b="0" dirty="0">
+              <a:rPr lang="en-US" sz="1600" b="0" i="0" u="none" strike="noStrike" cap="none">
+                <a:solidFill>
+                  <a:srgbClr val="000000"/>
+                </a:solidFill>
                 <a:latin typeface="Quicksand"/>
+                <a:ea typeface="Quicksand"/>
+                <a:cs typeface="Quicksand"/>
+                <a:sym typeface="Quicksand"/>
               </a:rPr>
             </a:br>
             <a:r>
-              <a:rPr sz="1600" b="0" dirty="0">
+              <a:rPr lang="en-US" sz="1600" b="0" i="0" u="none" strike="noStrike" cap="none">
+                <a:solidFill>
+                  <a:srgbClr val="000000"/>
+                </a:solidFill>
                 <a:latin typeface="Quicksand"/>
+                <a:ea typeface="Quicksand"/>
+                <a:cs typeface="Quicksand"/>
+                <a:sym typeface="Quicksand"/>
               </a:rPr>
               <a:t>Loss = average of all 5 cross-entropy values.</a:t>
             </a:r>
+            <a:endParaRPr/>
           </a:p>
           <a:p>
-            <a:endParaRPr sz="1600" b="0" dirty="0">
+            <a:pPr marL="0" marR="0" lvl="0" indent="0" algn="l" rtl="0">
+              <a:lnSpc>
+                <a:spcPct val="100000"/>
+              </a:lnSpc>
+              <a:spcBef>
+                <a:spcPts val="0"/>
+              </a:spcBef>
+              <a:spcAft>
+                <a:spcPts val="0"/>
+              </a:spcAft>
+              <a:buNone/>
+            </a:pPr>
+            <a:endParaRPr sz="1600" b="0" i="0" u="none" strike="noStrike" cap="none">
+              <a:solidFill>
+                <a:srgbClr val="000000"/>
+              </a:solidFill>
               <a:latin typeface="Quicksand"/>
+              <a:ea typeface="Quicksand"/>
+              <a:cs typeface="Quicksand"/>
+              <a:sym typeface="Quicksand"/>
             </a:endParaRPr>
           </a:p>
           <a:p>
+            <a:pPr marL="0" marR="0" lvl="0" indent="0" algn="l" rtl="0">
+              <a:lnSpc>
+                <a:spcPct val="100000"/>
+              </a:lnSpc>
+              <a:spcBef>
+                <a:spcPts val="0"/>
+              </a:spcBef>
+              <a:spcAft>
+                <a:spcPts val="0"/>
+              </a:spcAft>
+              <a:buNone/>
+            </a:pPr>
             <a:r>
-              <a:rPr sz="2000" b="1" dirty="0">
+              <a:rPr lang="en-US" sz="2000" b="1" i="0" u="none" strike="noStrike" cap="none">
+                <a:solidFill>
+                  <a:srgbClr val="000000"/>
+                </a:solidFill>
                 <a:latin typeface="Quicksand"/>
+                <a:ea typeface="Quicksand"/>
+                <a:cs typeface="Quicksand"/>
+                <a:sym typeface="Quicksand"/>
               </a:rPr>
               <a:t>Inference: One Token at a Time</a:t>
             </a:r>
+            <a:endParaRPr/>
           </a:p>
           <a:p>
-            <a:pPr>
+            <a:pPr marL="0" marR="0" lvl="0" indent="0" algn="l" rtl="0">
+              <a:lnSpc>
+                <a:spcPct val="100000"/>
+              </a:lnSpc>
               <a:spcBef>
                 <a:spcPts val="600"/>
               </a:spcBef>
+              <a:spcAft>
+                <a:spcPts val="0"/>
+              </a:spcAft>
+              <a:buNone/>
             </a:pPr>
             <a:r>
-              <a:rPr sz="1600" b="0" dirty="0">
+              <a:rPr lang="en-US" sz="1600" b="0" i="0" u="none" strike="noStrike" cap="none">
+                <a:solidFill>
+                  <a:srgbClr val="000000"/>
+                </a:solidFill>
                 <a:latin typeface="Quicksand"/>
+                <a:ea typeface="Quicksand"/>
+                <a:cs typeface="Quicksand"/>
+                <a:sym typeface="Quicksand"/>
               </a:rPr>
-              <a:t>At inference, </a:t>
-            </a:r>
-            <a:r>
-              <a:rPr lang="en-US" sz="1600" b="0" dirty="0">
-                <a:latin typeface="Quicksand"/>
-              </a:rPr>
-              <a:t>we set </a:t>
-            </a:r>
-            <a:r>
-              <a:rPr lang="en-US" sz="1600" b="0" dirty="0" err="1">
-                <a:latin typeface="Quicksand"/>
-              </a:rPr>
-              <a:t>return_sequences</a:t>
-            </a:r>
-            <a:r>
-              <a:rPr lang="en-US" sz="1600" b="0" dirty="0">
-                <a:latin typeface="Quicksand"/>
-              </a:rPr>
-              <a:t> = False.</a:t>
+              <a:t>At inference, we set return_sequences = False.</a:t>
             </a:r>
             <a:br>
-              <a:rPr lang="en-US" sz="1600" b="0" dirty="0">
+              <a:rPr lang="en-US" sz="1600" b="0" i="0" u="none" strike="noStrike" cap="none">
+                <a:solidFill>
+                  <a:srgbClr val="000000"/>
+                </a:solidFill>
                 <a:latin typeface="Quicksand"/>
+                <a:ea typeface="Quicksand"/>
+                <a:cs typeface="Quicksand"/>
+                <a:sym typeface="Quicksand"/>
               </a:rPr>
             </a:br>
             <a:r>
-              <a:rPr lang="en-US" sz="1600" dirty="0">
+              <a:rPr lang="en-US" sz="1600" b="0" i="0" u="none" strike="noStrike" cap="none">
+                <a:solidFill>
+                  <a:srgbClr val="000000"/>
+                </a:solidFill>
                 <a:latin typeface="Quicksand"/>
+                <a:ea typeface="Quicksand"/>
+                <a:cs typeface="Quicksand"/>
+                <a:sym typeface="Quicksand"/>
               </a:rPr>
-              <a:t>W</a:t>
-            </a:r>
-            <a:r>
-              <a:rPr sz="1600" b="0" dirty="0">
-                <a:latin typeface="Quicksand"/>
-              </a:rPr>
-              <a:t>e generate one token</a:t>
-            </a:r>
-            <a:r>
-              <a:rPr lang="en-US" sz="1600" b="0" dirty="0">
-                <a:latin typeface="Quicksand"/>
-              </a:rPr>
-              <a:t> only</a:t>
-            </a:r>
-            <a:r>
-              <a:rPr sz="1600" b="0" dirty="0">
-                <a:latin typeface="Quicksand"/>
-              </a:rPr>
-              <a:t>, feed it back as input, </a:t>
+              <a:t>We generate one token only, feed it back as input, </a:t>
             </a:r>
             <a:br>
-              <a:rPr lang="en-US" sz="1600" b="0" dirty="0">
+              <a:rPr lang="en-US" sz="1600" b="0" i="0" u="none" strike="noStrike" cap="none">
+                <a:solidFill>
+                  <a:srgbClr val="000000"/>
+                </a:solidFill>
                 <a:latin typeface="Quicksand"/>
+                <a:ea typeface="Quicksand"/>
+                <a:cs typeface="Quicksand"/>
+                <a:sym typeface="Quicksand"/>
               </a:rPr>
             </a:br>
             <a:r>
-              <a:rPr sz="1600" b="0" dirty="0">
+              <a:rPr lang="en-US" sz="1600" b="0" i="0" u="none" strike="noStrike" cap="none">
+                <a:solidFill>
+                  <a:srgbClr val="000000"/>
+                </a:solidFill>
                 <a:latin typeface="Quicksand"/>
+                <a:ea typeface="Quicksand"/>
+                <a:cs typeface="Quicksand"/>
+                <a:sym typeface="Quicksand"/>
               </a:rPr>
-              <a:t>and repeat. Same weights, </a:t>
+              <a:t>and repeat. Same weights, just a different loop.</a:t>
             </a:r>
-            <a:r>
-              <a:rPr lang="en-US" sz="1600" b="0" dirty="0">
-                <a:latin typeface="Quicksand"/>
-              </a:rPr>
-              <a:t>just a </a:t>
-            </a:r>
-            <a:r>
-              <a:rPr sz="1600" b="0" dirty="0">
-                <a:latin typeface="Quicksand"/>
-              </a:rPr>
-              <a:t>different loop.</a:t>
-            </a:r>
+            <a:endParaRPr/>
           </a:p>
         </p:txBody>
       </p:sp>
       <p:pic>
         <p:nvPicPr>
-          <p:cNvPr id="2" name="Picture 1">
-            <a:extLst>
-              <a:ext uri="{FF2B5EF4-FFF2-40B4-BE49-F238E27FC236}">
-                <a16:creationId xmlns:a16="http://schemas.microsoft.com/office/drawing/2014/main" id="{D2BC9EDA-C8B9-10F2-6A61-D0E56B313BBF}"/>
-              </a:ext>
-            </a:extLst>
-          </p:cNvPr>
-          <p:cNvPicPr>
-            <a:picLocks noChangeAspect="1"/>
-          </p:cNvPicPr>
+          <p:cNvPr id="159" name="Google Shape;159;p11"/>
+          <p:cNvPicPr preferRelativeResize="0"/>
           <p:nvPr/>
         </p:nvPicPr>
-        <p:blipFill>
-          <a:blip r:embed="rId3"/>
-          <a:stretch>
-            <a:fillRect/>
-          </a:stretch>
+        <p:blipFill rotWithShape="1">
+          <a:blip r:embed="rId3">
+            <a:alphaModFix/>
+          </a:blip>
+          <a:srcRect/>
+          <a:stretch/>
         </p:blipFill>
         <p:spPr>
           <a:xfrm>
@@ -17184,6 +17282,10 @@
           <a:prstGeom prst="rect">
             <a:avLst/>
           </a:prstGeom>
+          <a:noFill/>
+          <a:ln>
+            <a:noFill/>
+          </a:ln>
         </p:spPr>
       </p:pic>
     </p:spTree>
@@ -17199,7 +17301,7 @@
   <p:cSld>
     <p:spTree>
       <p:nvGrpSpPr>
-        <p:cNvPr id="1" name="Shape 176"/>
+        <p:cNvPr id="1" name="Shape 163"/>
         <p:cNvGrpSpPr/>
         <p:nvPr/>
       </p:nvGrpSpPr>
@@ -17213,7 +17315,7 @@
       </p:grpSpPr>
       <p:sp>
         <p:nvSpPr>
-          <p:cNvPr id="177" name="Google Shape;177;p42"/>
+          <p:cNvPr id="164" name="Google Shape;164;p12"/>
           <p:cNvSpPr txBox="1"/>
           <p:nvPr/>
         </p:nvSpPr>
@@ -17279,7 +17381,7 @@
       </p:sp>
       <p:sp>
         <p:nvSpPr>
-          <p:cNvPr id="178" name="Google Shape;178;p42"/>
+          <p:cNvPr id="165" name="Google Shape;165;p12"/>
           <p:cNvSpPr txBox="1"/>
           <p:nvPr/>
         </p:nvSpPr>
@@ -17320,7 +17422,7 @@
               <a:buNone/>
             </a:pPr>
             <a:r>
-              <a:rPr lang="en-US" sz="2000" b="1" i="0" u="none" strike="noStrike" cap="none" dirty="0">
+              <a:rPr lang="en-US" sz="2000" b="1" i="0" u="none" strike="noStrike" cap="none">
                 <a:solidFill>
                   <a:schemeClr val="dk1"/>
                 </a:solidFill>
@@ -17331,7 +17433,7 @@
               </a:rPr>
               <a:t>Inference with Generative Language Models</a:t>
             </a:r>
-            <a:endParaRPr sz="1800" b="0" i="0" u="none" strike="noStrike" cap="none" dirty="0">
+            <a:endParaRPr sz="1800" b="0" i="0" u="none" strike="noStrike" cap="none">
               <a:solidFill>
                 <a:schemeClr val="dk1"/>
               </a:solidFill>
@@ -17360,7 +17462,7 @@
               <a:buChar char="•"/>
             </a:pPr>
             <a:r>
-              <a:rPr lang="en-US" sz="1800" b="0" i="0" u="none" strike="noStrike" cap="none" dirty="0">
+              <a:rPr lang="en-US" sz="1800" b="0" i="0" u="none" strike="noStrike" cap="none">
                 <a:solidFill>
                   <a:schemeClr val="dk1"/>
                 </a:solidFill>
@@ -17369,32 +17471,9 @@
                 <a:cs typeface="Quicksand"/>
                 <a:sym typeface="Quicksand"/>
               </a:rPr>
-              <a:t>We modify the layer to only produce a single output token (</a:t>
+              <a:t>We modify the layer to only produce a single output token (return_sequences = False).</a:t>
             </a:r>
-            <a:r>
-              <a:rPr lang="en-US" sz="1800" b="0" i="0" u="none" strike="noStrike" cap="none" dirty="0" err="1">
-                <a:solidFill>
-                  <a:schemeClr val="dk1"/>
-                </a:solidFill>
-                <a:latin typeface="Quicksand"/>
-                <a:ea typeface="Quicksand"/>
-                <a:cs typeface="Quicksand"/>
-                <a:sym typeface="Quicksand"/>
-              </a:rPr>
-              <a:t>return_sequences</a:t>
-            </a:r>
-            <a:r>
-              <a:rPr lang="en-US" sz="1800" b="0" i="0" u="none" strike="noStrike" cap="none" dirty="0">
-                <a:solidFill>
-                  <a:schemeClr val="dk1"/>
-                </a:solidFill>
-                <a:latin typeface="Quicksand"/>
-                <a:ea typeface="Quicksand"/>
-                <a:cs typeface="Quicksand"/>
-                <a:sym typeface="Quicksand"/>
-              </a:rPr>
-              <a:t> = False).</a:t>
-            </a:r>
+            <a:endParaRPr/>
           </a:p>
           <a:p>
             <a:pPr marL="342900" marR="0" lvl="0" indent="-342900" algn="l" rtl="0">
@@ -17415,7 +17494,7 @@
               <a:buChar char="•"/>
             </a:pPr>
             <a:r>
-              <a:rPr lang="en-US" sz="1800" b="0" i="0" u="none" strike="noStrike" cap="none" dirty="0">
+              <a:rPr lang="en-US" sz="1800" b="0" i="0" u="none" strike="noStrike" cap="none">
                 <a:solidFill>
                   <a:schemeClr val="dk1"/>
                 </a:solidFill>
@@ -17426,7 +17505,7 @@
               </a:rPr>
               <a:t>We then wrap the new layers with a feedback loop that takes the last prediction and passes it as input to the model again along with the most recent embedding that captures ‘what we’ve done so far’. </a:t>
             </a:r>
-            <a:endParaRPr sz="1400" b="0" i="0" u="none" strike="noStrike" cap="none" dirty="0">
+            <a:endParaRPr sz="1400" b="0" i="0" u="none" strike="noStrike" cap="none">
               <a:solidFill>
                 <a:srgbClr val="000000"/>
               </a:solidFill>
@@ -17454,7 +17533,7 @@
               <a:buFont typeface="Arial"/>
               <a:buNone/>
             </a:pPr>
-            <a:endParaRPr sz="1800" b="1" i="0" u="none" strike="noStrike" cap="none" dirty="0">
+            <a:endParaRPr sz="1800" b="1" i="0" u="none" strike="noStrike" cap="none">
               <a:solidFill>
                 <a:schemeClr val="dk1"/>
               </a:solidFill>
@@ -17482,7 +17561,7 @@
               <a:buFont typeface="Arial"/>
               <a:buNone/>
             </a:pPr>
-            <a:endParaRPr sz="1800" b="0" i="0" u="none" strike="noStrike" cap="none" dirty="0">
+            <a:endParaRPr sz="1800" b="0" i="0" u="none" strike="noStrike" cap="none">
               <a:solidFill>
                 <a:srgbClr val="000000"/>
               </a:solidFill>
@@ -17496,7 +17575,7 @@
       </p:sp>
       <p:pic>
         <p:nvPicPr>
-          <p:cNvPr id="180" name="Google Shape;180;p42" descr="Getting Started with Large Language Models: Finetuning [Part 2/3] | by  keithczq | GoPenAI"/>
+          <p:cNvPr id="166" name="Google Shape;166;p12" descr="Getting Started with Large Language Models: Finetuning [Part 2/3] | by  keithczq | GoPenAI"/>
           <p:cNvPicPr preferRelativeResize="0"/>
           <p:nvPr/>
         </p:nvPicPr>
@@ -17534,7 +17613,7 @@
   <p:cSld>
     <p:spTree>
       <p:nvGrpSpPr>
-        <p:cNvPr id="1" name="Shape 184"/>
+        <p:cNvPr id="1" name="Shape 170"/>
         <p:cNvGrpSpPr/>
         <p:nvPr/>
       </p:nvGrpSpPr>
@@ -17548,7 +17627,308 @@
       </p:grpSpPr>
       <p:sp>
         <p:nvSpPr>
-          <p:cNvPr id="185" name="Google Shape;185;p43"/>
+          <p:cNvPr id="171" name="Google Shape;171;p13"/>
+          <p:cNvSpPr txBox="1"/>
+          <p:nvPr/>
+        </p:nvSpPr>
+        <p:spPr>
+          <a:xfrm>
+            <a:off x="609600" y="586938"/>
+            <a:ext cx="10972800" cy="923330"/>
+          </a:xfrm>
+          <a:prstGeom prst="rect">
+            <a:avLst/>
+          </a:prstGeom>
+          <a:noFill/>
+          <a:ln>
+            <a:noFill/>
+          </a:ln>
+        </p:spPr>
+        <p:txBody>
+          <a:bodyPr spcFirstLastPara="1" wrap="square" lIns="91425" tIns="45700" rIns="91425" bIns="45700" anchor="t" anchorCtr="0">
+            <a:spAutoFit/>
+          </a:bodyPr>
+          <a:lstStyle/>
+          <a:p>
+            <a:pPr marL="0" marR="0" lvl="0" indent="0" algn="l" rtl="0">
+              <a:lnSpc>
+                <a:spcPct val="100000"/>
+              </a:lnSpc>
+              <a:spcBef>
+                <a:spcPts val="0"/>
+              </a:spcBef>
+              <a:spcAft>
+                <a:spcPts val="0"/>
+              </a:spcAft>
+              <a:buNone/>
+            </a:pPr>
+            <a:r>
+              <a:rPr lang="en-US" sz="5400" b="0" i="0" u="none" strike="noStrike" cap="none" dirty="0">
+                <a:solidFill>
+                  <a:srgbClr val="000000"/>
+                </a:solidFill>
+                <a:latin typeface="Economica"/>
+                <a:ea typeface="Economica"/>
+                <a:cs typeface="Economica"/>
+                <a:sym typeface="Economica"/>
+              </a:rPr>
+              <a:t>Where Did the Encoder Go?</a:t>
+            </a:r>
+            <a:endParaRPr dirty="0"/>
+          </a:p>
+        </p:txBody>
+      </p:sp>
+      <p:sp>
+        <p:nvSpPr>
+          <p:cNvPr id="172" name="Google Shape;172;p13"/>
+          <p:cNvSpPr txBox="1"/>
+          <p:nvPr/>
+        </p:nvSpPr>
+        <p:spPr>
+          <a:xfrm>
+            <a:off x="756088" y="1781737"/>
+            <a:ext cx="10200600" cy="4370387"/>
+          </a:xfrm>
+          <a:prstGeom prst="rect">
+            <a:avLst/>
+          </a:prstGeom>
+          <a:noFill/>
+          <a:ln>
+            <a:noFill/>
+          </a:ln>
+        </p:spPr>
+        <p:txBody>
+          <a:bodyPr spcFirstLastPara="1" wrap="square" lIns="91425" tIns="45700" rIns="91425" bIns="45700" anchor="t" anchorCtr="0">
+            <a:spAutoFit/>
+          </a:bodyPr>
+          <a:lstStyle/>
+          <a:p>
+            <a:pPr marL="0" marR="0" lvl="0" indent="0" algn="l" rtl="0">
+              <a:lnSpc>
+                <a:spcPct val="100000"/>
+              </a:lnSpc>
+              <a:spcBef>
+                <a:spcPts val="600"/>
+              </a:spcBef>
+              <a:spcAft>
+                <a:spcPts val="0"/>
+              </a:spcAft>
+              <a:buNone/>
+            </a:pPr>
+            <a:r>
+              <a:rPr lang="en-US" sz="1800" b="0" i="0" u="none" strike="noStrike" cap="none" dirty="0">
+                <a:solidFill>
+                  <a:srgbClr val="000000"/>
+                </a:solidFill>
+                <a:latin typeface="Arial"/>
+                <a:ea typeface="Arial"/>
+                <a:cs typeface="Arial"/>
+                <a:sym typeface="Arial"/>
+              </a:rPr>
+              <a:t>Char-RNN is decoder-only: one RNN, no encoder, no attention. </a:t>
+            </a:r>
+            <a:r>
+              <a:rPr lang="en-US" sz="1800" dirty="0"/>
+              <a:t>This works b</a:t>
+            </a:r>
+            <a:r>
+              <a:rPr lang="en-US" sz="1800" b="0" i="0" u="none" strike="noStrike" cap="none" dirty="0">
+                <a:solidFill>
+                  <a:srgbClr val="000000"/>
+                </a:solidFill>
+                <a:latin typeface="Arial"/>
+                <a:ea typeface="Arial"/>
+                <a:cs typeface="Arial"/>
+                <a:sym typeface="Arial"/>
+              </a:rPr>
+              <a:t>ecause input and output are trivially aligned — predict position t+1 from position t. The hidden state hₜ already encodes everything from characters 1 through t. No need to 'look back.'</a:t>
+            </a:r>
+            <a:br>
+              <a:rPr lang="en-US" sz="1800" dirty="0"/>
+            </a:br>
+            <a:endParaRPr dirty="0"/>
+          </a:p>
+          <a:p>
+            <a:pPr marL="0" marR="0" lvl="0" indent="0" algn="l" rtl="0">
+              <a:lnSpc>
+                <a:spcPct val="100000"/>
+              </a:lnSpc>
+              <a:spcBef>
+                <a:spcPts val="600"/>
+              </a:spcBef>
+              <a:spcAft>
+                <a:spcPts val="0"/>
+              </a:spcAft>
+              <a:buNone/>
+            </a:pPr>
+            <a:r>
+              <a:rPr lang="en-US" sz="1800" b="0" i="0" u="none" strike="noStrike" cap="none" dirty="0">
+                <a:solidFill>
+                  <a:srgbClr val="000000"/>
+                </a:solidFill>
+                <a:latin typeface="Arial"/>
+                <a:ea typeface="Arial"/>
+                <a:cs typeface="Arial"/>
+                <a:sym typeface="Arial"/>
+              </a:rPr>
+              <a:t>Translation is </a:t>
+            </a:r>
+            <a:r>
+              <a:rPr lang="en-US" sz="1800" b="0" i="1" u="none" strike="noStrike" cap="none" dirty="0">
+                <a:solidFill>
+                  <a:srgbClr val="000000"/>
+                </a:solidFill>
+                <a:latin typeface="Arial"/>
+                <a:ea typeface="Arial"/>
+                <a:cs typeface="Arial"/>
+                <a:sym typeface="Arial"/>
+              </a:rPr>
+              <a:t>different</a:t>
+            </a:r>
+            <a:r>
+              <a:rPr lang="en-US" sz="1800" b="0" i="0" u="none" strike="noStrike" cap="none" dirty="0">
+                <a:solidFill>
+                  <a:srgbClr val="000000"/>
+                </a:solidFill>
+                <a:latin typeface="Arial"/>
+                <a:ea typeface="Arial"/>
+                <a:cs typeface="Arial"/>
+                <a:sym typeface="Arial"/>
+              </a:rPr>
+              <a:t>: input and output are different lengths, vocabularies, and orderings. You must read the whole input before writing any output.</a:t>
+            </a:r>
+            <a:br>
+              <a:rPr lang="en-US" sz="1800" b="0" i="0" u="none" strike="noStrike" cap="none" dirty="0">
+                <a:solidFill>
+                  <a:srgbClr val="000000"/>
+                </a:solidFill>
+                <a:latin typeface="Arial"/>
+                <a:ea typeface="Arial"/>
+                <a:cs typeface="Arial"/>
+                <a:sym typeface="Arial"/>
+              </a:rPr>
+            </a:br>
+            <a:endParaRPr dirty="0"/>
+          </a:p>
+          <a:p>
+            <a:pPr marL="0" marR="0" lvl="0" indent="0" algn="l" rtl="0">
+              <a:lnSpc>
+                <a:spcPct val="100000"/>
+              </a:lnSpc>
+              <a:spcBef>
+                <a:spcPts val="600"/>
+              </a:spcBef>
+              <a:spcAft>
+                <a:spcPts val="0"/>
+              </a:spcAft>
+              <a:buNone/>
+            </a:pPr>
+            <a:r>
+              <a:rPr lang="en-US" sz="1800" b="0" i="0" u="none" strike="noStrike" cap="none" dirty="0">
+                <a:solidFill>
+                  <a:srgbClr val="000000"/>
+                </a:solidFill>
+                <a:latin typeface="Arial"/>
+                <a:ea typeface="Arial"/>
+                <a:cs typeface="Arial"/>
+                <a:sym typeface="Arial"/>
+              </a:rPr>
+              <a:t>The encoder-decoder split also solved a memory problem with RNN hidden states, which degrade over long sequences. The encoder saves all the input hidden states; attention lets the decoder look back</a:t>
+            </a:r>
+            <a:r>
+              <a:rPr lang="en-US" sz="1800" dirty="0"/>
+              <a:t> (like </a:t>
+            </a:r>
+            <a:r>
+              <a:rPr lang="en-US" sz="1800" dirty="0" err="1"/>
+              <a:t>Badenhau</a:t>
+            </a:r>
+            <a:r>
+              <a:rPr lang="en-US" sz="1800" dirty="0"/>
+              <a:t> attention).</a:t>
+            </a:r>
+            <a:br>
+              <a:rPr lang="en-US" sz="1800" dirty="0"/>
+            </a:br>
+            <a:endParaRPr dirty="0"/>
+          </a:p>
+          <a:p>
+            <a:pPr marL="0" marR="0" lvl="0" indent="0" algn="l" rtl="0">
+              <a:lnSpc>
+                <a:spcPct val="100000"/>
+              </a:lnSpc>
+              <a:spcBef>
+                <a:spcPts val="600"/>
+              </a:spcBef>
+              <a:spcAft>
+                <a:spcPts val="0"/>
+              </a:spcAft>
+              <a:buNone/>
+            </a:pPr>
+            <a:r>
+              <a:rPr lang="en-US" sz="1800" dirty="0"/>
+              <a:t>Ultimately, the </a:t>
+            </a:r>
+            <a:r>
+              <a:rPr lang="en-US" sz="1800" b="0" i="0" u="none" strike="noStrike" cap="none" dirty="0">
+                <a:solidFill>
+                  <a:srgbClr val="000000"/>
+                </a:solidFill>
+                <a:latin typeface="Arial"/>
+                <a:ea typeface="Arial"/>
+                <a:cs typeface="Arial"/>
+                <a:sym typeface="Arial"/>
+              </a:rPr>
+              <a:t>encoder-decoder architecture compensates for RNN limitations, not task requirements. When the task is aligned (shift by 1), a single RNN is both simpler and better. With transformers, even in the case of translation tasks, we no longer need the encoder-decoder architecture (given </a:t>
+            </a:r>
+            <a:r>
+              <a:rPr lang="en-US" sz="1800" dirty="0"/>
+              <a:t>enough</a:t>
+            </a:r>
+            <a:r>
+              <a:rPr lang="en-US" sz="1800" b="0" i="0" u="none" strike="noStrike" cap="none" dirty="0">
+                <a:solidFill>
+                  <a:srgbClr val="000000"/>
+                </a:solidFill>
+                <a:latin typeface="Arial"/>
+                <a:ea typeface="Arial"/>
+                <a:cs typeface="Arial"/>
+                <a:sym typeface="Arial"/>
+              </a:rPr>
+              <a:t> pre-training). </a:t>
+            </a:r>
+            <a:endParaRPr dirty="0"/>
+          </a:p>
+        </p:txBody>
+      </p:sp>
+    </p:spTree>
+  </p:cSld>
+  <p:clrMapOvr>
+    <a:masterClrMapping/>
+  </p:clrMapOvr>
+</p:sld>
+</file>
+
+<file path=ppt/slides/slide14.xml><?xml version="1.0" encoding="utf-8"?>
+<p:sld xmlns:a="http://schemas.openxmlformats.org/drawingml/2006/main" xmlns:r="http://schemas.openxmlformats.org/officeDocument/2006/relationships" xmlns:p="http://schemas.openxmlformats.org/presentationml/2006/main">
+  <p:cSld>
+    <p:spTree>
+      <p:nvGrpSpPr>
+        <p:cNvPr id="1" name="Shape 176"/>
+        <p:cNvGrpSpPr/>
+        <p:nvPr/>
+      </p:nvGrpSpPr>
+      <p:grpSpPr>
+        <a:xfrm>
+          <a:off x="0" y="0"/>
+          <a:ext cx="0" cy="0"/>
+          <a:chOff x="0" y="0"/>
+          <a:chExt cx="0" cy="0"/>
+        </a:xfrm>
+      </p:grpSpPr>
+      <p:sp>
+        <p:nvSpPr>
+          <p:cNvPr id="177" name="Google Shape;177;p16"/>
           <p:cNvSpPr txBox="1"/>
           <p:nvPr/>
         </p:nvSpPr>
@@ -17614,7 +17994,7 @@
       </p:sp>
       <p:sp>
         <p:nvSpPr>
-          <p:cNvPr id="186" name="Google Shape;186;p43"/>
+          <p:cNvPr id="178" name="Google Shape;178;p16"/>
           <p:cNvSpPr txBox="1"/>
           <p:nvPr/>
         </p:nvSpPr>
@@ -17768,7 +18148,15 @@
               </a:rPr>
               <a:t>GPT-1 (2018) had 117 million parameters trained on 10 million tokens. </a:t>
             </a:r>
-            <a:endParaRPr/>
+            <a:endParaRPr sz="1400" b="0" i="0" u="none" strike="noStrike" cap="none">
+              <a:solidFill>
+                <a:srgbClr val="000000"/>
+              </a:solidFill>
+              <a:latin typeface="Arial"/>
+              <a:ea typeface="Arial"/>
+              <a:cs typeface="Arial"/>
+              <a:sym typeface="Arial"/>
+            </a:endParaRPr>
           </a:p>
           <a:p>
             <a:pPr marL="342900" marR="0" lvl="0" indent="-342900" algn="l" rtl="0">
@@ -17800,7 +18188,15 @@
               </a:rPr>
               <a:t>GPT-2 (2019) had 1.5 billion parameters and was trained on 10 billion tokens. </a:t>
             </a:r>
-            <a:endParaRPr/>
+            <a:endParaRPr sz="1400" b="0" i="0" u="none" strike="noStrike" cap="none">
+              <a:solidFill>
+                <a:srgbClr val="000000"/>
+              </a:solidFill>
+              <a:latin typeface="Arial"/>
+              <a:ea typeface="Arial"/>
+              <a:cs typeface="Arial"/>
+              <a:sym typeface="Arial"/>
+            </a:endParaRPr>
           </a:p>
           <a:p>
             <a:pPr marL="342900" marR="0" lvl="0" indent="-342900" algn="l" rtl="0">
@@ -17832,13 +18228,21 @@
               </a:rPr>
               <a:t>GPT-3 (2020) had 175 billion parameters and was trained on 300 billion tokens.</a:t>
             </a:r>
-            <a:endParaRPr/>
+            <a:endParaRPr sz="1400" b="0" i="0" u="none" strike="noStrike" cap="none">
+              <a:solidFill>
+                <a:srgbClr val="000000"/>
+              </a:solidFill>
+              <a:latin typeface="Arial"/>
+              <a:ea typeface="Arial"/>
+              <a:cs typeface="Arial"/>
+              <a:sym typeface="Arial"/>
+            </a:endParaRPr>
           </a:p>
         </p:txBody>
       </p:sp>
       <p:pic>
         <p:nvPicPr>
-          <p:cNvPr id="187" name="Google Shape;187;p43"/>
+          <p:cNvPr id="179" name="Google Shape;179;p16"/>
           <p:cNvPicPr preferRelativeResize="0"/>
           <p:nvPr/>
         </p:nvPicPr>
@@ -17871,12 +18275,12 @@
 </p:sld>
 </file>
 
-<file path=ppt/slides/slide14.xml><?xml version="1.0" encoding="utf-8"?>
+<file path=ppt/slides/slide15.xml><?xml version="1.0" encoding="utf-8"?>
 <p:sld xmlns:a="http://schemas.openxmlformats.org/drawingml/2006/main" xmlns:r="http://schemas.openxmlformats.org/officeDocument/2006/relationships" xmlns:p="http://schemas.openxmlformats.org/presentationml/2006/main">
   <p:cSld>
     <p:spTree>
       <p:nvGrpSpPr>
-        <p:cNvPr id="1" name="Shape 209"/>
+        <p:cNvPr id="1" name="Shape 183"/>
         <p:cNvGrpSpPr/>
         <p:nvPr/>
       </p:nvGrpSpPr>
@@ -17890,7 +18294,7 @@
       </p:grpSpPr>
       <p:sp>
         <p:nvSpPr>
-          <p:cNvPr id="210" name="Google Shape;210;p47"/>
+          <p:cNvPr id="184" name="Google Shape;184;p17"/>
           <p:cNvSpPr txBox="1"/>
           <p:nvPr/>
         </p:nvSpPr>
@@ -17956,7 +18360,7 @@
       </p:sp>
       <p:sp>
         <p:nvSpPr>
-          <p:cNvPr id="211" name="Google Shape;211;p47"/>
+          <p:cNvPr id="185" name="Google Shape;185;p17"/>
           <p:cNvSpPr txBox="1"/>
           <p:nvPr/>
         </p:nvSpPr>
@@ -17997,7 +18401,7 @@
               <a:buNone/>
             </a:pPr>
             <a:r>
-              <a:rPr lang="en-US" sz="2000" b="1" i="0" u="none" strike="noStrike" cap="none" dirty="0">
+              <a:rPr lang="en-US" sz="2000" b="1" i="0" u="none" strike="noStrike" cap="none">
                 <a:solidFill>
                   <a:schemeClr val="dk1"/>
                 </a:solidFill>
@@ -18008,7 +18412,15 @@
               </a:rPr>
               <a:t>Various Challenges with LLMs (Among Many Others)</a:t>
             </a:r>
-            <a:endParaRPr dirty="0"/>
+            <a:endParaRPr sz="1400" b="0" i="0" u="none" strike="noStrike" cap="none">
+              <a:solidFill>
+                <a:srgbClr val="000000"/>
+              </a:solidFill>
+              <a:latin typeface="Arial"/>
+              <a:ea typeface="Arial"/>
+              <a:cs typeface="Arial"/>
+              <a:sym typeface="Arial"/>
+            </a:endParaRPr>
           </a:p>
           <a:p>
             <a:pPr marL="0" marR="0" lvl="0" indent="0" algn="l" rtl="0">
@@ -18028,7 +18440,7 @@
               <a:buFont typeface="Arial"/>
               <a:buNone/>
             </a:pPr>
-            <a:endParaRPr sz="1800" b="0" i="0" u="none" strike="noStrike" cap="none" dirty="0">
+            <a:endParaRPr sz="1800" b="0" i="0" u="none" strike="noStrike" cap="none">
               <a:solidFill>
                 <a:schemeClr val="dk1"/>
               </a:solidFill>
@@ -18057,7 +18469,7 @@
               <a:buChar char="•"/>
             </a:pPr>
             <a:r>
-              <a:rPr lang="en-US" sz="1800" b="0" i="0" u="sng" strike="noStrike" cap="none" dirty="0">
+              <a:rPr lang="en-US" sz="1800" b="0" i="0" u="sng" strike="noStrike" cap="none">
                 <a:solidFill>
                   <a:schemeClr val="dk1"/>
                 </a:solidFill>
@@ -18069,7 +18481,7 @@
               <a:t>Hallucination:</a:t>
             </a:r>
             <a:r>
-              <a:rPr lang="en-US" sz="1800" b="0" i="0" u="none" strike="noStrike" cap="none" dirty="0">
+              <a:rPr lang="en-US" sz="1800" b="0" i="0" u="none" strike="noStrike" cap="none">
                 <a:solidFill>
                   <a:schemeClr val="dk1"/>
                 </a:solidFill>
@@ -18080,7 +18492,15 @@
               </a:rPr>
               <a:t> They produce plausible text as output, not necessarily truthful or correct text. Therefore, they are highly dependent on the quality of training data.</a:t>
             </a:r>
-            <a:endParaRPr dirty="0"/>
+            <a:endParaRPr sz="1400" b="0" i="0" u="none" strike="noStrike" cap="none">
+              <a:solidFill>
+                <a:srgbClr val="000000"/>
+              </a:solidFill>
+              <a:latin typeface="Arial"/>
+              <a:ea typeface="Arial"/>
+              <a:cs typeface="Arial"/>
+              <a:sym typeface="Arial"/>
+            </a:endParaRPr>
           </a:p>
           <a:p>
             <a:pPr marL="342900" marR="0" lvl="0" indent="-228600" algn="l" rtl="0">
@@ -18100,7 +18520,7 @@
               <a:buFont typeface="Arial"/>
               <a:buNone/>
             </a:pPr>
-            <a:endParaRPr sz="1800" b="0" i="0" u="none" strike="noStrike" cap="none" dirty="0">
+            <a:endParaRPr sz="1800" b="0" i="0" u="none" strike="noStrike" cap="none">
               <a:solidFill>
                 <a:schemeClr val="dk1"/>
               </a:solidFill>
@@ -18129,7 +18549,7 @@
               <a:buChar char="•"/>
             </a:pPr>
             <a:r>
-              <a:rPr lang="en-US" sz="1800" b="0" i="0" u="sng" strike="noStrike" cap="none" dirty="0">
+              <a:rPr lang="en-US" sz="1800" b="0" i="0" u="sng" strike="noStrike" cap="none">
                 <a:solidFill>
                   <a:schemeClr val="dk1"/>
                 </a:solidFill>
@@ -18141,7 +18561,7 @@
               <a:t>Prompt Brittleness:</a:t>
             </a:r>
             <a:r>
-              <a:rPr lang="en-US" sz="1800" b="0" i="0" u="none" strike="noStrike" cap="none" dirty="0">
+              <a:rPr lang="en-US" sz="1800" b="0" i="0" u="none" strike="noStrike" cap="none">
                 <a:solidFill>
                   <a:schemeClr val="dk1"/>
                 </a:solidFill>
@@ -18152,7 +18572,15 @@
               </a:rPr>
               <a:t> Rewording a prompt even slightly can lead to considerable changes in model response. For example, if you ask the same question of an LLM in different languages, you can get very different answers (conceptually and semantically)! </a:t>
             </a:r>
-            <a:endParaRPr dirty="0"/>
+            <a:endParaRPr sz="1400" b="0" i="0" u="none" strike="noStrike" cap="none">
+              <a:solidFill>
+                <a:srgbClr val="000000"/>
+              </a:solidFill>
+              <a:latin typeface="Arial"/>
+              <a:ea typeface="Arial"/>
+              <a:cs typeface="Arial"/>
+              <a:sym typeface="Arial"/>
+            </a:endParaRPr>
           </a:p>
           <a:p>
             <a:pPr marL="342900" marR="0" lvl="0" indent="-228600" algn="l" rtl="0">
@@ -18172,7 +18600,7 @@
               <a:buFont typeface="Arial"/>
               <a:buNone/>
             </a:pPr>
-            <a:endParaRPr sz="1800" b="0" i="0" u="none" strike="noStrike" cap="none" dirty="0">
+            <a:endParaRPr sz="1800" b="0" i="0" u="none" strike="noStrike" cap="none">
               <a:solidFill>
                 <a:schemeClr val="dk1"/>
               </a:solidFill>
@@ -18201,7 +18629,7 @@
               <a:buChar char="•"/>
             </a:pPr>
             <a:r>
-              <a:rPr lang="en-US" sz="1800" b="0" i="0" u="sng" strike="noStrike" cap="none" dirty="0">
+              <a:rPr lang="en-US" sz="1800" b="0" i="0" u="sng" strike="noStrike" cap="none">
                 <a:solidFill>
                   <a:schemeClr val="dk1"/>
                 </a:solidFill>
@@ -18213,7 +18641,7 @@
               <a:t>Memorization:</a:t>
             </a:r>
             <a:r>
-              <a:rPr lang="en-US" sz="1800" b="1" i="0" u="none" strike="noStrike" cap="none" dirty="0">
+              <a:rPr lang="en-US" sz="1800" b="1" i="0" u="none" strike="noStrike" cap="none">
                 <a:solidFill>
                   <a:schemeClr val="dk1"/>
                 </a:solidFill>
@@ -18225,7 +18653,7 @@
               <a:t> </a:t>
             </a:r>
             <a:r>
-              <a:rPr lang="en-US" sz="1800" b="0" i="0" u="none" strike="noStrike" cap="none" dirty="0">
+              <a:rPr lang="en-US" sz="1800" b="0" i="0" u="none" strike="noStrike" cap="none">
                 <a:solidFill>
                   <a:schemeClr val="dk1"/>
                 </a:solidFill>
@@ -18236,7 +18664,7 @@
               </a:rPr>
               <a:t>Assessing the performance of LLMs on various task benchmarks is quite challenging because it is often tough to assess whether the model has seen the problem previously and is merely looking up the answer in training data. This affects whether performance reflects how a model might perform on an entirely new task. </a:t>
             </a:r>
-            <a:endParaRPr sz="1800" b="0" i="0" u="sng" strike="noStrike" cap="none" dirty="0">
+            <a:endParaRPr sz="1800" b="0" i="0" u="sng" strike="noStrike" cap="none">
               <a:solidFill>
                 <a:schemeClr val="dk1"/>
               </a:solidFill>
@@ -18264,7 +18692,7 @@
               <a:buFont typeface="Arial"/>
               <a:buNone/>
             </a:pPr>
-            <a:endParaRPr sz="1800" b="0" i="0" u="none" strike="noStrike" cap="none" dirty="0">
+            <a:endParaRPr sz="1800" b="0" i="0" u="none" strike="noStrike" cap="none">
               <a:solidFill>
                 <a:schemeClr val="dk1"/>
               </a:solidFill>
@@ -18278,7 +18706,7 @@
       </p:sp>
       <p:pic>
         <p:nvPicPr>
-          <p:cNvPr id="212" name="Google Shape;212;p47" descr="The Sisyphus Treadmill: Why we keep falling for rehashed ideas - Darius  Foroux"/>
+          <p:cNvPr id="186" name="Google Shape;186;p17" descr="The Sisyphus Treadmill: Why we keep falling for rehashed ideas - Darius  Foroux"/>
           <p:cNvPicPr preferRelativeResize="0"/>
           <p:nvPr/>
         </p:nvPicPr>
@@ -18318,12 +18746,12 @@
 </p:sld>
 </file>
 
-<file path=ppt/slides/slide15.xml><?xml version="1.0" encoding="utf-8"?>
+<file path=ppt/slides/slide16.xml><?xml version="1.0" encoding="utf-8"?>
 <p:sld xmlns:a="http://schemas.openxmlformats.org/drawingml/2006/main" xmlns:r="http://schemas.openxmlformats.org/officeDocument/2006/relationships" xmlns:p="http://schemas.openxmlformats.org/presentationml/2006/main">
   <p:cSld>
     <p:spTree>
       <p:nvGrpSpPr>
-        <p:cNvPr id="1" name="Shape 216"/>
+        <p:cNvPr id="1" name="Shape 190"/>
         <p:cNvGrpSpPr/>
         <p:nvPr/>
       </p:nvGrpSpPr>
@@ -18337,7 +18765,7 @@
       </p:grpSpPr>
       <p:sp>
         <p:nvSpPr>
-          <p:cNvPr id="217" name="Google Shape;217;p48"/>
+          <p:cNvPr id="191" name="Google Shape;191;p18"/>
           <p:cNvSpPr txBox="1"/>
           <p:nvPr/>
         </p:nvSpPr>
@@ -18403,7 +18831,7 @@
       </p:sp>
       <p:sp>
         <p:nvSpPr>
-          <p:cNvPr id="218" name="Google Shape;218;p48"/>
+          <p:cNvPr id="192" name="Google Shape;192;p18"/>
           <p:cNvSpPr txBox="1"/>
           <p:nvPr/>
         </p:nvSpPr>
@@ -18455,7 +18883,15 @@
               </a:rPr>
               <a:t>Loading Pre-trained Models from Keras Hub</a:t>
             </a:r>
-            <a:endParaRPr/>
+            <a:endParaRPr sz="1400" b="0" i="0" u="none" strike="noStrike" cap="none">
+              <a:solidFill>
+                <a:srgbClr val="000000"/>
+              </a:solidFill>
+              <a:latin typeface="Arial"/>
+              <a:ea typeface="Arial"/>
+              <a:cs typeface="Arial"/>
+              <a:sym typeface="Arial"/>
+            </a:endParaRPr>
           </a:p>
           <a:p>
             <a:pPr marL="0" marR="0" lvl="0" indent="0" algn="l" rtl="0">
@@ -18515,7 +18951,15 @@
               </a:rPr>
               <a:t>Check out what is available on the Keras hub. Many open-source and free-to-use models are there, though many are too large for a Colab notebook. </a:t>
             </a:r>
-            <a:endParaRPr/>
+            <a:endParaRPr sz="1400" b="0" i="0" u="none" strike="noStrike" cap="none">
+              <a:solidFill>
+                <a:srgbClr val="000000"/>
+              </a:solidFill>
+              <a:latin typeface="Arial"/>
+              <a:ea typeface="Arial"/>
+              <a:cs typeface="Arial"/>
+              <a:sym typeface="Arial"/>
+            </a:endParaRPr>
           </a:p>
           <a:p>
             <a:pPr marL="0" marR="0" lvl="0" indent="0" algn="l" rtl="0">
@@ -18575,13 +19019,21 @@
               </a:rPr>
               <a:t>Kaggle hosts some of the models. For a given model, you may need to visit Kaggle and create an API key, complete a request form, or agree to terms and conditions.  </a:t>
             </a:r>
-            <a:endParaRPr/>
+            <a:endParaRPr sz="1400" b="0" i="0" u="none" strike="noStrike" cap="none">
+              <a:solidFill>
+                <a:srgbClr val="000000"/>
+              </a:solidFill>
+              <a:latin typeface="Arial"/>
+              <a:ea typeface="Arial"/>
+              <a:cs typeface="Arial"/>
+              <a:sym typeface="Arial"/>
+            </a:endParaRPr>
           </a:p>
         </p:txBody>
       </p:sp>
       <p:pic>
         <p:nvPicPr>
-          <p:cNvPr id="219" name="Google Shape;219;p48"/>
+          <p:cNvPr id="193" name="Google Shape;193;p18"/>
           <p:cNvPicPr preferRelativeResize="0"/>
           <p:nvPr/>
         </p:nvPicPr>
@@ -18614,12 +19066,12 @@
 </p:sld>
 </file>
 
-<file path=ppt/slides/slide16.xml><?xml version="1.0" encoding="utf-8"?>
+<file path=ppt/slides/slide17.xml><?xml version="1.0" encoding="utf-8"?>
 <p:sld xmlns:a="http://schemas.openxmlformats.org/drawingml/2006/main" xmlns:r="http://schemas.openxmlformats.org/officeDocument/2006/relationships" xmlns:p="http://schemas.openxmlformats.org/presentationml/2006/main">
   <p:cSld>
     <p:spTree>
       <p:nvGrpSpPr>
-        <p:cNvPr id="1" name="Shape 230"/>
+        <p:cNvPr id="1" name="Shape 212"/>
         <p:cNvGrpSpPr/>
         <p:nvPr/>
       </p:nvGrpSpPr>
@@ -18633,817 +19085,7 @@
       </p:grpSpPr>
       <p:sp>
         <p:nvSpPr>
-          <p:cNvPr id="231" name="Google Shape;231;p50"/>
-          <p:cNvSpPr txBox="1"/>
-          <p:nvPr/>
-        </p:nvSpPr>
-        <p:spPr>
-          <a:xfrm>
-            <a:off x="798653" y="423819"/>
-            <a:ext cx="10444705" cy="923289"/>
-          </a:xfrm>
-          <a:prstGeom prst="rect">
-            <a:avLst/>
-          </a:prstGeom>
-          <a:noFill/>
-          <a:ln>
-            <a:noFill/>
-          </a:ln>
-        </p:spPr>
-        <p:txBody>
-          <a:bodyPr spcFirstLastPara="1" wrap="square" lIns="91425" tIns="45700" rIns="91425" bIns="45700" anchor="t" anchorCtr="0">
-            <a:spAutoFit/>
-          </a:bodyPr>
-          <a:lstStyle/>
-          <a:p>
-            <a:pPr marL="0" marR="0" lvl="0" indent="0" algn="ctr" rtl="0">
-              <a:lnSpc>
-                <a:spcPct val="100000"/>
-              </a:lnSpc>
-              <a:spcBef>
-                <a:spcPts val="0"/>
-              </a:spcBef>
-              <a:spcAft>
-                <a:spcPts val="0"/>
-              </a:spcAft>
-              <a:buClr>
-                <a:srgbClr val="000000"/>
-              </a:buClr>
-              <a:buSzPts val="5400"/>
-              <a:buFont typeface="Arial"/>
-              <a:buNone/>
-            </a:pPr>
-            <a:r>
-              <a:rPr lang="en-US" sz="5400" b="0" i="0" u="none" strike="noStrike" cap="none" dirty="0">
-                <a:solidFill>
-                  <a:schemeClr val="dk1"/>
-                </a:solidFill>
-                <a:latin typeface="Economica"/>
-                <a:ea typeface="Economica"/>
-                <a:cs typeface="Economica"/>
-                <a:sym typeface="Economica"/>
-              </a:rPr>
-              <a:t>LLM Prompting Strategies (In-Context Learning)</a:t>
-            </a:r>
-            <a:endParaRPr sz="1400" b="0" i="0" u="none" strike="noStrike" cap="none" dirty="0">
-              <a:solidFill>
-                <a:srgbClr val="000000"/>
-              </a:solidFill>
-              <a:latin typeface="Arial"/>
-              <a:ea typeface="Arial"/>
-              <a:cs typeface="Arial"/>
-              <a:sym typeface="Arial"/>
-            </a:endParaRPr>
-          </a:p>
-        </p:txBody>
-      </p:sp>
-      <p:pic>
-        <p:nvPicPr>
-          <p:cNvPr id="232" name="Google Shape;232;p50" descr="Standard prompting vs Chain of Thought prompting"/>
-          <p:cNvPicPr preferRelativeResize="0"/>
-          <p:nvPr/>
-        </p:nvPicPr>
-        <p:blipFill rotWithShape="1">
-          <a:blip r:embed="rId3">
-            <a:alphaModFix/>
-          </a:blip>
-          <a:srcRect/>
-          <a:stretch/>
-        </p:blipFill>
-        <p:spPr>
-          <a:xfrm>
-            <a:off x="6331635" y="2366851"/>
-            <a:ext cx="5624464" cy="2830182"/>
-          </a:xfrm>
-          <a:prstGeom prst="rect">
-            <a:avLst/>
-          </a:prstGeom>
-          <a:noFill/>
-          <a:ln>
-            <a:noFill/>
-          </a:ln>
-        </p:spPr>
-      </p:pic>
-      <p:sp>
-        <p:nvSpPr>
-          <p:cNvPr id="233" name="Google Shape;233;p50"/>
-          <p:cNvSpPr txBox="1"/>
-          <p:nvPr/>
-        </p:nvSpPr>
-        <p:spPr>
-          <a:xfrm>
-            <a:off x="491490" y="2043024"/>
-            <a:ext cx="5368876" cy="3477835"/>
-          </a:xfrm>
-          <a:prstGeom prst="rect">
-            <a:avLst/>
-          </a:prstGeom>
-          <a:noFill/>
-          <a:ln>
-            <a:noFill/>
-          </a:ln>
-        </p:spPr>
-        <p:txBody>
-          <a:bodyPr spcFirstLastPara="1" wrap="square" lIns="91425" tIns="45700" rIns="91425" bIns="45700" anchor="t" anchorCtr="0">
-            <a:spAutoFit/>
-          </a:bodyPr>
-          <a:lstStyle/>
-          <a:p>
-            <a:pPr marL="0" marR="0" lvl="0" indent="0" algn="l" rtl="0">
-              <a:lnSpc>
-                <a:spcPct val="100000"/>
-              </a:lnSpc>
-              <a:spcBef>
-                <a:spcPts val="0"/>
-              </a:spcBef>
-              <a:spcAft>
-                <a:spcPts val="0"/>
-              </a:spcAft>
-              <a:buClr>
-                <a:srgbClr val="000000"/>
-              </a:buClr>
-              <a:buSzPts val="2000"/>
-              <a:buFont typeface="Arial"/>
-              <a:buNone/>
-            </a:pPr>
-            <a:r>
-              <a:rPr lang="en-US" sz="2000" b="1" i="0" u="none" strike="noStrike" cap="none" dirty="0">
-                <a:solidFill>
-                  <a:schemeClr val="dk1"/>
-                </a:solidFill>
-                <a:latin typeface="Quicksand"/>
-                <a:ea typeface="Quicksand"/>
-                <a:cs typeface="Quicksand"/>
-                <a:sym typeface="Quicksand"/>
-              </a:rPr>
-              <a:t>Demonstrations vs. Reasoning Traces</a:t>
-            </a:r>
-            <a:endParaRPr dirty="0"/>
-          </a:p>
-          <a:p>
-            <a:pPr marL="0" marR="0" lvl="0" indent="0" algn="l" rtl="0">
-              <a:lnSpc>
-                <a:spcPct val="100000"/>
-              </a:lnSpc>
-              <a:spcBef>
-                <a:spcPts val="0"/>
-              </a:spcBef>
-              <a:spcAft>
-                <a:spcPts val="0"/>
-              </a:spcAft>
-              <a:buClr>
-                <a:srgbClr val="000000"/>
-              </a:buClr>
-              <a:buSzPts val="2000"/>
-              <a:buFont typeface="Arial"/>
-              <a:buNone/>
-            </a:pPr>
-            <a:endParaRPr sz="2000" b="1" i="0" u="none" strike="noStrike" cap="none" dirty="0">
-              <a:solidFill>
-                <a:schemeClr val="dk1"/>
-              </a:solidFill>
-              <a:latin typeface="Quicksand"/>
-              <a:ea typeface="Quicksand"/>
-              <a:cs typeface="Quicksand"/>
-              <a:sym typeface="Quicksand"/>
-            </a:endParaRPr>
-          </a:p>
-          <a:p>
-            <a:pPr marL="285750" marR="0" lvl="0" indent="-285750" algn="l" rtl="0">
-              <a:lnSpc>
-                <a:spcPct val="100000"/>
-              </a:lnSpc>
-              <a:spcBef>
-                <a:spcPts val="0"/>
-              </a:spcBef>
-              <a:spcAft>
-                <a:spcPts val="0"/>
-              </a:spcAft>
-              <a:buClr>
-                <a:srgbClr val="000000"/>
-              </a:buClr>
-              <a:buSzPts val="2000"/>
-              <a:buFont typeface="Arial"/>
-              <a:buChar char="•"/>
-            </a:pPr>
-            <a:r>
-              <a:rPr lang="en-US" sz="1800" b="0" i="0" u="sng" strike="noStrike" cap="none" dirty="0">
-                <a:solidFill>
-                  <a:schemeClr val="dk1"/>
-                </a:solidFill>
-                <a:latin typeface="Quicksand"/>
-                <a:ea typeface="Quicksand"/>
-                <a:cs typeface="Quicksand"/>
-                <a:sym typeface="Quicksand"/>
-              </a:rPr>
-              <a:t>Zero-shot vs. Few shot:</a:t>
-            </a:r>
-            <a:r>
-              <a:rPr lang="en-US" sz="1800" b="0" i="0" u="none" strike="noStrike" cap="none" dirty="0">
-                <a:solidFill>
-                  <a:schemeClr val="dk1"/>
-                </a:solidFill>
-                <a:latin typeface="Quicksand"/>
-                <a:ea typeface="Quicksand"/>
-                <a:cs typeface="Quicksand"/>
-                <a:sym typeface="Quicksand"/>
-              </a:rPr>
-              <a:t> Just ask the model to answer a question (zero-) vs. provide ‘good’ prompt response pairs as examples while asking the model to answer a question (few-).</a:t>
-            </a:r>
-            <a:endParaRPr dirty="0"/>
-          </a:p>
-          <a:p>
-            <a:pPr marL="285750" marR="0" lvl="0" indent="-171450" algn="l" rtl="0">
-              <a:lnSpc>
-                <a:spcPct val="100000"/>
-              </a:lnSpc>
-              <a:spcBef>
-                <a:spcPts val="0"/>
-              </a:spcBef>
-              <a:spcAft>
-                <a:spcPts val="0"/>
-              </a:spcAft>
-              <a:buClr>
-                <a:schemeClr val="dk1"/>
-              </a:buClr>
-              <a:buSzPts val="1800"/>
-              <a:buFont typeface="Arial"/>
-              <a:buNone/>
-            </a:pPr>
-            <a:endParaRPr sz="1800" b="0" i="0" u="none" strike="noStrike" cap="none" dirty="0">
-              <a:solidFill>
-                <a:schemeClr val="dk1"/>
-              </a:solidFill>
-              <a:latin typeface="Quicksand"/>
-              <a:ea typeface="Quicksand"/>
-              <a:cs typeface="Quicksand"/>
-              <a:sym typeface="Quicksand"/>
-            </a:endParaRPr>
-          </a:p>
-          <a:p>
-            <a:pPr marL="285750" marR="0" lvl="0" indent="-285750" algn="l" rtl="0">
-              <a:lnSpc>
-                <a:spcPct val="100000"/>
-              </a:lnSpc>
-              <a:spcBef>
-                <a:spcPts val="0"/>
-              </a:spcBef>
-              <a:spcAft>
-                <a:spcPts val="0"/>
-              </a:spcAft>
-              <a:buClr>
-                <a:schemeClr val="dk1"/>
-              </a:buClr>
-              <a:buSzPts val="1800"/>
-              <a:buFont typeface="Arial"/>
-              <a:buChar char="•"/>
-            </a:pPr>
-            <a:r>
-              <a:rPr lang="en-US" sz="1800" b="0" i="0" u="sng" strike="noStrike" cap="none" dirty="0">
-                <a:solidFill>
-                  <a:schemeClr val="dk1"/>
-                </a:solidFill>
-                <a:latin typeface="Quicksand"/>
-                <a:ea typeface="Quicksand"/>
-                <a:cs typeface="Quicksand"/>
-                <a:sym typeface="Quicksand"/>
-              </a:rPr>
-              <a:t>Chain of Thought (</a:t>
-            </a:r>
-            <a:r>
-              <a:rPr lang="en-US" sz="1800" b="0" i="0" u="sng" strike="noStrike" cap="none" dirty="0" err="1">
-                <a:solidFill>
-                  <a:schemeClr val="dk1"/>
-                </a:solidFill>
-                <a:latin typeface="Quicksand"/>
-                <a:ea typeface="Quicksand"/>
-                <a:cs typeface="Quicksand"/>
-                <a:sym typeface="Quicksand"/>
-              </a:rPr>
-              <a:t>CoT</a:t>
-            </a:r>
-            <a:r>
-              <a:rPr lang="en-US" sz="1800" b="0" i="0" u="sng" strike="noStrike" cap="none" dirty="0">
-                <a:solidFill>
-                  <a:schemeClr val="dk1"/>
-                </a:solidFill>
-                <a:latin typeface="Quicksand"/>
-                <a:ea typeface="Quicksand"/>
-                <a:cs typeface="Quicksand"/>
-                <a:sym typeface="Quicksand"/>
-              </a:rPr>
-              <a:t>):</a:t>
-            </a:r>
-            <a:r>
-              <a:rPr lang="en-US" sz="1800" b="1" i="0" u="none" strike="noStrike" cap="none" dirty="0">
-                <a:solidFill>
-                  <a:schemeClr val="dk1"/>
-                </a:solidFill>
-                <a:latin typeface="Quicksand"/>
-                <a:ea typeface="Quicksand"/>
-                <a:cs typeface="Quicksand"/>
-                <a:sym typeface="Quicksand"/>
-              </a:rPr>
-              <a:t> </a:t>
-            </a:r>
-            <a:r>
-              <a:rPr lang="en-US" sz="1800" b="0" i="0" u="none" strike="noStrike" cap="none" dirty="0">
-                <a:solidFill>
-                  <a:schemeClr val="dk1"/>
-                </a:solidFill>
-                <a:latin typeface="Quicksand"/>
-                <a:ea typeface="Quicksand"/>
-                <a:cs typeface="Quicksand"/>
-                <a:sym typeface="Quicksand"/>
-              </a:rPr>
-              <a:t>Provide examples of question + reasoning process + answer. </a:t>
-            </a:r>
-            <a:r>
-              <a:rPr lang="en-US" sz="1800" b="0" i="1" u="none" strike="noStrike" cap="none" dirty="0">
-                <a:solidFill>
-                  <a:schemeClr val="dk1"/>
-                </a:solidFill>
-                <a:latin typeface="Quicksand"/>
-                <a:ea typeface="Quicksand"/>
-                <a:cs typeface="Quicksand"/>
-                <a:sym typeface="Quicksand"/>
-              </a:rPr>
-              <a:t>Note: not the same as reasoning / thinking models, which are models that are pre-trained on reasoning traces.</a:t>
-            </a:r>
-          </a:p>
-        </p:txBody>
-      </p:sp>
-    </p:spTree>
-  </p:cSld>
-  <p:clrMapOvr>
-    <a:masterClrMapping/>
-  </p:clrMapOvr>
-</p:sld>
-</file>
-
-<file path=ppt/slides/slide17.xml><?xml version="1.0" encoding="utf-8"?>
-<p:sld xmlns:a="http://schemas.openxmlformats.org/drawingml/2006/main" xmlns:r="http://schemas.openxmlformats.org/officeDocument/2006/relationships" xmlns:p="http://schemas.openxmlformats.org/presentationml/2006/main">
-  <p:cSld>
-    <p:spTree>
-      <p:nvGrpSpPr>
-        <p:cNvPr id="1" name="Shape 237"/>
-        <p:cNvGrpSpPr/>
-        <p:nvPr/>
-      </p:nvGrpSpPr>
-      <p:grpSpPr>
-        <a:xfrm>
-          <a:off x="0" y="0"/>
-          <a:ext cx="0" cy="0"/>
-          <a:chOff x="0" y="0"/>
-          <a:chExt cx="0" cy="0"/>
-        </a:xfrm>
-      </p:grpSpPr>
-      <p:sp>
-        <p:nvSpPr>
-          <p:cNvPr id="238" name="Google Shape;238;p51"/>
-          <p:cNvSpPr txBox="1"/>
-          <p:nvPr/>
-        </p:nvSpPr>
-        <p:spPr>
-          <a:xfrm>
-            <a:off x="873647" y="576483"/>
-            <a:ext cx="10444705" cy="923289"/>
-          </a:xfrm>
-          <a:prstGeom prst="rect">
-            <a:avLst/>
-          </a:prstGeom>
-          <a:noFill/>
-          <a:ln>
-            <a:noFill/>
-          </a:ln>
-        </p:spPr>
-        <p:txBody>
-          <a:bodyPr spcFirstLastPara="1" wrap="square" lIns="91425" tIns="45700" rIns="91425" bIns="45700" anchor="t" anchorCtr="0">
-            <a:spAutoFit/>
-          </a:bodyPr>
-          <a:lstStyle/>
-          <a:p>
-            <a:pPr marL="0" marR="0" lvl="0" indent="0" algn="ctr" rtl="0">
-              <a:lnSpc>
-                <a:spcPct val="100000"/>
-              </a:lnSpc>
-              <a:spcBef>
-                <a:spcPts val="0"/>
-              </a:spcBef>
-              <a:spcAft>
-                <a:spcPts val="0"/>
-              </a:spcAft>
-              <a:buClr>
-                <a:srgbClr val="000000"/>
-              </a:buClr>
-              <a:buSzPts val="5400"/>
-              <a:buFont typeface="Arial"/>
-              <a:buNone/>
-            </a:pPr>
-            <a:r>
-              <a:rPr lang="en-US" sz="5400" b="0" i="0" u="none" strike="noStrike" cap="none" dirty="0">
-                <a:solidFill>
-                  <a:schemeClr val="dk1"/>
-                </a:solidFill>
-                <a:latin typeface="Economica"/>
-                <a:ea typeface="Economica"/>
-                <a:cs typeface="Economica"/>
-                <a:sym typeface="Economica"/>
-              </a:rPr>
-              <a:t>Recent Architectural Innovations</a:t>
-            </a:r>
-            <a:endParaRPr sz="1400" b="0" i="0" u="none" strike="noStrike" cap="none" dirty="0">
-              <a:solidFill>
-                <a:srgbClr val="000000"/>
-              </a:solidFill>
-              <a:latin typeface="Arial"/>
-              <a:ea typeface="Arial"/>
-              <a:cs typeface="Arial"/>
-              <a:sym typeface="Arial"/>
-            </a:endParaRPr>
-          </a:p>
-        </p:txBody>
-      </p:sp>
-      <p:sp>
-        <p:nvSpPr>
-          <p:cNvPr id="239" name="Google Shape;239;p51"/>
-          <p:cNvSpPr txBox="1"/>
-          <p:nvPr/>
-        </p:nvSpPr>
-        <p:spPr>
-          <a:xfrm>
-            <a:off x="566486" y="1859140"/>
-            <a:ext cx="5614396" cy="4555053"/>
-          </a:xfrm>
-          <a:prstGeom prst="rect">
-            <a:avLst/>
-          </a:prstGeom>
-          <a:noFill/>
-          <a:ln>
-            <a:noFill/>
-          </a:ln>
-        </p:spPr>
-        <p:txBody>
-          <a:bodyPr spcFirstLastPara="1" wrap="square" lIns="91425" tIns="45700" rIns="91425" bIns="45700" anchor="t" anchorCtr="0">
-            <a:spAutoFit/>
-          </a:bodyPr>
-          <a:lstStyle/>
-          <a:p>
-            <a:pPr marL="0" marR="0" lvl="0" indent="0" algn="l" rtl="0">
-              <a:lnSpc>
-                <a:spcPct val="100000"/>
-              </a:lnSpc>
-              <a:spcBef>
-                <a:spcPts val="0"/>
-              </a:spcBef>
-              <a:spcAft>
-                <a:spcPts val="0"/>
-              </a:spcAft>
-              <a:buClr>
-                <a:srgbClr val="000000"/>
-              </a:buClr>
-              <a:buSzPts val="2000"/>
-              <a:buFont typeface="Arial"/>
-              <a:buNone/>
-            </a:pPr>
-            <a:r>
-              <a:rPr lang="en-US" sz="2000" b="1" i="0" u="none" strike="noStrike" cap="none" dirty="0">
-                <a:solidFill>
-                  <a:schemeClr val="dk1"/>
-                </a:solidFill>
-                <a:latin typeface="Quicksand"/>
-                <a:ea typeface="Quicksand"/>
-                <a:cs typeface="Quicksand"/>
-                <a:sym typeface="Quicksand"/>
-              </a:rPr>
-              <a:t>Mixture of Experts</a:t>
-            </a:r>
-            <a:endParaRPr sz="1800" b="0" i="0" u="none" strike="noStrike" cap="none" dirty="0">
-              <a:solidFill>
-                <a:schemeClr val="dk1"/>
-              </a:solidFill>
-              <a:latin typeface="Quicksand"/>
-              <a:ea typeface="Quicksand"/>
-              <a:cs typeface="Quicksand"/>
-              <a:sym typeface="Quicksand"/>
-            </a:endParaRPr>
-          </a:p>
-          <a:p>
-            <a:pPr marL="0" marR="0" lvl="0" indent="0" algn="l" rtl="0">
-              <a:lnSpc>
-                <a:spcPct val="100000"/>
-              </a:lnSpc>
-              <a:spcBef>
-                <a:spcPts val="0"/>
-              </a:spcBef>
-              <a:spcAft>
-                <a:spcPts val="0"/>
-              </a:spcAft>
-              <a:buNone/>
-            </a:pPr>
-            <a:endParaRPr sz="1800" b="0" i="0" u="none" strike="noStrike" cap="none" dirty="0">
-              <a:solidFill>
-                <a:schemeClr val="dk1"/>
-              </a:solidFill>
-              <a:latin typeface="Quicksand"/>
-              <a:ea typeface="Quicksand"/>
-              <a:cs typeface="Quicksand"/>
-              <a:sym typeface="Quicksand"/>
-            </a:endParaRPr>
-          </a:p>
-          <a:p>
-            <a:pPr marL="285750" marR="0" lvl="0" indent="-285750" algn="l" rtl="0">
-              <a:lnSpc>
-                <a:spcPct val="100000"/>
-              </a:lnSpc>
-              <a:spcBef>
-                <a:spcPts val="0"/>
-              </a:spcBef>
-              <a:spcAft>
-                <a:spcPts val="0"/>
-              </a:spcAft>
-              <a:buClr>
-                <a:schemeClr val="dk1"/>
-              </a:buClr>
-              <a:buSzPts val="1800"/>
-              <a:buFont typeface="Arial"/>
-              <a:buChar char="•"/>
-            </a:pPr>
-            <a:r>
-              <a:rPr lang="en-US" sz="1800" b="0" i="0" u="none" strike="noStrike" cap="none" dirty="0">
-                <a:solidFill>
-                  <a:schemeClr val="dk1"/>
-                </a:solidFill>
-                <a:latin typeface="Quicksand"/>
-                <a:ea typeface="Quicksand"/>
-                <a:cs typeface="Quicksand"/>
-                <a:sym typeface="Quicksand"/>
-              </a:rPr>
-              <a:t>We have a multiplex design, where the input determines which network component is activated to process and generate a prediction. </a:t>
-            </a:r>
-            <a:endParaRPr dirty="0"/>
-          </a:p>
-          <a:p>
-            <a:pPr marL="285750" marR="0" lvl="0" indent="-171450" algn="l" rtl="0">
-              <a:lnSpc>
-                <a:spcPct val="100000"/>
-              </a:lnSpc>
-              <a:spcBef>
-                <a:spcPts val="0"/>
-              </a:spcBef>
-              <a:spcAft>
-                <a:spcPts val="0"/>
-              </a:spcAft>
-              <a:buClr>
-                <a:schemeClr val="dk1"/>
-              </a:buClr>
-              <a:buSzPts val="1800"/>
-              <a:buFont typeface="Arial"/>
-              <a:buNone/>
-            </a:pPr>
-            <a:endParaRPr sz="1800" b="0" i="0" u="none" strike="noStrike" cap="none" dirty="0">
-              <a:solidFill>
-                <a:schemeClr val="dk1"/>
-              </a:solidFill>
-              <a:latin typeface="Quicksand"/>
-              <a:ea typeface="Quicksand"/>
-              <a:cs typeface="Quicksand"/>
-              <a:sym typeface="Quicksand"/>
-            </a:endParaRPr>
-          </a:p>
-          <a:p>
-            <a:pPr marL="285750" marR="0" lvl="0" indent="-285750" algn="l" rtl="0">
-              <a:lnSpc>
-                <a:spcPct val="100000"/>
-              </a:lnSpc>
-              <a:spcBef>
-                <a:spcPts val="0"/>
-              </a:spcBef>
-              <a:spcAft>
-                <a:spcPts val="0"/>
-              </a:spcAft>
-              <a:buClr>
-                <a:schemeClr val="dk1"/>
-              </a:buClr>
-              <a:buSzPts val="1800"/>
-              <a:buFont typeface="Arial"/>
-              <a:buChar char="•"/>
-            </a:pPr>
-            <a:r>
-              <a:rPr lang="en-US" sz="1800" b="0" i="0" u="none" strike="noStrike" cap="none" dirty="0">
-                <a:solidFill>
-                  <a:schemeClr val="dk1"/>
-                </a:solidFill>
-                <a:latin typeface="Quicksand"/>
-                <a:ea typeface="Quicksand"/>
-                <a:cs typeface="Quicksand"/>
-                <a:sym typeface="Quicksand"/>
-              </a:rPr>
-              <a:t>Originally, this was ‘hard routing’ (</a:t>
-            </a:r>
-            <a:r>
-              <a:rPr lang="en-US" sz="1800" b="0" i="0" u="none" strike="noStrike" cap="none" dirty="0" err="1">
-                <a:solidFill>
-                  <a:schemeClr val="dk1"/>
-                </a:solidFill>
-                <a:latin typeface="Quicksand"/>
-                <a:ea typeface="Quicksand"/>
-                <a:cs typeface="Quicksand"/>
-                <a:sym typeface="Quicksand"/>
-              </a:rPr>
-              <a:t>softmax</a:t>
-            </a:r>
-            <a:r>
-              <a:rPr lang="en-US" sz="1800" b="0" i="0" u="none" strike="noStrike" cap="none" dirty="0">
-                <a:solidFill>
-                  <a:schemeClr val="dk1"/>
-                </a:solidFill>
-                <a:latin typeface="Quicksand"/>
-                <a:ea typeface="Quicksand"/>
-                <a:cs typeface="Quicksand"/>
-                <a:sym typeface="Quicksand"/>
-              </a:rPr>
-              <a:t> argmax), but more recently, it has become soft routing (just </a:t>
-            </a:r>
-            <a:r>
-              <a:rPr lang="en-US" sz="1800" b="0" i="0" u="none" strike="noStrike" cap="none" dirty="0" err="1">
-                <a:solidFill>
-                  <a:schemeClr val="dk1"/>
-                </a:solidFill>
-                <a:latin typeface="Quicksand"/>
-                <a:ea typeface="Quicksand"/>
-                <a:cs typeface="Quicksand"/>
-                <a:sym typeface="Quicksand"/>
-              </a:rPr>
-              <a:t>softmax</a:t>
-            </a:r>
-            <a:r>
-              <a:rPr lang="en-US" sz="1800" b="0" i="0" u="none" strike="noStrike" cap="none" dirty="0">
-                <a:solidFill>
-                  <a:schemeClr val="dk1"/>
-                </a:solidFill>
-                <a:latin typeface="Quicksand"/>
-                <a:ea typeface="Quicksand"/>
-                <a:cs typeface="Quicksand"/>
-                <a:sym typeface="Quicksand"/>
-              </a:rPr>
-              <a:t>), and we take weighted averages of expert output. </a:t>
-            </a:r>
-            <a:endParaRPr dirty="0"/>
-          </a:p>
-          <a:p>
-            <a:pPr marL="285750" marR="0" lvl="0" indent="-171450" algn="l" rtl="0">
-              <a:lnSpc>
-                <a:spcPct val="100000"/>
-              </a:lnSpc>
-              <a:spcBef>
-                <a:spcPts val="0"/>
-              </a:spcBef>
-              <a:spcAft>
-                <a:spcPts val="0"/>
-              </a:spcAft>
-              <a:buClr>
-                <a:schemeClr val="dk1"/>
-              </a:buClr>
-              <a:buSzPts val="1800"/>
-              <a:buFont typeface="Arial"/>
-              <a:buNone/>
-            </a:pPr>
-            <a:endParaRPr sz="1800" b="0" i="0" u="none" strike="noStrike" cap="none" dirty="0">
-              <a:solidFill>
-                <a:schemeClr val="dk1"/>
-              </a:solidFill>
-              <a:latin typeface="Quicksand"/>
-              <a:ea typeface="Quicksand"/>
-              <a:cs typeface="Quicksand"/>
-              <a:sym typeface="Quicksand"/>
-            </a:endParaRPr>
-          </a:p>
-          <a:p>
-            <a:pPr marL="285750" marR="0" lvl="0" indent="-285750" algn="l" rtl="0">
-              <a:lnSpc>
-                <a:spcPct val="100000"/>
-              </a:lnSpc>
-              <a:spcBef>
-                <a:spcPts val="0"/>
-              </a:spcBef>
-              <a:spcAft>
-                <a:spcPts val="0"/>
-              </a:spcAft>
-              <a:buClr>
-                <a:schemeClr val="dk1"/>
-              </a:buClr>
-              <a:buSzPts val="1800"/>
-              <a:buFont typeface="Arial"/>
-              <a:buChar char="•"/>
-            </a:pPr>
-            <a:r>
-              <a:rPr lang="en-US" sz="1800" b="0" i="0" u="none" strike="noStrike" cap="none" dirty="0">
-                <a:solidFill>
-                  <a:schemeClr val="dk1"/>
-                </a:solidFill>
-                <a:latin typeface="Quicksand"/>
-                <a:ea typeface="Quicksand"/>
-                <a:cs typeface="Quicksand"/>
-                <a:sym typeface="Quicksand"/>
-              </a:rPr>
-              <a:t>This adds a lot of overhead to the model, so inference is expensive/slow. </a:t>
-            </a:r>
-            <a:r>
-              <a:rPr lang="en-US" sz="1800" b="0" i="0" u="none" strike="noStrike" cap="none" dirty="0" err="1">
-                <a:solidFill>
-                  <a:schemeClr val="dk1"/>
-                </a:solidFill>
-                <a:latin typeface="Quicksand"/>
-                <a:ea typeface="Quicksand"/>
-                <a:cs typeface="Quicksand"/>
-                <a:sym typeface="Quicksand"/>
-              </a:rPr>
-              <a:t>Deepseek</a:t>
-            </a:r>
-            <a:r>
-              <a:rPr lang="en-US" sz="1800" b="0" i="0" u="none" strike="noStrike" cap="none" dirty="0">
-                <a:solidFill>
-                  <a:schemeClr val="dk1"/>
-                </a:solidFill>
-                <a:latin typeface="Quicksand"/>
-                <a:ea typeface="Quicksand"/>
-                <a:cs typeface="Quicksand"/>
-                <a:sym typeface="Quicksand"/>
-              </a:rPr>
-              <a:t> innovated on this and ‘learned’ the routing rule (or its approximation) after training and made a new network that fixes the routing rule. </a:t>
-            </a:r>
-            <a:endParaRPr dirty="0"/>
-          </a:p>
-        </p:txBody>
-      </p:sp>
-      <p:pic>
-        <p:nvPicPr>
-          <p:cNvPr id="240" name="Google Shape;240;p51" descr="A Visual Guide to Mixture of Experts (MoE)"/>
-          <p:cNvPicPr preferRelativeResize="0"/>
-          <p:nvPr/>
-        </p:nvPicPr>
-        <p:blipFill rotWithShape="1">
-          <a:blip r:embed="rId3">
-            <a:alphaModFix/>
-          </a:blip>
-          <a:srcRect/>
-          <a:stretch/>
-        </p:blipFill>
-        <p:spPr>
-          <a:xfrm>
-            <a:off x="6588196" y="2270248"/>
-            <a:ext cx="5222513" cy="3732835"/>
-          </a:xfrm>
-          <a:prstGeom prst="rect">
-            <a:avLst/>
-          </a:prstGeom>
-          <a:noFill/>
-          <a:ln>
-            <a:noFill/>
-          </a:ln>
-        </p:spPr>
-      </p:pic>
-    </p:spTree>
-  </p:cSld>
-  <p:clrMapOvr>
-    <a:masterClrMapping/>
-  </p:clrMapOvr>
-</p:sld>
-</file>
-
-<file path=ppt/slides/slide18.xml><?xml version="1.0" encoding="utf-8"?>
-<p:sld xmlns:a="http://schemas.openxmlformats.org/drawingml/2006/main" xmlns:r="http://schemas.openxmlformats.org/officeDocument/2006/relationships" xmlns:p="http://schemas.openxmlformats.org/presentationml/2006/main">
-  <p:cSld>
-    <p:spTree>
-      <p:nvGrpSpPr>
-        <p:cNvPr id="1" name="Shape 339">
-          <a:extLst>
-            <a:ext uri="{FF2B5EF4-FFF2-40B4-BE49-F238E27FC236}">
-              <a16:creationId xmlns:a16="http://schemas.microsoft.com/office/drawing/2014/main" id="{10C0B536-91FC-B0E8-73CD-8F25A7324F40}"/>
-            </a:ext>
-          </a:extLst>
-        </p:cNvPr>
-        <p:cNvGrpSpPr/>
-        <p:nvPr/>
-      </p:nvGrpSpPr>
-      <p:grpSpPr>
-        <a:xfrm>
-          <a:off x="0" y="0"/>
-          <a:ext cx="0" cy="0"/>
-          <a:chOff x="0" y="0"/>
-          <a:chExt cx="0" cy="0"/>
-        </a:xfrm>
-      </p:grpSpPr>
-      <p:sp>
-        <p:nvSpPr>
-          <p:cNvPr id="340" name="Google Shape;340;p17">
-            <a:extLst>
-              <a:ext uri="{FF2B5EF4-FFF2-40B4-BE49-F238E27FC236}">
-                <a16:creationId xmlns:a16="http://schemas.microsoft.com/office/drawing/2014/main" id="{720DB44C-6188-89EE-6A0B-40BF3A474D2D}"/>
-              </a:ext>
-            </a:extLst>
-          </p:cNvPr>
+          <p:cNvPr id="213" name="Google Shape;213;p21"/>
           <p:cNvSpPr txBox="1"/>
           <p:nvPr/>
         </p:nvSpPr>
@@ -19508,11 +19150,6 @@
         </p:txBody>
       </p:sp>
     </p:spTree>
-    <p:extLst>
-      <p:ext uri="{BB962C8B-B14F-4D97-AF65-F5344CB8AC3E}">
-        <p14:creationId xmlns:p14="http://schemas.microsoft.com/office/powerpoint/2010/main" val="3341665539"/>
-      </p:ext>
-    </p:extLst>
   </p:cSld>
   <p:clrMapOvr>
     <a:masterClrMapping/>
@@ -19525,7 +19162,7 @@
   <p:cSld>
     <p:spTree>
       <p:nvGrpSpPr>
-        <p:cNvPr id="1" name="Shape 107"/>
+        <p:cNvPr id="1" name="Shape 93"/>
         <p:cNvGrpSpPr/>
         <p:nvPr/>
       </p:nvGrpSpPr>
@@ -19539,7 +19176,7 @@
       </p:grpSpPr>
       <p:sp>
         <p:nvSpPr>
-          <p:cNvPr id="108" name="Google Shape;108;g3a1cf8ce4d7_0_0"/>
+          <p:cNvPr id="94" name="Google Shape;94;p2"/>
           <p:cNvSpPr txBox="1"/>
           <p:nvPr/>
         </p:nvSpPr>
@@ -19580,7 +19217,7 @@
               <a:buNone/>
             </a:pPr>
             <a:r>
-              <a:rPr lang="en-US" sz="5400" b="0" i="0" u="none" strike="noStrike" cap="none" dirty="0">
+              <a:rPr lang="en-US" sz="5400" b="0" i="0" u="none" strike="noStrike" cap="none">
                 <a:solidFill>
                   <a:schemeClr val="dk1"/>
                 </a:solidFill>
@@ -19591,7 +19228,7 @@
               </a:rPr>
               <a:t>This Week’s Agenda</a:t>
             </a:r>
-            <a:endParaRPr sz="1400" b="0" i="0" u="none" strike="noStrike" cap="none" dirty="0">
+            <a:endParaRPr sz="1400" b="0" i="0" u="none" strike="noStrike" cap="none">
               <a:solidFill>
                 <a:srgbClr val="000000"/>
               </a:solidFill>
@@ -19605,7 +19242,7 @@
       </p:sp>
       <p:sp>
         <p:nvSpPr>
-          <p:cNvPr id="109" name="Google Shape;109;g3a1cf8ce4d7_0_0"/>
+          <p:cNvPr id="95" name="Google Shape;95;p2"/>
           <p:cNvSpPr txBox="1"/>
           <p:nvPr/>
         </p:nvSpPr>
@@ -19646,7 +19283,7 @@
               <a:buNone/>
             </a:pPr>
             <a:r>
-              <a:rPr lang="en-US" sz="2000" b="1" i="0" u="none" strike="noStrike" cap="none" dirty="0">
+              <a:rPr lang="en-US" sz="2000" b="1" i="0" u="none" strike="noStrike" cap="none">
                 <a:solidFill>
                   <a:schemeClr val="dk1"/>
                 </a:solidFill>
@@ -19657,6 +19294,7 @@
               </a:rPr>
               <a:t>AI News</a:t>
             </a:r>
+            <a:endParaRPr/>
           </a:p>
           <a:p>
             <a:pPr marL="0" marR="0" lvl="0" indent="0" algn="l" rtl="0">
@@ -19676,7 +19314,7 @@
               <a:buFont typeface="Arial"/>
               <a:buNone/>
             </a:pPr>
-            <a:endParaRPr lang="en-US" sz="2000" b="1" i="0" u="none" strike="noStrike" cap="none" dirty="0">
+            <a:endParaRPr sz="2000" b="1" i="0" u="none" strike="noStrike" cap="none">
               <a:solidFill>
                 <a:schemeClr val="dk1"/>
               </a:solidFill>
@@ -19705,7 +19343,7 @@
               <a:buNone/>
             </a:pPr>
             <a:r>
-              <a:rPr lang="en-US" sz="2000" b="1" i="0" u="none" strike="noStrike" cap="none" dirty="0">
+              <a:rPr lang="en-US" sz="2000" b="1" i="0" u="none" strike="noStrike" cap="none">
                 <a:solidFill>
                   <a:schemeClr val="dk1"/>
                 </a:solidFill>
@@ -19716,7 +19354,7 @@
               </a:rPr>
               <a:t>Generative Language Models</a:t>
             </a:r>
-            <a:endParaRPr sz="1800" b="0" i="0" u="none" strike="noStrike" cap="none" dirty="0">
+            <a:endParaRPr sz="1800" b="0" i="0" u="none" strike="noStrike" cap="none">
               <a:solidFill>
                 <a:schemeClr val="dk1"/>
               </a:solidFill>
@@ -19745,7 +19383,7 @@
               <a:buChar char="•"/>
             </a:pPr>
             <a:r>
-              <a:rPr lang="en-US" sz="1800" b="0" i="0" u="none" strike="noStrike" cap="none" dirty="0">
+              <a:rPr lang="en-US" sz="1800" b="0" i="0" u="none" strike="noStrike" cap="none">
                 <a:solidFill>
                   <a:schemeClr val="dk1"/>
                 </a:solidFill>
@@ -19756,7 +19394,15 @@
               </a:rPr>
               <a:t>Machine translation</a:t>
             </a:r>
-            <a:endParaRPr dirty="0"/>
+            <a:endParaRPr sz="1400" b="0" i="0" u="none" strike="noStrike" cap="none">
+              <a:solidFill>
+                <a:srgbClr val="000000"/>
+              </a:solidFill>
+              <a:latin typeface="Arial"/>
+              <a:ea typeface="Arial"/>
+              <a:cs typeface="Arial"/>
+              <a:sym typeface="Arial"/>
+            </a:endParaRPr>
           </a:p>
           <a:p>
             <a:pPr marL="342900" marR="0" lvl="0" indent="-342900" algn="l" rtl="0">
@@ -19777,7 +19423,7 @@
               <a:buChar char="•"/>
             </a:pPr>
             <a:r>
-              <a:rPr lang="en-US" sz="1800" b="0" i="0" u="none" strike="noStrike" cap="none" dirty="0">
+              <a:rPr lang="en-US" sz="1800" b="0" i="0" u="none" strike="noStrike" cap="none">
                 <a:solidFill>
                   <a:schemeClr val="dk1"/>
                 </a:solidFill>
@@ -19788,7 +19434,15 @@
               </a:rPr>
               <a:t>Large language models</a:t>
             </a:r>
-            <a:endParaRPr dirty="0"/>
+            <a:endParaRPr sz="1400" b="0" i="0" u="none" strike="noStrike" cap="none">
+              <a:solidFill>
+                <a:srgbClr val="000000"/>
+              </a:solidFill>
+              <a:latin typeface="Arial"/>
+              <a:ea typeface="Arial"/>
+              <a:cs typeface="Arial"/>
+              <a:sym typeface="Arial"/>
+            </a:endParaRPr>
           </a:p>
           <a:p>
             <a:pPr marL="342900" marR="0" lvl="0" indent="-342900" algn="l" rtl="0">
@@ -19809,7 +19463,7 @@
               <a:buChar char="•"/>
             </a:pPr>
             <a:r>
-              <a:rPr lang="en-US" sz="1800" b="0" i="0" u="none" strike="noStrike" cap="none" dirty="0">
+              <a:rPr lang="en-US" sz="1800" b="0" i="0" u="none" strike="noStrike" cap="none">
                 <a:solidFill>
                   <a:schemeClr val="dk1"/>
                 </a:solidFill>
@@ -19820,7 +19474,15 @@
               </a:rPr>
               <a:t>Auto-regressive (large) language models</a:t>
             </a:r>
-            <a:endParaRPr dirty="0"/>
+            <a:endParaRPr sz="1400" b="0" i="0" u="none" strike="noStrike" cap="none">
+              <a:solidFill>
+                <a:srgbClr val="000000"/>
+              </a:solidFill>
+              <a:latin typeface="Arial"/>
+              <a:ea typeface="Arial"/>
+              <a:cs typeface="Arial"/>
+              <a:sym typeface="Arial"/>
+            </a:endParaRPr>
           </a:p>
           <a:p>
             <a:pPr marL="342900" marR="0" lvl="0" indent="-342900" algn="l" rtl="0">
@@ -19841,7 +19503,7 @@
               <a:buChar char="•"/>
             </a:pPr>
             <a:r>
-              <a:rPr lang="en-US" sz="1800" b="0" i="0" u="none" strike="noStrike" cap="none" dirty="0">
+              <a:rPr lang="en-US" sz="1800" b="0" i="0" u="none" strike="noStrike" cap="none">
                 <a:solidFill>
                   <a:schemeClr val="dk1"/>
                 </a:solidFill>
@@ -19852,7 +19514,7 @@
               </a:rPr>
               <a:t>Pre-trained LLMs</a:t>
             </a:r>
-            <a:endParaRPr lang="en-US" sz="1800" dirty="0">
+            <a:endParaRPr sz="1800" b="0" i="0" u="none" strike="noStrike" cap="none">
               <a:solidFill>
                 <a:schemeClr val="dk1"/>
               </a:solidFill>
@@ -19881,22 +19543,32 @@
               <a:buChar char="•"/>
             </a:pPr>
             <a:r>
-              <a:rPr lang="en-US" sz="1800" dirty="0">
+              <a:rPr lang="en-US" sz="1800" b="0" i="0" u="none" strike="noStrike" cap="none">
                 <a:solidFill>
                   <a:schemeClr val="dk1"/>
                 </a:solidFill>
                 <a:latin typeface="Quicksand"/>
+                <a:ea typeface="Quicksand"/>
+                <a:cs typeface="Quicksand"/>
                 <a:sym typeface="Quicksand"/>
               </a:rPr>
               <a:t>LLM + RAG</a:t>
             </a:r>
-            <a:endParaRPr dirty="0"/>
+            <a:endParaRPr sz="1400" b="0" i="0" u="none" strike="noStrike" cap="none">
+              <a:solidFill>
+                <a:srgbClr val="000000"/>
+              </a:solidFill>
+              <a:latin typeface="Arial"/>
+              <a:ea typeface="Arial"/>
+              <a:cs typeface="Arial"/>
+              <a:sym typeface="Arial"/>
+            </a:endParaRPr>
           </a:p>
         </p:txBody>
       </p:sp>
       <p:pic>
         <p:nvPicPr>
-          <p:cNvPr id="110" name="Google Shape;110;g3a1cf8ce4d7_0_0" descr="Build an Effective Meeting Agenda Template | WorkPatterns"/>
+          <p:cNvPr id="96" name="Google Shape;96;p2" descr="Build an Effective Meeting Agenda Template | WorkPatterns"/>
           <p:cNvPicPr preferRelativeResize="0"/>
           <p:nvPr/>
         </p:nvPicPr>
@@ -19934,7 +19606,7 @@
   <p:cSld>
     <p:spTree>
       <p:nvGrpSpPr>
-        <p:cNvPr id="1" name="Shape 114"/>
+        <p:cNvPr id="1" name="Shape 100"/>
         <p:cNvGrpSpPr/>
         <p:nvPr/>
       </p:nvGrpSpPr>
@@ -19948,14 +19620,14 @@
       </p:grpSpPr>
       <p:sp>
         <p:nvSpPr>
-          <p:cNvPr id="115" name="Google Shape;115;p33"/>
+          <p:cNvPr id="101" name="Google Shape;101;p3"/>
           <p:cNvSpPr txBox="1"/>
           <p:nvPr/>
         </p:nvSpPr>
         <p:spPr>
           <a:xfrm>
-            <a:off x="2865521" y="586938"/>
-            <a:ext cx="6460957" cy="923330"/>
+            <a:off x="1215528" y="586938"/>
+            <a:ext cx="9760944" cy="923289"/>
           </a:xfrm>
           <a:prstGeom prst="rect">
             <a:avLst/>
@@ -19989,7 +19661,7 @@
               <a:buNone/>
             </a:pPr>
             <a:r>
-              <a:rPr lang="en-US" sz="5400" b="0" i="0" u="none" strike="noStrike" cap="none">
+              <a:rPr lang="en-US" sz="5400" b="0" i="0" u="none" strike="noStrike" cap="none" dirty="0">
                 <a:solidFill>
                   <a:schemeClr val="dk1"/>
                 </a:solidFill>
@@ -19998,9 +19670,9 @@
                 <a:cs typeface="Economica"/>
                 <a:sym typeface="Economica"/>
               </a:rPr>
-              <a:t>Recall: Machine Translation</a:t>
+              <a:t>Machine Translation: Encoder-Decoder</a:t>
             </a:r>
-            <a:endParaRPr sz="1400" b="0" i="0" u="none" strike="noStrike" cap="none">
+            <a:endParaRPr sz="1400" b="0" i="0" u="none" strike="noStrike" cap="none" dirty="0">
               <a:solidFill>
                 <a:srgbClr val="000000"/>
               </a:solidFill>
@@ -20014,7 +19686,7 @@
       </p:sp>
       <p:sp>
         <p:nvSpPr>
-          <p:cNvPr id="116" name="Google Shape;116;p33"/>
+          <p:cNvPr id="102" name="Google Shape;102;p3"/>
           <p:cNvSpPr txBox="1"/>
           <p:nvPr/>
         </p:nvSpPr>
@@ -20168,7 +19840,15 @@
               </a:rPr>
               <a:t>We are not just generating ‘plausible’ text now; we are generating plausible text that aligns with (i.e., conditioned upon) the input text.</a:t>
             </a:r>
-            <a:endParaRPr/>
+            <a:endParaRPr sz="1400" b="0" i="0" u="none" strike="noStrike" cap="none">
+              <a:solidFill>
+                <a:srgbClr val="000000"/>
+              </a:solidFill>
+              <a:latin typeface="Arial"/>
+              <a:ea typeface="Arial"/>
+              <a:cs typeface="Arial"/>
+              <a:sym typeface="Arial"/>
+            </a:endParaRPr>
           </a:p>
           <a:p>
             <a:pPr marL="342900" marR="0" lvl="0" indent="-228600" algn="l" rtl="0">
@@ -20266,7 +19946,7 @@
       </p:sp>
       <p:pic>
         <p:nvPicPr>
-          <p:cNvPr id="117" name="Google Shape;117;p33" descr="image"/>
+          <p:cNvPr id="103" name="Google Shape;103;p3" descr="image"/>
           <p:cNvPicPr preferRelativeResize="0"/>
           <p:nvPr/>
         </p:nvPicPr>
@@ -20304,7 +19984,7 @@
   <p:cSld>
     <p:spTree>
       <p:nvGrpSpPr>
-        <p:cNvPr id="1" name="Shape 121"/>
+        <p:cNvPr id="1" name="Shape 107"/>
         <p:cNvGrpSpPr/>
         <p:nvPr/>
       </p:nvGrpSpPr>
@@ -20318,7 +19998,7 @@
       </p:grpSpPr>
       <p:sp>
         <p:nvSpPr>
-          <p:cNvPr id="122" name="Google Shape;122;p34"/>
+          <p:cNvPr id="108" name="Google Shape;108;p4"/>
           <p:cNvSpPr txBox="1"/>
           <p:nvPr/>
         </p:nvSpPr>
@@ -20359,7 +20039,7 @@
               <a:buNone/>
             </a:pPr>
             <a:r>
-              <a:rPr lang="en-US" sz="5400" b="0" i="0" u="none" strike="noStrike" cap="none">
+              <a:rPr lang="en-US" sz="5400" b="0" i="0" u="none" strike="noStrike" cap="none" dirty="0">
                 <a:solidFill>
                   <a:schemeClr val="dk1"/>
                 </a:solidFill>
@@ -20368,9 +20048,9 @@
                 <a:cs typeface="Economica"/>
                 <a:sym typeface="Economica"/>
               </a:rPr>
-              <a:t>Machine Translation with Transformers</a:t>
+              <a:t>Encoder-Decoder with Transformers</a:t>
             </a:r>
-            <a:endParaRPr sz="1400" b="0" i="0" u="none" strike="noStrike" cap="none">
+            <a:endParaRPr sz="1400" b="0" i="0" u="none" strike="noStrike" cap="none" dirty="0">
               <a:solidFill>
                 <a:srgbClr val="000000"/>
               </a:solidFill>
@@ -20384,7 +20064,7 @@
       </p:sp>
       <p:sp>
         <p:nvSpPr>
-          <p:cNvPr id="123" name="Google Shape;123;p34"/>
+          <p:cNvPr id="109" name="Google Shape;109;p4"/>
           <p:cNvSpPr txBox="1"/>
           <p:nvPr/>
         </p:nvSpPr>
@@ -20487,7 +20167,15 @@
               </a:rPr>
               <a:t>Transformers are an architecture that wraps MultiHeadAttention(). We have some residual connections inside and some LayerNormalization() operations, with a couple of Dense layers on the output. </a:t>
             </a:r>
-            <a:endParaRPr/>
+            <a:endParaRPr sz="1400" b="0" i="0" u="none" strike="noStrike" cap="none">
+              <a:solidFill>
+                <a:srgbClr val="000000"/>
+              </a:solidFill>
+              <a:latin typeface="Arial"/>
+              <a:ea typeface="Arial"/>
+              <a:cs typeface="Arial"/>
+              <a:sym typeface="Arial"/>
+            </a:endParaRPr>
           </a:p>
           <a:p>
             <a:pPr marL="342900" marR="0" lvl="0" indent="-228600" algn="l" rtl="0">
@@ -20547,7 +20235,15 @@
               </a:rPr>
               <a:t>We also need to create a special masking layer to prevent the Transformer from looking ahead in the target sequence.</a:t>
             </a:r>
-            <a:endParaRPr/>
+            <a:endParaRPr sz="1400" b="0" i="0" u="none" strike="noStrike" cap="none">
+              <a:solidFill>
+                <a:srgbClr val="000000"/>
+              </a:solidFill>
+              <a:latin typeface="Arial"/>
+              <a:ea typeface="Arial"/>
+              <a:cs typeface="Arial"/>
+              <a:sym typeface="Arial"/>
+            </a:endParaRPr>
           </a:p>
           <a:p>
             <a:pPr marL="342900" marR="0" lvl="0" indent="-228600" algn="l" rtl="0">
@@ -20621,7 +20317,7 @@
       </p:sp>
       <p:pic>
         <p:nvPicPr>
-          <p:cNvPr id="124" name="Google Shape;124;p34" descr="image"/>
+          <p:cNvPr id="110" name="Google Shape;110;p4" descr="image"/>
           <p:cNvPicPr preferRelativeResize="0"/>
           <p:nvPr/>
         </p:nvPicPr>
@@ -20659,7 +20355,7 @@
   <p:cSld>
     <p:spTree>
       <p:nvGrpSpPr>
-        <p:cNvPr id="1" name="Shape 141"/>
+        <p:cNvPr id="1" name="Shape 114"/>
         <p:cNvGrpSpPr/>
         <p:nvPr/>
       </p:nvGrpSpPr>
@@ -20673,7 +20369,7 @@
       </p:grpSpPr>
       <p:sp>
         <p:nvSpPr>
-          <p:cNvPr id="142" name="Google Shape;142;p37"/>
+          <p:cNvPr id="115" name="Google Shape;115;p5"/>
           <p:cNvSpPr txBox="1"/>
           <p:nvPr/>
         </p:nvSpPr>
@@ -20739,7 +20435,7 @@
       </p:sp>
       <p:sp>
         <p:nvSpPr>
-          <p:cNvPr id="143" name="Google Shape;143;p37"/>
+          <p:cNvPr id="116" name="Google Shape;116;p5"/>
           <p:cNvSpPr txBox="1"/>
           <p:nvPr/>
         </p:nvSpPr>
@@ -20772,6 +20468,11 @@
               <a:spcAft>
                 <a:spcPts val="0"/>
               </a:spcAft>
+              <a:buClr>
+                <a:srgbClr val="000000"/>
+              </a:buClr>
+              <a:buSzPts val="1400"/>
+              <a:buFont typeface="Arial"/>
               <a:buNone/>
             </a:pPr>
             <a:r>
@@ -20830,6 +20531,11 @@
               <a:spcAft>
                 <a:spcPts val="0"/>
               </a:spcAft>
+              <a:buClr>
+                <a:srgbClr val="000000"/>
+              </a:buClr>
+              <a:buSzPts val="1400"/>
+              <a:buFont typeface="Arial"/>
               <a:buNone/>
             </a:pPr>
             <a:r>
@@ -20888,6 +20594,11 @@
               <a:spcAft>
                 <a:spcPts val="0"/>
               </a:spcAft>
+              <a:buClr>
+                <a:srgbClr val="000000"/>
+              </a:buClr>
+              <a:buSzPts val="1400"/>
+              <a:buFont typeface="Arial"/>
               <a:buNone/>
             </a:pPr>
             <a:r>
@@ -20935,6 +20646,11 @@
               <a:spcAft>
                 <a:spcPts val="0"/>
               </a:spcAft>
+              <a:buClr>
+                <a:srgbClr val="000000"/>
+              </a:buClr>
+              <a:buSzPts val="1400"/>
+              <a:buFont typeface="Arial"/>
               <a:buNone/>
             </a:pPr>
             <a:endParaRPr sz="1400" b="1" i="0" u="none" strike="noStrike" cap="none">
@@ -21052,7 +20768,15 @@
               </a:rPr>
               <a:t> The attended representation of the entire English sentence acts as both the "key" and "value." The "key" is used to compute attention weights (how much each English word should be attended to), and the "value" is the information that gets weighted and incorporated into the Spanish sequence.</a:t>
             </a:r>
-            <a:endParaRPr/>
+            <a:endParaRPr sz="1400" b="0" i="0" u="none" strike="noStrike" cap="none">
+              <a:solidFill>
+                <a:srgbClr val="000000"/>
+              </a:solidFill>
+              <a:latin typeface="Arial"/>
+              <a:ea typeface="Arial"/>
+              <a:cs typeface="Arial"/>
+              <a:sym typeface="Arial"/>
+            </a:endParaRPr>
           </a:p>
           <a:p>
             <a:pPr marL="0" marR="0" lvl="0" indent="0" algn="l" rtl="0">
@@ -21065,6 +20789,11 @@
               <a:spcAft>
                 <a:spcPts val="0"/>
               </a:spcAft>
+              <a:buClr>
+                <a:srgbClr val="000000"/>
+              </a:buClr>
+              <a:buSzPts val="1400"/>
+              <a:buFont typeface="Arial"/>
               <a:buNone/>
             </a:pPr>
             <a:endParaRPr sz="1400" b="0" i="0" u="none" strike="noStrike" cap="none">
@@ -21088,6 +20817,11 @@
               <a:spcAft>
                 <a:spcPts val="0"/>
               </a:spcAft>
+              <a:buClr>
+                <a:srgbClr val="000000"/>
+              </a:buClr>
+              <a:buSzPts val="1400"/>
+              <a:buFont typeface="Arial"/>
               <a:buNone/>
             </a:pPr>
             <a:r>
@@ -21114,13 +20848,21 @@
               </a:rPr>
               <a:t> The attention weights from comparing the query (Spanish) and key (English) are applied to the value (English). This results in a context vector representing the most relevant information from the English sentence for predicting the next Spanish word.</a:t>
             </a:r>
-            <a:endParaRPr/>
+            <a:endParaRPr sz="1400" b="0" i="0" u="none" strike="noStrike" cap="none">
+              <a:solidFill>
+                <a:srgbClr val="000000"/>
+              </a:solidFill>
+              <a:latin typeface="Arial"/>
+              <a:ea typeface="Arial"/>
+              <a:cs typeface="Arial"/>
+              <a:sym typeface="Arial"/>
+            </a:endParaRPr>
           </a:p>
         </p:txBody>
       </p:sp>
       <p:pic>
         <p:nvPicPr>
-          <p:cNvPr id="144" name="Google Shape;144;p37" descr="image"/>
+          <p:cNvPr id="117" name="Google Shape;117;p5" descr="image"/>
           <p:cNvPicPr preferRelativeResize="0"/>
           <p:nvPr/>
         </p:nvPicPr>
@@ -21158,7 +20900,7 @@
   <p:cSld>
     <p:spTree>
       <p:nvGrpSpPr>
-        <p:cNvPr id="1" name="Shape 148"/>
+        <p:cNvPr id="1" name="Shape 121"/>
         <p:cNvGrpSpPr/>
         <p:nvPr/>
       </p:nvGrpSpPr>
@@ -21172,7 +20914,7 @@
       </p:grpSpPr>
       <p:sp>
         <p:nvSpPr>
-          <p:cNvPr id="149" name="Google Shape;149;p38"/>
+          <p:cNvPr id="122" name="Google Shape;122;p6"/>
           <p:cNvSpPr txBox="1"/>
           <p:nvPr/>
         </p:nvSpPr>
@@ -21238,7 +20980,7 @@
       </p:sp>
       <p:sp>
         <p:nvSpPr>
-          <p:cNvPr id="150" name="Google Shape;150;p38"/>
+          <p:cNvPr id="123" name="Google Shape;123;p6"/>
           <p:cNvSpPr txBox="1"/>
           <p:nvPr/>
         </p:nvSpPr>
@@ -21425,7 +21167,15 @@
               </a:rPr>
               <a:t>ransformers. </a:t>
             </a:r>
-            <a:endParaRPr/>
+            <a:endParaRPr sz="1400" b="0" i="0" u="none" strike="noStrike" cap="none">
+              <a:solidFill>
+                <a:srgbClr val="000000"/>
+              </a:solidFill>
+              <a:latin typeface="Arial"/>
+              <a:ea typeface="Arial"/>
+              <a:cs typeface="Arial"/>
+              <a:sym typeface="Arial"/>
+            </a:endParaRPr>
           </a:p>
           <a:p>
             <a:pPr marL="342900" marR="0" lvl="0" indent="-228600" algn="l" rtl="0">
@@ -21485,7 +21235,15 @@
               </a:rPr>
               <a:t>Employs a similar (self-supervised learning) technique as Word2Vec. Mask 15% of words at random in any given sequence and then try to predict those using the words that are not masked. </a:t>
             </a:r>
-            <a:endParaRPr/>
+            <a:endParaRPr sz="1400" b="0" i="0" u="none" strike="noStrike" cap="none">
+              <a:solidFill>
+                <a:srgbClr val="000000"/>
+              </a:solidFill>
+              <a:latin typeface="Arial"/>
+              <a:ea typeface="Arial"/>
+              <a:cs typeface="Arial"/>
+              <a:sym typeface="Arial"/>
+            </a:endParaRPr>
           </a:p>
           <a:p>
             <a:pPr marL="342900" marR="0" lvl="0" indent="-228600" algn="l" rtl="0">
@@ -21559,7 +21317,7 @@
       </p:sp>
       <p:pic>
         <p:nvPicPr>
-          <p:cNvPr id="151" name="Google Shape;151;p38" descr="Bert | Muppet Wiki | Fandom"/>
+          <p:cNvPr id="124" name="Google Shape;124;p6" descr="Bert | Muppet Wiki | Fandom"/>
           <p:cNvPicPr preferRelativeResize="0"/>
           <p:nvPr/>
         </p:nvPicPr>
@@ -21597,7 +21355,7 @@
   <p:cSld>
     <p:spTree>
       <p:nvGrpSpPr>
-        <p:cNvPr id="1" name="Shape 155"/>
+        <p:cNvPr id="1" name="Shape 128"/>
         <p:cNvGrpSpPr/>
         <p:nvPr/>
       </p:nvGrpSpPr>
@@ -21611,7 +21369,7 @@
       </p:grpSpPr>
       <p:sp>
         <p:nvSpPr>
-          <p:cNvPr id="156" name="Google Shape;156;p39"/>
+          <p:cNvPr id="129" name="Google Shape;129;p7"/>
           <p:cNvSpPr txBox="1"/>
           <p:nvPr/>
         </p:nvSpPr>
@@ -21677,7 +21435,7 @@
       </p:sp>
       <p:sp>
         <p:nvSpPr>
-          <p:cNvPr id="157" name="Google Shape;157;p39"/>
+          <p:cNvPr id="130" name="Google Shape;130;p7"/>
           <p:cNvSpPr txBox="1"/>
           <p:nvPr/>
         </p:nvSpPr>
@@ -21780,7 +21538,15 @@
               </a:rPr>
               <a:t>For a given sentence, you can extract the contextual word embeddings from *after* the MultiHeadAttention layers and then average them. </a:t>
             </a:r>
-            <a:endParaRPr/>
+            <a:endParaRPr sz="1400" b="0" i="0" u="none" strike="noStrike" cap="none">
+              <a:solidFill>
+                <a:srgbClr val="000000"/>
+              </a:solidFill>
+              <a:latin typeface="Arial"/>
+              <a:ea typeface="Arial"/>
+              <a:cs typeface="Arial"/>
+              <a:sym typeface="Arial"/>
+            </a:endParaRPr>
           </a:p>
           <a:p>
             <a:pPr marL="342900" marR="0" lvl="0" indent="-228600" algn="l" rtl="0">
@@ -21821,6 +21587,11 @@
               <a:spcAft>
                 <a:spcPts val="0"/>
               </a:spcAft>
+              <a:buClr>
+                <a:srgbClr val="000000"/>
+              </a:buClr>
+              <a:buSzPts val="1800"/>
+              <a:buFont typeface="Arial"/>
               <a:buNone/>
             </a:pPr>
             <a:r>
@@ -21835,7 +21606,15 @@
               </a:rPr>
               <a:t>Pre-Trained BERT Classifier</a:t>
             </a:r>
-            <a:endParaRPr/>
+            <a:endParaRPr sz="1400" b="0" i="0" u="none" strike="noStrike" cap="none">
+              <a:solidFill>
+                <a:srgbClr val="000000"/>
+              </a:solidFill>
+              <a:latin typeface="Arial"/>
+              <a:ea typeface="Arial"/>
+              <a:cs typeface="Arial"/>
+              <a:sym typeface="Arial"/>
+            </a:endParaRPr>
           </a:p>
           <a:p>
             <a:pPr marL="0" marR="0" lvl="0" indent="0" algn="l" rtl="0">
@@ -21848,6 +21627,11 @@
               <a:spcAft>
                 <a:spcPts val="0"/>
               </a:spcAft>
+              <a:buClr>
+                <a:srgbClr val="000000"/>
+              </a:buClr>
+              <a:buSzPts val="1800"/>
+              <a:buFont typeface="Arial"/>
               <a:buNone/>
             </a:pPr>
             <a:endParaRPr sz="1800" b="0" i="0" u="none" strike="noStrike" cap="none">
@@ -21890,7 +21674,15 @@
               </a:rPr>
               <a:t>Or load a pre-trained BERT model’s transformer and embedding layers (backbone / base layers) to pre-process your text and obtain contextual embeddings for a given prediction task.</a:t>
             </a:r>
-            <a:endParaRPr/>
+            <a:endParaRPr sz="1400" b="0" i="0" u="none" strike="noStrike" cap="none">
+              <a:solidFill>
+                <a:srgbClr val="000000"/>
+              </a:solidFill>
+              <a:latin typeface="Arial"/>
+              <a:ea typeface="Arial"/>
+              <a:cs typeface="Arial"/>
+              <a:sym typeface="Arial"/>
+            </a:endParaRPr>
           </a:p>
           <a:p>
             <a:pPr marL="285750" marR="0" lvl="0" indent="-171450" algn="l" rtl="0">
@@ -21950,7 +21742,15 @@
               </a:rPr>
               <a:t>Or, load the embedding and attention layers, freeze them, and add your Dense layers on top like we did with pre-trained vision models.</a:t>
             </a:r>
-            <a:endParaRPr/>
+            <a:endParaRPr sz="1400" b="0" i="0" u="none" strike="noStrike" cap="none">
+              <a:solidFill>
+                <a:srgbClr val="000000"/>
+              </a:solidFill>
+              <a:latin typeface="Arial"/>
+              <a:ea typeface="Arial"/>
+              <a:cs typeface="Arial"/>
+              <a:sym typeface="Arial"/>
+            </a:endParaRPr>
           </a:p>
           <a:p>
             <a:pPr marL="0" marR="0" lvl="0" indent="0" algn="l" rtl="0">
@@ -21963,6 +21763,11 @@
               <a:spcAft>
                 <a:spcPts val="0"/>
               </a:spcAft>
+              <a:buClr>
+                <a:srgbClr val="000000"/>
+              </a:buClr>
+              <a:buSzPts val="1800"/>
+              <a:buFont typeface="Arial"/>
               <a:buNone/>
             </a:pPr>
             <a:endParaRPr sz="1800" b="0" i="0" u="none" strike="noStrike" cap="none">
@@ -21979,7 +21784,7 @@
       </p:sp>
       <p:pic>
         <p:nvPicPr>
-          <p:cNvPr id="158" name="Google Shape;158;p39"/>
+          <p:cNvPr id="131" name="Google Shape;131;p7"/>
           <p:cNvPicPr preferRelativeResize="0"/>
           <p:nvPr/>
         </p:nvPicPr>
@@ -22017,7 +21822,7 @@
   <p:cSld>
     <p:spTree>
       <p:nvGrpSpPr>
-        <p:cNvPr id="1" name="Shape 162"/>
+        <p:cNvPr id="1" name="Shape 135"/>
         <p:cNvGrpSpPr/>
         <p:nvPr/>
       </p:nvGrpSpPr>
@@ -22031,7 +21836,7 @@
       </p:grpSpPr>
       <p:sp>
         <p:nvSpPr>
-          <p:cNvPr id="163" name="Google Shape;163;p40"/>
+          <p:cNvPr id="136" name="Google Shape;136;p8"/>
           <p:cNvSpPr txBox="1"/>
           <p:nvPr/>
         </p:nvSpPr>
@@ -22097,7 +21902,7 @@
       </p:sp>
       <p:sp>
         <p:nvSpPr>
-          <p:cNvPr id="164" name="Google Shape;164;p40"/>
+          <p:cNvPr id="137" name="Google Shape;137;p8"/>
           <p:cNvSpPr txBox="1"/>
           <p:nvPr/>
         </p:nvSpPr>
@@ -22200,7 +22005,15 @@
               </a:rPr>
               <a:t>Wav2vec implements a self-supervised learning architecture with random masking of sequence input for audio. </a:t>
             </a:r>
-            <a:endParaRPr/>
+            <a:endParaRPr sz="1400" b="0" i="0" u="none" strike="noStrike" cap="none">
+              <a:solidFill>
+                <a:srgbClr val="000000"/>
+              </a:solidFill>
+              <a:latin typeface="Arial"/>
+              <a:ea typeface="Arial"/>
+              <a:cs typeface="Arial"/>
+              <a:sym typeface="Arial"/>
+            </a:endParaRPr>
           </a:p>
           <a:p>
             <a:pPr marL="342900" marR="0" lvl="0" indent="-228600" algn="l" rtl="0">
@@ -22260,7 +22073,15 @@
               </a:rPr>
               <a:t>The model first obtains 1D convolutional feature maps per chunk/segment of raw audio signal (spoken words), yielding sequences of feature maps.</a:t>
             </a:r>
-            <a:endParaRPr/>
+            <a:endParaRPr sz="1400" b="0" i="0" u="none" strike="noStrike" cap="none">
+              <a:solidFill>
+                <a:srgbClr val="000000"/>
+              </a:solidFill>
+              <a:latin typeface="Arial"/>
+              <a:ea typeface="Arial"/>
+              <a:cs typeface="Arial"/>
+              <a:sym typeface="Arial"/>
+            </a:endParaRPr>
           </a:p>
           <a:p>
             <a:pPr marL="342900" marR="0" lvl="0" indent="-228600" algn="l" rtl="0">
@@ -22320,13 +22141,21 @@
               </a:rPr>
               <a:t>A random subsample of feature maps is masked, and the model tries to predict them from the feature maps that remain visible. This model then yields audio embeddings highly representative of spoken semantic content in audio. </a:t>
             </a:r>
-            <a:endParaRPr/>
+            <a:endParaRPr sz="1400" b="0" i="0" u="none" strike="noStrike" cap="none">
+              <a:solidFill>
+                <a:srgbClr val="000000"/>
+              </a:solidFill>
+              <a:latin typeface="Arial"/>
+              <a:ea typeface="Arial"/>
+              <a:cs typeface="Arial"/>
+              <a:sym typeface="Arial"/>
+            </a:endParaRPr>
           </a:p>
         </p:txBody>
       </p:sp>
       <p:pic>
         <p:nvPicPr>
-          <p:cNvPr id="165" name="Google Shape;165;p40"/>
+          <p:cNvPr id="138" name="Google Shape;138;p8"/>
           <p:cNvPicPr preferRelativeResize="0"/>
           <p:nvPr/>
         </p:nvPicPr>
@@ -22364,13 +22193,7 @@
   <p:cSld>
     <p:spTree>
       <p:nvGrpSpPr>
-        <p:cNvPr id="1" name="Shape 162">
-          <a:extLst>
-            <a:ext uri="{FF2B5EF4-FFF2-40B4-BE49-F238E27FC236}">
-              <a16:creationId xmlns:a16="http://schemas.microsoft.com/office/drawing/2014/main" id="{9CDBED6B-E7DD-2350-50BA-FEFE7DDC0637}"/>
-            </a:ext>
-          </a:extLst>
-        </p:cNvPr>
+        <p:cNvPr id="1" name="Shape 142"/>
         <p:cNvGrpSpPr/>
         <p:nvPr/>
       </p:nvGrpSpPr>
@@ -22384,13 +22207,7 @@
       </p:grpSpPr>
       <p:sp>
         <p:nvSpPr>
-          <p:cNvPr id="163" name="Google Shape;163;p40">
-            <a:extLst>
-              <a:ext uri="{FF2B5EF4-FFF2-40B4-BE49-F238E27FC236}">
-                <a16:creationId xmlns:a16="http://schemas.microsoft.com/office/drawing/2014/main" id="{674DEE1F-F12B-EDEA-4644-960D08F836CE}"/>
-              </a:ext>
-            </a:extLst>
-          </p:cNvPr>
+          <p:cNvPr id="143" name="Google Shape;143;p9"/>
           <p:cNvSpPr txBox="1"/>
           <p:nvPr/>
         </p:nvSpPr>
@@ -22431,18 +22248,18 @@
               <a:buNone/>
             </a:pPr>
             <a:r>
-              <a:rPr lang="en-US" sz="5400" b="0" i="0" u="none" strike="noStrike" cap="none" dirty="0">
+              <a:rPr lang="en-US" sz="5400" b="0" i="0" u="none" strike="noStrike" cap="none">
                 <a:solidFill>
                   <a:schemeClr val="dk1"/>
                 </a:solidFill>
                 <a:latin typeface="Economica"/>
-                <a:ea typeface="Arial"/>
-                <a:cs typeface="Arial"/>
+                <a:ea typeface="Economica"/>
+                <a:cs typeface="Economica"/>
                 <a:sym typeface="Economica"/>
               </a:rPr>
               <a:t>‘Physics’ Representations from Video</a:t>
             </a:r>
-            <a:endParaRPr sz="1400" b="0" i="0" u="none" strike="noStrike" cap="none" dirty="0">
+            <a:endParaRPr sz="1400" b="0" i="0" u="none" strike="noStrike" cap="none">
               <a:solidFill>
                 <a:srgbClr val="000000"/>
               </a:solidFill>
@@ -22456,23 +22273,16 @@
       </p:sp>
       <p:pic>
         <p:nvPicPr>
-          <p:cNvPr id="2" name="Picture 1">
-            <a:extLst>
-              <a:ext uri="{FF2B5EF4-FFF2-40B4-BE49-F238E27FC236}">
-                <a16:creationId xmlns:a16="http://schemas.microsoft.com/office/drawing/2014/main" id="{0DF1832B-7635-6707-5887-FB9DE5B6C37E}"/>
-              </a:ext>
-            </a:extLst>
-          </p:cNvPr>
-          <p:cNvPicPr>
-            <a:picLocks noChangeAspect="1"/>
-          </p:cNvPicPr>
+          <p:cNvPr id="144" name="Google Shape;144;p9"/>
+          <p:cNvPicPr preferRelativeResize="0"/>
           <p:nvPr/>
         </p:nvPicPr>
-        <p:blipFill>
-          <a:blip r:embed="rId3"/>
-          <a:stretch>
-            <a:fillRect/>
-          </a:stretch>
+        <p:blipFill rotWithShape="1">
+          <a:blip r:embed="rId3">
+            <a:alphaModFix/>
+          </a:blip>
+          <a:srcRect/>
+          <a:stretch/>
         </p:blipFill>
         <p:spPr>
           <a:xfrm>
@@ -22482,14 +22292,13 @@
           <a:prstGeom prst="rect">
             <a:avLst/>
           </a:prstGeom>
+          <a:noFill/>
+          <a:ln>
+            <a:noFill/>
+          </a:ln>
         </p:spPr>
       </p:pic>
     </p:spTree>
-    <p:extLst>
-      <p:ext uri="{BB962C8B-B14F-4D97-AF65-F5344CB8AC3E}">
-        <p14:creationId xmlns:p14="http://schemas.microsoft.com/office/powerpoint/2010/main" val="2440153311"/>
-      </p:ext>
-    </p:extLst>
   </p:cSld>
   <p:clrMapOvr>
     <a:masterClrMapping/>
